--- a/Loss_Performance_Store_11252_Sep2026.pptx
+++ b/Loss_Performance_Store_11252_Sep2026.pptx
@@ -18,12 +18,10 @@
     <p:sldId id="260" r:id="rId6"/>
     <p:sldId id="2147474420" r:id="rId8"/>
     <p:sldId id="2147474421" r:id="rId7"/>
+    <p:sldId id="2147474404" r:id="rId9"/>
+    <p:sldId id="2147474405" r:id="rId10"/>
     <p:sldId id="2147474422" r:id="rId19"/>
     <p:sldId id="2147474423" r:id="rId20"/>
-    <p:sldId id="2147474404" r:id="rId9"/>
-    <p:sldId id="2147474405" r:id="rId10"/>
-    <p:sldId id="2147474424" r:id="rId21"/>
-    <p:sldId id="2147474425" r:id="rId22"/>
     <p:sldId id="2142533150" r:id="rId11"/>
   </p:sldIdLst>
   <p:sldSz cx="12192000" cy="6858000"/>
@@ -3360,2574 +3358,6 @@
         <p:cNvPr id="1" name="">
           <a:extLst>
             <a:ext uri="{FF2B5EF4-FFF2-40B4-BE49-F238E27FC236}">
-              <a16:creationId xmlns:a16="http://schemas.microsoft.com/office/drawing/2014/main" id="{B36229DE-A439-D108-AB05-F58B1EDE7F9A}"/>
-            </a:ext>
-          </a:extLst>
-        </p:cNvPr>
-        <p:cNvGrpSpPr/>
-        <p:nvPr/>
-      </p:nvGrpSpPr>
-      <p:grpSpPr>
-        <a:xfrm>
-          <a:off x="0" y="0"/>
-          <a:ext cx="0" cy="0"/>
-          <a:chOff x="0" y="0"/>
-          <a:chExt cx="0" cy="0"/>
-        </a:xfrm>
-      </p:grpSpPr>
-      <p:sp>
-        <p:nvSpPr>
-          <p:cNvPr id="2" name="Text Placeholder 1">
-            <a:extLst>
-              <a:ext uri="{FF2B5EF4-FFF2-40B4-BE49-F238E27FC236}">
-                <a16:creationId xmlns:a16="http://schemas.microsoft.com/office/drawing/2014/main" id="{D279D278-012B-152D-3870-B77B33997103}"/>
-              </a:ext>
-            </a:extLst>
-          </p:cNvPr>
-          <p:cNvSpPr>
-            <a:spLocks noGrp="1"/>
-          </p:cNvSpPr>
-          <p:nvPr>
-            <p:ph type="body" sz="quarter" idx="13"/>
-          </p:nvPr>
-        </p:nvSpPr>
-        <p:spPr>
-          <a:xfrm>
-            <a:off x="2509750" y="0"/>
-            <a:ext cx="9418056" cy="518867"/>
-          </a:xfrm>
-        </p:spPr>
-        <p:txBody>
-          <a:bodyPr>
-            <a:normAutofit/>
-          </a:bodyPr>
-          <a:lstStyle/>
-          <a:p>
-            <a:r>
-              <a:rPr lang="en-US" sz="2400" dirty="0">
-                <a:latin typeface="Tahoma" panose="020B0604030504040204" pitchFamily="34" charset="0"/>
-                <a:ea typeface="Tahoma" panose="020B0604030504040204" pitchFamily="34" charset="0"/>
-                <a:cs typeface="Tahoma" panose="020B0604030504040204" pitchFamily="34" charset="0"/>
-              </a:rPr>
-              <a:t>Action plan  </a:t>
-            </a:r>
-          </a:p>
-          <a:p>
-            <a:endParaRPr lang="en-US" sz="2400" dirty="0">
-              <a:latin typeface="Tahoma" panose="020B0604030504040204" pitchFamily="34" charset="0"/>
-              <a:ea typeface="Tahoma" panose="020B0604030504040204" pitchFamily="34" charset="0"/>
-              <a:cs typeface="Tahoma" panose="020B0604030504040204" pitchFamily="34" charset="0"/>
-            </a:endParaRPr>
-          </a:p>
-          <a:p>
-            <a:endParaRPr lang="en-US" dirty="0"/>
-          </a:p>
-        </p:txBody>
-      </p:sp>
-      <p:graphicFrame>
-        <p:nvGraphicFramePr>
-          <p:cNvPr id="3" name="Table 5">
-            <a:extLst>
-              <a:ext uri="{FF2B5EF4-FFF2-40B4-BE49-F238E27FC236}">
-                <a16:creationId xmlns:a16="http://schemas.microsoft.com/office/drawing/2014/main" id="{9F2D99E8-4FBF-E4C6-111F-F2DEAAEDC37F}"/>
-              </a:ext>
-            </a:extLst>
-          </p:cNvPr>
-          <p:cNvGraphicFramePr>
-            <a:graphicFrameLocks noGrp="1"/>
-          </p:cNvGraphicFramePr>
-          <p:nvPr>
-            <p:extLst>
-              <p:ext uri="{D42A27DB-BD31-4B8C-83A1-F6EECF244321}">
-                <p14:modId xmlns:p14="http://schemas.microsoft.com/office/powerpoint/2010/main" val="342574285"/>
-              </p:ext>
-            </p:extLst>
-          </p:nvPr>
-        </p:nvGraphicFramePr>
-        <p:xfrm>
-          <a:off x="394252" y="837330"/>
-          <a:ext cx="11424497" cy="4961642"/>
-        </p:xfrm>
-        <a:graphic>
-          <a:graphicData uri="http://schemas.openxmlformats.org/drawingml/2006/table">
-            <a:tbl>
-              <a:tblPr firstRow="1" bandRow="1">
-                <a:tableStyleId>{F5AB1C69-6EDB-4FF4-983F-18BD219EF322}</a:tableStyleId>
-              </a:tblPr>
-              <a:tblGrid>
-                <a:gridCol w="580906">
-                  <a:extLst>
-                    <a:ext uri="{9D8B030D-6E8A-4147-A177-3AD203B41FA5}">
-                      <a16:colId xmlns:a16="http://schemas.microsoft.com/office/drawing/2014/main" val="50567754"/>
-                    </a:ext>
-                  </a:extLst>
-                </a:gridCol>
-                <a:gridCol w="2647936">
-                  <a:extLst>
-                    <a:ext uri="{9D8B030D-6E8A-4147-A177-3AD203B41FA5}">
-                      <a16:colId xmlns:a16="http://schemas.microsoft.com/office/drawing/2014/main" val="2465639924"/>
-                    </a:ext>
-                  </a:extLst>
-                </a:gridCol>
-                <a:gridCol w="3519578">
-                  <a:extLst>
-                    <a:ext uri="{9D8B030D-6E8A-4147-A177-3AD203B41FA5}">
-                      <a16:colId xmlns:a16="http://schemas.microsoft.com/office/drawing/2014/main" val="1011173274"/>
-                    </a:ext>
-                  </a:extLst>
-                </a:gridCol>
-                <a:gridCol w="1992702">
-                  <a:extLst>
-                    <a:ext uri="{9D8B030D-6E8A-4147-A177-3AD203B41FA5}">
-                      <a16:colId xmlns:a16="http://schemas.microsoft.com/office/drawing/2014/main" val="3843171633"/>
-                    </a:ext>
-                  </a:extLst>
-                </a:gridCol>
-                <a:gridCol w="1062985">
-                  <a:extLst>
-                    <a:ext uri="{9D8B030D-6E8A-4147-A177-3AD203B41FA5}">
-                      <a16:colId xmlns:a16="http://schemas.microsoft.com/office/drawing/2014/main" val="1439720936"/>
-                    </a:ext>
-                  </a:extLst>
-                </a:gridCol>
-                <a:gridCol w="1620390">
-                  <a:extLst>
-                    <a:ext uri="{9D8B030D-6E8A-4147-A177-3AD203B41FA5}">
-                      <a16:colId xmlns:a16="http://schemas.microsoft.com/office/drawing/2014/main" val="3308817400"/>
-                    </a:ext>
-                  </a:extLst>
-                </a:gridCol>
-              </a:tblGrid>
-              <a:tr h="455744">
-                <a:tc>
-                  <a:txBody>
-                    <a:bodyPr/>
-                    <a:lstStyle/>
-                    <a:p>
-                      <a:pPr algn="ctr"/>
-                      <a:r>
-                        <a:rPr lang="en-US" sz="1400" dirty="0">
-                          <a:solidFill>
-                            <a:schemeClr val="tx1"/>
-                          </a:solidFill>
-                          <a:latin typeface="Tahoma" panose="020B0604030504040204" pitchFamily="34" charset="0"/>
-                          <a:ea typeface="Tahoma" panose="020B0604030504040204" pitchFamily="34" charset="0"/>
-                          <a:cs typeface="Tahoma" panose="020B0604030504040204" pitchFamily="34" charset="0"/>
-                        </a:rPr>
-                        <a:t>No.</a:t>
-                      </a:r>
-                    </a:p>
-                  </a:txBody>
-                  <a:tcPr anchor="ctr"/>
-                </a:tc>
-                <a:tc>
-                  <a:txBody>
-                    <a:bodyPr/>
-                    <a:lstStyle/>
-                    <a:p>
-                      <a:pPr algn="ctr"/>
-                      <a:r>
-                        <a:rPr lang="en-US" sz="1400" dirty="0">
-                          <a:solidFill>
-                            <a:schemeClr val="tx1"/>
-                          </a:solidFill>
-                          <a:latin typeface="Tahoma" panose="020B0604030504040204" pitchFamily="34" charset="0"/>
-                          <a:ea typeface="Tahoma" panose="020B0604030504040204" pitchFamily="34" charset="0"/>
-                          <a:cs typeface="Tahoma" panose="020B0604030504040204" pitchFamily="34" charset="0"/>
-                        </a:rPr>
-                        <a:t>Root cause</a:t>
-                      </a:r>
-                    </a:p>
-                  </a:txBody>
-                  <a:tcPr anchor="ctr"/>
-                </a:tc>
-                <a:tc>
-                  <a:txBody>
-                    <a:bodyPr/>
-                    <a:lstStyle/>
-                    <a:p>
-                      <a:pPr algn="ctr"/>
-                      <a:r>
-                        <a:rPr lang="en-US" sz="1400" dirty="0">
-                          <a:solidFill>
-                            <a:schemeClr val="tx1"/>
-                          </a:solidFill>
-                          <a:latin typeface="Tahoma" panose="020B0604030504040204" pitchFamily="34" charset="0"/>
-                          <a:ea typeface="Tahoma" panose="020B0604030504040204" pitchFamily="34" charset="0"/>
-                          <a:cs typeface="Tahoma" panose="020B0604030504040204" pitchFamily="34" charset="0"/>
-                        </a:rPr>
-                        <a:t>Action</a:t>
-                      </a:r>
-                    </a:p>
-                  </a:txBody>
-                  <a:tcPr anchor="ctr"/>
-                </a:tc>
-                <a:tc>
-                  <a:txBody>
-                    <a:bodyPr/>
-                    <a:lstStyle/>
-                    <a:p>
-                      <a:pPr algn="ctr"/>
-                      <a:r>
-                        <a:rPr lang="en-US" sz="1400" dirty="0">
-                          <a:solidFill>
-                            <a:schemeClr val="tx1"/>
-                          </a:solidFill>
-                          <a:latin typeface="Tahoma" panose="020B0604030504040204" pitchFamily="34" charset="0"/>
-                          <a:ea typeface="Tahoma" panose="020B0604030504040204" pitchFamily="34" charset="0"/>
-                          <a:cs typeface="Tahoma" panose="020B0604030504040204" pitchFamily="34" charset="0"/>
-                        </a:rPr>
-                        <a:t>Who</a:t>
-                      </a:r>
-                    </a:p>
-                  </a:txBody>
-                  <a:tcPr anchor="ctr"/>
-                </a:tc>
-                <a:tc>
-                  <a:txBody>
-                    <a:bodyPr/>
-                    <a:lstStyle/>
-                    <a:p>
-                      <a:pPr algn="ctr"/>
-                      <a:r>
-                        <a:rPr lang="en-US" sz="1400" dirty="0">
-                          <a:solidFill>
-                            <a:schemeClr val="tx1"/>
-                          </a:solidFill>
-                          <a:latin typeface="Tahoma" panose="020B0604030504040204" pitchFamily="34" charset="0"/>
-                          <a:ea typeface="Tahoma" panose="020B0604030504040204" pitchFamily="34" charset="0"/>
-                          <a:cs typeface="Tahoma" panose="020B0604030504040204" pitchFamily="34" charset="0"/>
-                        </a:rPr>
-                        <a:t>When</a:t>
-                      </a:r>
-                    </a:p>
-                  </a:txBody>
-                  <a:tcPr anchor="ctr"/>
-                </a:tc>
-                <a:tc>
-                  <a:txBody>
-                    <a:bodyPr/>
-                    <a:lstStyle/>
-                    <a:p>
-                      <a:pPr algn="ctr"/>
-                      <a:r>
-                        <a:rPr lang="en-US" sz="1400" dirty="0">
-                          <a:solidFill>
-                            <a:schemeClr val="tx1"/>
-                          </a:solidFill>
-                          <a:latin typeface="Tahoma" panose="020B0604030504040204" pitchFamily="34" charset="0"/>
-                          <a:ea typeface="Tahoma" panose="020B0604030504040204" pitchFamily="34" charset="0"/>
-                          <a:cs typeface="Tahoma" panose="020B0604030504040204" pitchFamily="34" charset="0"/>
-                        </a:rPr>
-                        <a:t>Monitoring</a:t>
-                      </a:r>
-                    </a:p>
-                  </a:txBody>
-                  <a:tcPr anchor="ctr"/>
-                </a:tc>
-                <a:extLst>
-                  <a:ext uri="{0D108BD9-81ED-4DB2-BD59-A6C34878D82A}">
-                    <a16:rowId xmlns:a16="http://schemas.microsoft.com/office/drawing/2014/main" val="2309402925"/>
-                  </a:ext>
-                </a:extLst>
-              </a:tr>
-              <a:tr h="1027257">
-                <a:tc>
-                  <a:txBody>
-                    <a:bodyPr/>
-                    <a:lstStyle/>
-                    <a:p>
-                      <a:pPr algn="ctr"/>
-                      <a:r>
-                        <a:rPr lang="en-US" sz="1100" dirty="0">
-                          <a:latin typeface="Tahoma" panose="020B0604030504040204" pitchFamily="34" charset="0"/>
-                          <a:ea typeface="Tahoma" panose="020B0604030504040204" pitchFamily="34" charset="0"/>
-                          <a:cs typeface="Tahoma" panose="020B0604030504040204" pitchFamily="34" charset="0"/>
-                        </a:rPr>
-                        <a:t>1</a:t>
-                      </a:r>
-                    </a:p>
-                  </a:txBody>
-                  <a:tcPr/>
-                </a:tc>
-                <a:tc>
-                  <a:txBody>
-                    <a:bodyPr/>
-                    <a:lstStyle/>
-                    <a:p>
-                      <a:r>
-                        <a:rPr lang="en-US" sz="1100" u="sng" dirty="0">
-                          <a:latin typeface="Tahoma" panose="020B0604030504040204" pitchFamily="34" charset="0"/>
-                          <a:ea typeface="Tahoma" panose="020B0604030504040204" pitchFamily="34" charset="0"/>
-                          <a:cs typeface="Tahoma" panose="020B0604030504040204" pitchFamily="34" charset="0"/>
-                        </a:rPr>
-                        <a:t>Dry Food</a:t>
-                      </a:r>
-                      <a:br>
-                        <a:rPr lang="en-US" sz="1100" u="sng" dirty="0">
-                          <a:latin typeface="Tahoma" panose="020B0604030504040204" pitchFamily="34" charset="0"/>
-                          <a:ea typeface="Tahoma" panose="020B0604030504040204" pitchFamily="34" charset="0"/>
-                          <a:cs typeface="Tahoma" panose="020B0604030504040204" pitchFamily="34" charset="0"/>
-                        </a:rPr>
-                      </a:br>
-                      <a:r>
-                        <a:rPr lang="en-US" sz="1100" u="sng" dirty="0">
-                          <a:latin typeface="Tahoma" panose="020B0604030504040204" pitchFamily="34" charset="0"/>
-                          <a:ea typeface="Tahoma" panose="020B0604030504040204" pitchFamily="34" charset="0"/>
-                          <a:cs typeface="Tahoma" panose="020B0604030504040204" pitchFamily="34" charset="0"/>
-                        </a:rPr>
-                        <a:t>Damage</a:t>
-                      </a:r>
-                    </a:p>
-                    <a:p>
-                      <a:pPr marL="171450" indent="-171450">
-                        <a:buFontTx/>
-                        <a:buChar char="-"/>
-                      </a:pPr>
-                      <a:r>
-                        <a:rPr lang="th-TH" sz="1100" dirty="0">
-                          <a:latin typeface="Tahoma" panose="020B0604030504040204" pitchFamily="34" charset="0"/>
-                          <a:ea typeface="Tahoma" panose="020B0604030504040204" pitchFamily="34" charset="0"/>
-                          <a:cs typeface="Tahoma" panose="020B0604030504040204" pitchFamily="34" charset="0"/>
-                        </a:rPr>
-                        <a:t>สินค้าหมดอายุลดราคาและยังขายไม่หมด เนื่องจากไม่เป็นที่นิยมและราคาสูง</a:t>
-                      </a:r>
-                      <a:r>
-                        <a:rPr lang="en-US" sz="1100" dirty="0">
-                          <a:latin typeface="Tahoma" panose="020B0604030504040204" pitchFamily="34" charset="0"/>
-                          <a:ea typeface="Tahoma" panose="020B0604030504040204" pitchFamily="34" charset="0"/>
-                          <a:cs typeface="Tahoma" panose="020B0604030504040204" pitchFamily="34" charset="0"/>
-                        </a:rPr>
-                        <a:t> </a:t>
-                      </a:r>
-                    </a:p>
-                    <a:p>
-                      <a:pPr marL="0" indent="0">
-                        <a:buFontTx/>
-                        <a:buNone/>
-                      </a:pPr>
-                      <a:endParaRPr lang="th-TH" sz="1100" dirty="0">
-                        <a:latin typeface="Tahoma" panose="020B0604030504040204" pitchFamily="34" charset="0"/>
-                        <a:ea typeface="Tahoma" panose="020B0604030504040204" pitchFamily="34" charset="0"/>
-                        <a:cs typeface="Tahoma" panose="020B0604030504040204" pitchFamily="34" charset="0"/>
-                      </a:endParaRPr>
-                    </a:p>
-                  </a:txBody>
-                  <a:tcPr/>
-                </a:tc>
-                <a:tc>
-                  <a:txBody>
-                    <a:bodyPr/>
-                    <a:lstStyle/>
-                    <a:p>
-                      <a:pPr marL="228600" indent="-228600">
-                        <a:buAutoNum type="arabicPeriod"/>
-                      </a:pPr>
-                      <a:r>
-                        <a:rPr lang="th-TH" sz="1100" dirty="0">
-                          <a:latin typeface="Tahoma" panose="020B0604030504040204" pitchFamily="34" charset="0"/>
-                          <a:ea typeface="Tahoma" panose="020B0604030504040204" pitchFamily="34" charset="0"/>
-                          <a:cs typeface="Tahoma" panose="020B0604030504040204" pitchFamily="34" charset="0"/>
-                        </a:rPr>
-                        <a:t>แผนกและพีซีร่วมกันตรวจสอบสินค้าใกล้หมดอายุใน 2 เดือนถัดไป ในแต่ละแผนกตั้งแต่วันที่ 15 ของเดือน เพื่อทำการส่งข้อมูลใน </a:t>
-                      </a:r>
-                      <a:r>
-                        <a:rPr lang="en-US" sz="1100" dirty="0">
-                          <a:latin typeface="Tahoma" panose="020B0604030504040204" pitchFamily="34" charset="0"/>
-                          <a:ea typeface="Tahoma" panose="020B0604030504040204" pitchFamily="34" charset="0"/>
-                          <a:cs typeface="Tahoma" panose="020B0604030504040204" pitchFamily="34" charset="0"/>
-                        </a:rPr>
-                        <a:t>Pilot </a:t>
-                      </a:r>
-                      <a:r>
-                        <a:rPr lang="th-TH" sz="1100" dirty="0">
-                          <a:latin typeface="Tahoma" panose="020B0604030504040204" pitchFamily="34" charset="0"/>
-                          <a:ea typeface="Tahoma" panose="020B0604030504040204" pitchFamily="34" charset="0"/>
-                          <a:cs typeface="Tahoma" panose="020B0604030504040204" pitchFamily="34" charset="0"/>
-                        </a:rPr>
-                        <a:t>ทำการขอลดราคาตามขั้นตอน</a:t>
-                      </a:r>
-                    </a:p>
-                    <a:p>
-                      <a:pPr marL="228600" indent="-228600">
-                        <a:buAutoNum type="arabicPeriod"/>
-                      </a:pPr>
-                      <a:r>
-                        <a:rPr lang="en-US" sz="1100" dirty="0">
-                          <a:latin typeface="Tahoma" panose="020B0604030504040204" pitchFamily="34" charset="0"/>
-                          <a:ea typeface="Tahoma" panose="020B0604030504040204" pitchFamily="34" charset="0"/>
-                          <a:cs typeface="Tahoma" panose="020B0604030504040204" pitchFamily="34" charset="0"/>
-                        </a:rPr>
-                        <a:t>LP </a:t>
-                      </a:r>
-                      <a:r>
-                        <a:rPr lang="th-TH" sz="1100" dirty="0">
-                          <a:latin typeface="Tahoma" panose="020B0604030504040204" pitchFamily="34" charset="0"/>
-                          <a:ea typeface="Tahoma" panose="020B0604030504040204" pitchFamily="34" charset="0"/>
-                          <a:cs typeface="Tahoma" panose="020B0604030504040204" pitchFamily="34" charset="0"/>
-                        </a:rPr>
-                        <a:t>และแผนกตรวจสอบรายการสินค้า </a:t>
-                      </a:r>
-                      <a:r>
-                        <a:rPr lang="en-US" sz="1100" dirty="0">
-                          <a:latin typeface="Tahoma" panose="020B0604030504040204" pitchFamily="34" charset="0"/>
-                          <a:ea typeface="Tahoma" panose="020B0604030504040204" pitchFamily="34" charset="0"/>
-                          <a:cs typeface="Tahoma" panose="020B0604030504040204" pitchFamily="34" charset="0"/>
-                        </a:rPr>
-                        <a:t>Nearly Expire </a:t>
-                      </a:r>
-                      <a:r>
-                        <a:rPr lang="th-TH" sz="1100" dirty="0">
-                          <a:latin typeface="Tahoma" panose="020B0604030504040204" pitchFamily="34" charset="0"/>
-                          <a:ea typeface="Tahoma" panose="020B0604030504040204" pitchFamily="34" charset="0"/>
-                          <a:cs typeface="Tahoma" panose="020B0604030504040204" pitchFamily="34" charset="0"/>
-                        </a:rPr>
-                        <a:t>ที่ได้มาจากระบบทุกวันอังคาร และดำเนินการลดราคาสินค้าตามขั้นตอน กรณีพบสินค้าที่ใกล้หมดอายุ</a:t>
-                      </a:r>
-                      <a:endParaRPr lang="en-US" sz="1100" dirty="0">
-                        <a:latin typeface="Tahoma" panose="020B0604030504040204" pitchFamily="34" charset="0"/>
-                        <a:ea typeface="Tahoma" panose="020B0604030504040204" pitchFamily="34" charset="0"/>
-                        <a:cs typeface="Tahoma" panose="020B0604030504040204" pitchFamily="34" charset="0"/>
-                      </a:endParaRPr>
-                    </a:p>
-                    <a:p>
-                      <a:pPr marL="228600" indent="-228600">
-                        <a:buAutoNum type="arabicPeriod"/>
-                      </a:pPr>
-                      <a:r>
-                        <a:rPr lang="th-TH" sz="1100" dirty="0">
-                          <a:latin typeface="Tahoma" panose="020B0604030504040204" pitchFamily="34" charset="0"/>
-                          <a:ea typeface="Tahoma" panose="020B0604030504040204" pitchFamily="34" charset="0"/>
-                          <a:cs typeface="Tahoma" panose="020B0604030504040204" pitchFamily="34" charset="0"/>
-                        </a:rPr>
-                        <a:t>สินค้าที่มีพีซีดูแล หากพบหมดอายุโดยไม่ทำตามขั้นตอน  ให้ต้นสังกัดเป็นผู้รับผิดชอบความเสียหาย</a:t>
-                      </a:r>
-                    </a:p>
-                    <a:p>
-                      <a:pPr marL="228600" indent="-228600">
-                        <a:buAutoNum type="arabicPeriod"/>
-                      </a:pPr>
-                      <a:r>
-                        <a:rPr lang="th-TH" sz="1100" dirty="0">
-                          <a:latin typeface="Tahoma" panose="020B0604030504040204" pitchFamily="34" charset="0"/>
-                          <a:ea typeface="Tahoma" panose="020B0604030504040204" pitchFamily="34" charset="0"/>
-                          <a:cs typeface="Tahoma" panose="020B0604030504040204" pitchFamily="34" charset="0"/>
-                        </a:rPr>
-                        <a:t>สินค้าที่มีการทำลายที่มีมูลค่า 500 บาทต่อ 1 </a:t>
-                      </a:r>
-                      <a:r>
-                        <a:rPr lang="en-US" sz="1100" dirty="0">
-                          <a:latin typeface="Tahoma" panose="020B0604030504040204" pitchFamily="34" charset="0"/>
-                          <a:ea typeface="Tahoma" panose="020B0604030504040204" pitchFamily="34" charset="0"/>
-                          <a:cs typeface="Tahoma" panose="020B0604030504040204" pitchFamily="34" charset="0"/>
-                        </a:rPr>
-                        <a:t>Item </a:t>
-                      </a:r>
-                      <a:r>
-                        <a:rPr lang="th-TH" sz="1100" dirty="0">
-                          <a:latin typeface="Tahoma" panose="020B0604030504040204" pitchFamily="34" charset="0"/>
-                          <a:ea typeface="Tahoma" panose="020B0604030504040204" pitchFamily="34" charset="0"/>
-                          <a:cs typeface="Tahoma" panose="020B0604030504040204" pitchFamily="34" charset="0"/>
-                        </a:rPr>
-                        <a:t>จะต้องแจ้งให้ </a:t>
-                      </a:r>
-                      <a:r>
-                        <a:rPr lang="en-US" sz="1100" dirty="0">
-                          <a:latin typeface="Tahoma" panose="020B0604030504040204" pitchFamily="34" charset="0"/>
-                          <a:ea typeface="Tahoma" panose="020B0604030504040204" pitchFamily="34" charset="0"/>
-                          <a:cs typeface="Tahoma" panose="020B0604030504040204" pitchFamily="34" charset="0"/>
-                        </a:rPr>
-                        <a:t>M1 </a:t>
-                      </a:r>
-                      <a:r>
-                        <a:rPr lang="th-TH" sz="1100" dirty="0">
-                          <a:latin typeface="Tahoma" panose="020B0604030504040204" pitchFamily="34" charset="0"/>
-                          <a:ea typeface="Tahoma" panose="020B0604030504040204" pitchFamily="34" charset="0"/>
-                          <a:cs typeface="Tahoma" panose="020B0604030504040204" pitchFamily="34" charset="0"/>
-                        </a:rPr>
-                        <a:t>ทราบและอนุมัติ</a:t>
-                      </a:r>
-                    </a:p>
-                    <a:p>
-                      <a:pPr marL="228600" indent="-228600">
-                        <a:buAutoNum type="arabicPeriod"/>
-                      </a:pPr>
-                      <a:r>
-                        <a:rPr lang="en-US" sz="1100" dirty="0">
-                          <a:latin typeface="Tahoma" panose="020B0604030504040204" pitchFamily="34" charset="0"/>
-                          <a:ea typeface="Tahoma" panose="020B0604030504040204" pitchFamily="34" charset="0"/>
-                          <a:cs typeface="Tahoma" panose="020B0604030504040204" pitchFamily="34" charset="0"/>
-                        </a:rPr>
-                        <a:t>Stockroom </a:t>
-                      </a:r>
-                      <a:r>
-                        <a:rPr lang="th-TH" sz="1100" dirty="0">
-                          <a:latin typeface="Tahoma" panose="020B0604030504040204" pitchFamily="34" charset="0"/>
-                          <a:ea typeface="Tahoma" panose="020B0604030504040204" pitchFamily="34" charset="0"/>
-                          <a:cs typeface="Tahoma" panose="020B0604030504040204" pitchFamily="34" charset="0"/>
-                        </a:rPr>
-                        <a:t>ต้องได้ตาม </a:t>
-                      </a:r>
-                      <a:r>
-                        <a:rPr lang="en-US" sz="1100" dirty="0">
-                          <a:latin typeface="Tahoma" panose="020B0604030504040204" pitchFamily="34" charset="0"/>
-                          <a:ea typeface="Tahoma" panose="020B0604030504040204" pitchFamily="34" charset="0"/>
-                          <a:cs typeface="Tahoma" panose="020B0604030504040204" pitchFamily="34" charset="0"/>
-                        </a:rPr>
-                        <a:t>Standard </a:t>
-                      </a:r>
-                      <a:r>
-                        <a:rPr lang="th-TH" sz="1100" dirty="0">
-                          <a:latin typeface="Tahoma" panose="020B0604030504040204" pitchFamily="34" charset="0"/>
-                          <a:ea typeface="Tahoma" panose="020B0604030504040204" pitchFamily="34" charset="0"/>
-                          <a:cs typeface="Tahoma" panose="020B0604030504040204" pitchFamily="34" charset="0"/>
-                        </a:rPr>
-                        <a:t>ทุกวัน เพื่อลดสินค้าเสียหายและหมดอายุใน </a:t>
-                      </a:r>
-                      <a:r>
-                        <a:rPr lang="en-US" sz="1100" dirty="0">
-                          <a:latin typeface="Tahoma" panose="020B0604030504040204" pitchFamily="34" charset="0"/>
-                          <a:ea typeface="Tahoma" panose="020B0604030504040204" pitchFamily="34" charset="0"/>
-                          <a:cs typeface="Tahoma" panose="020B0604030504040204" pitchFamily="34" charset="0"/>
-                        </a:rPr>
-                        <a:t>Stockroom</a:t>
-                      </a:r>
-                      <a:endParaRPr lang="th-TH" sz="1100" dirty="0">
-                        <a:latin typeface="Tahoma" panose="020B0604030504040204" pitchFamily="34" charset="0"/>
-                        <a:ea typeface="Tahoma" panose="020B0604030504040204" pitchFamily="34" charset="0"/>
-                        <a:cs typeface="Tahoma" panose="020B0604030504040204" pitchFamily="34" charset="0"/>
-                      </a:endParaRPr>
-                    </a:p>
-                  </a:txBody>
-                  <a:tcPr/>
-                </a:tc>
-                <a:tc>
-                  <a:txBody>
-                    <a:bodyPr/>
-                    <a:lstStyle/>
-                    <a:p>
-                      <a:pPr marL="0" marR="0" lvl="0" indent="0" algn="l" defTabSz="761970" rtl="0" eaLnBrk="1" fontAlgn="auto" latinLnBrk="0" hangingPunct="1">
-                        <a:lnSpc>
-                          <a:spcPct val="100000"/>
-                        </a:lnSpc>
-                        <a:spcBef>
-                          <a:spcPts val="0"/>
-                        </a:spcBef>
-                        <a:spcAft>
-                          <a:spcPts val="0"/>
-                        </a:spcAft>
-                        <a:buClrTx/>
-                        <a:buSzTx/>
-                        <a:buFontTx/>
-                        <a:buNone/>
-                        <a:tabLst/>
-                        <a:defRPr/>
-                      </a:pPr>
-                      <a:r>
-                        <a:rPr lang="en-US" sz="1100" kern="1200" dirty="0">
-                          <a:solidFill>
-                            <a:schemeClr val="tx1"/>
-                          </a:solidFill>
-                          <a:latin typeface="Tahoma" panose="020B0604030504040204" pitchFamily="34" charset="0"/>
-                          <a:ea typeface="Tahoma" panose="020B0604030504040204" pitchFamily="34" charset="0"/>
-                          <a:cs typeface="Tahoma" panose="020B0604030504040204" pitchFamily="34" charset="0"/>
-                        </a:rPr>
-                        <a:t>M1 ,M.Opt,C3,C9,LP</a:t>
-                      </a:r>
-                      <a:endParaRPr lang="th-TH" sz="1100" kern="1200" dirty="0">
-                        <a:solidFill>
-                          <a:schemeClr val="tx1"/>
-                        </a:solidFill>
-                        <a:latin typeface="Tahoma" panose="020B0604030504040204" pitchFamily="34" charset="0"/>
-                        <a:ea typeface="Tahoma" panose="020B0604030504040204" pitchFamily="34" charset="0"/>
-                        <a:cs typeface="Tahoma" panose="020B0604030504040204" pitchFamily="34" charset="0"/>
-                      </a:endParaRPr>
-                    </a:p>
-                  </a:txBody>
-                  <a:tcPr/>
-                </a:tc>
-                <a:tc>
-                  <a:txBody>
-                    <a:bodyPr/>
-                    <a:lstStyle/>
-                    <a:p>
-                      <a:r>
-                        <a:rPr lang="en-US" sz="1100" dirty="0">
-                          <a:latin typeface="Tahoma" panose="020B0604030504040204" pitchFamily="34" charset="0"/>
-                          <a:ea typeface="Tahoma" panose="020B0604030504040204" pitchFamily="34" charset="0"/>
-                          <a:cs typeface="Tahoma" panose="020B0604030504040204" pitchFamily="34" charset="0"/>
-                        </a:rPr>
-                        <a:t>Jan – Dec 2026</a:t>
-                      </a:r>
-                    </a:p>
-                  </a:txBody>
-                  <a:tcPr/>
-                </a:tc>
-                <a:tc>
-                  <a:txBody>
-                    <a:bodyPr/>
-                    <a:lstStyle/>
-                    <a:p>
-                      <a:r>
-                        <a:rPr lang="th-TH" sz="1100" dirty="0">
-                          <a:latin typeface="Tahoma" panose="020B0604030504040204" pitchFamily="34" charset="0"/>
-                          <a:ea typeface="Tahoma" panose="020B0604030504040204" pitchFamily="34" charset="0"/>
-                          <a:cs typeface="Tahoma" panose="020B0604030504040204" pitchFamily="34" charset="0"/>
-                        </a:rPr>
-                        <a:t>1.</a:t>
-                      </a:r>
-                      <a:r>
-                        <a:rPr lang="en-US" sz="1100" dirty="0">
-                          <a:latin typeface="Tahoma" panose="020B0604030504040204" pitchFamily="34" charset="0"/>
-                          <a:ea typeface="Tahoma" panose="020B0604030504040204" pitchFamily="34" charset="0"/>
-                          <a:cs typeface="Tahoma" panose="020B0604030504040204" pitchFamily="34" charset="0"/>
-                        </a:rPr>
-                        <a:t>M1 </a:t>
-                      </a:r>
-                      <a:r>
-                        <a:rPr lang="th-TH" sz="1100" dirty="0">
-                          <a:latin typeface="Tahoma" panose="020B0604030504040204" pitchFamily="34" charset="0"/>
-                          <a:ea typeface="Tahoma" panose="020B0604030504040204" pitchFamily="34" charset="0"/>
-                          <a:cs typeface="Tahoma" panose="020B0604030504040204" pitchFamily="34" charset="0"/>
-                        </a:rPr>
-                        <a:t>ตรวจสอบรายการที่ต้องส่ง </a:t>
-                      </a:r>
-                      <a:r>
-                        <a:rPr lang="en-US" sz="1100" dirty="0">
-                          <a:latin typeface="Tahoma" panose="020B0604030504040204" pitchFamily="34" charset="0"/>
-                          <a:ea typeface="Tahoma" panose="020B0604030504040204" pitchFamily="34" charset="0"/>
-                          <a:cs typeface="Tahoma" panose="020B0604030504040204" pitchFamily="34" charset="0"/>
-                        </a:rPr>
-                        <a:t>Pilot </a:t>
-                      </a:r>
-                      <a:r>
-                        <a:rPr lang="th-TH" sz="1100" dirty="0">
-                          <a:latin typeface="Tahoma" panose="020B0604030504040204" pitchFamily="34" charset="0"/>
-                          <a:ea typeface="Tahoma" panose="020B0604030504040204" pitchFamily="34" charset="0"/>
-                          <a:cs typeface="Tahoma" panose="020B0604030504040204" pitchFamily="34" charset="0"/>
-                        </a:rPr>
-                        <a:t>ทุกๆ วันที่ 25 ของทุกเดือน</a:t>
-                      </a:r>
-                    </a:p>
-                    <a:p>
-                      <a:r>
-                        <a:rPr lang="th-TH" sz="1100" dirty="0">
-                          <a:latin typeface="Tahoma" panose="020B0604030504040204" pitchFamily="34" charset="0"/>
-                          <a:ea typeface="Tahoma" panose="020B0604030504040204" pitchFamily="34" charset="0"/>
-                          <a:cs typeface="Tahoma" panose="020B0604030504040204" pitchFamily="34" charset="0"/>
-                        </a:rPr>
-                        <a:t>2.ทุกวันศุกร์ </a:t>
-                      </a:r>
-                      <a:r>
-                        <a:rPr lang="en-US" sz="1100" dirty="0">
-                          <a:latin typeface="Tahoma" panose="020B0604030504040204" pitchFamily="34" charset="0"/>
-                          <a:ea typeface="Tahoma" panose="020B0604030504040204" pitchFamily="34" charset="0"/>
-                          <a:cs typeface="Tahoma" panose="020B0604030504040204" pitchFamily="34" charset="0"/>
-                        </a:rPr>
-                        <a:t>M1</a:t>
-                      </a:r>
-                      <a:r>
-                        <a:rPr lang="th-TH" sz="1100" dirty="0">
-                          <a:latin typeface="Tahoma" panose="020B0604030504040204" pitchFamily="34" charset="0"/>
-                          <a:ea typeface="Tahoma" panose="020B0604030504040204" pitchFamily="34" charset="0"/>
-                          <a:cs typeface="Tahoma" panose="020B0604030504040204" pitchFamily="34" charset="0"/>
-                        </a:rPr>
-                        <a:t> ตรวจสอบรายการ </a:t>
-                      </a:r>
-                      <a:r>
-                        <a:rPr lang="en-US" sz="1100" dirty="0">
-                          <a:latin typeface="Tahoma" panose="020B0604030504040204" pitchFamily="34" charset="0"/>
-                          <a:ea typeface="Tahoma" panose="020B0604030504040204" pitchFamily="34" charset="0"/>
-                          <a:cs typeface="Tahoma" panose="020B0604030504040204" pitchFamily="34" charset="0"/>
-                        </a:rPr>
-                        <a:t>Nearly Expire </a:t>
-                      </a:r>
-                      <a:r>
-                        <a:rPr lang="th-TH" sz="1100" dirty="0">
-                          <a:latin typeface="Tahoma" panose="020B0604030504040204" pitchFamily="34" charset="0"/>
-                          <a:ea typeface="Tahoma" panose="020B0604030504040204" pitchFamily="34" charset="0"/>
-                          <a:cs typeface="Tahoma" panose="020B0604030504040204" pitchFamily="34" charset="0"/>
-                        </a:rPr>
-                        <a:t>จาก </a:t>
-                      </a:r>
-                      <a:r>
-                        <a:rPr lang="en-US" sz="1100" dirty="0">
-                          <a:latin typeface="Tahoma" panose="020B0604030504040204" pitchFamily="34" charset="0"/>
-                          <a:ea typeface="Tahoma" panose="020B0604030504040204" pitchFamily="34" charset="0"/>
-                          <a:cs typeface="Tahoma" panose="020B0604030504040204" pitchFamily="34" charset="0"/>
-                        </a:rPr>
-                        <a:t>Report </a:t>
-                      </a:r>
-                      <a:r>
-                        <a:rPr lang="th-TH" sz="1100" dirty="0">
-                          <a:latin typeface="Tahoma" panose="020B0604030504040204" pitchFamily="34" charset="0"/>
-                          <a:ea typeface="Tahoma" panose="020B0604030504040204" pitchFamily="34" charset="0"/>
-                          <a:cs typeface="Tahoma" panose="020B0604030504040204" pitchFamily="34" charset="0"/>
-                        </a:rPr>
-                        <a:t>ที่ชั้นวางและสต็อคอีกครั้ง</a:t>
-                      </a:r>
-                    </a:p>
-                    <a:p>
-                      <a:r>
-                        <a:rPr lang="th-TH" sz="1100" dirty="0">
-                          <a:latin typeface="Tahoma" panose="020B0604030504040204" pitchFamily="34" charset="0"/>
-                          <a:ea typeface="Tahoma" panose="020B0604030504040204" pitchFamily="34" charset="0"/>
-                          <a:cs typeface="Tahoma" panose="020B0604030504040204" pitchFamily="34" charset="0"/>
-                        </a:rPr>
-                        <a:t>3</a:t>
-                      </a:r>
-                      <a:r>
-                        <a:rPr lang="en-US" sz="1100" dirty="0">
-                          <a:latin typeface="Tahoma" panose="020B0604030504040204" pitchFamily="34" charset="0"/>
-                          <a:ea typeface="Tahoma" panose="020B0604030504040204" pitchFamily="34" charset="0"/>
-                          <a:cs typeface="Tahoma" panose="020B0604030504040204" pitchFamily="34" charset="0"/>
-                        </a:rPr>
-                        <a:t>.Duty </a:t>
-                      </a:r>
-                      <a:r>
-                        <a:rPr lang="th-TH" sz="1100" dirty="0">
-                          <a:latin typeface="Tahoma" panose="020B0604030504040204" pitchFamily="34" charset="0"/>
-                          <a:ea typeface="Tahoma" panose="020B0604030504040204" pitchFamily="34" charset="0"/>
-                          <a:cs typeface="Tahoma" panose="020B0604030504040204" pitchFamily="34" charset="0"/>
-                        </a:rPr>
-                        <a:t>บ่ายตรวจสอบห้อง </a:t>
-                      </a:r>
-                      <a:r>
-                        <a:rPr lang="en-US" sz="1100" dirty="0">
-                          <a:latin typeface="Tahoma" panose="020B0604030504040204" pitchFamily="34" charset="0"/>
-                          <a:ea typeface="Tahoma" panose="020B0604030504040204" pitchFamily="34" charset="0"/>
-                          <a:cs typeface="Tahoma" panose="020B0604030504040204" pitchFamily="34" charset="0"/>
-                        </a:rPr>
-                        <a:t>Repack </a:t>
-                      </a:r>
-                      <a:r>
-                        <a:rPr lang="th-TH" sz="1100" dirty="0">
-                          <a:latin typeface="Tahoma" panose="020B0604030504040204" pitchFamily="34" charset="0"/>
-                          <a:ea typeface="Tahoma" panose="020B0604030504040204" pitchFamily="34" charset="0"/>
-                          <a:cs typeface="Tahoma" panose="020B0604030504040204" pitchFamily="34" charset="0"/>
-                        </a:rPr>
-                        <a:t>ทุกวันต้องเคลียร์เรียบร้อยไม่มีสินค้ารอลดราคาเหลืออยู่</a:t>
-                      </a:r>
-                      <a:endParaRPr lang="en-US" sz="1100" dirty="0">
-                        <a:latin typeface="Tahoma" panose="020B0604030504040204" pitchFamily="34" charset="0"/>
-                        <a:ea typeface="Tahoma" panose="020B0604030504040204" pitchFamily="34" charset="0"/>
-                        <a:cs typeface="Tahoma" panose="020B0604030504040204" pitchFamily="34" charset="0"/>
-                      </a:endParaRPr>
-                    </a:p>
-                  </a:txBody>
-                  <a:tcPr/>
-                </a:tc>
-                <a:extLst>
-                  <a:ext uri="{0D108BD9-81ED-4DB2-BD59-A6C34878D82A}">
-                    <a16:rowId xmlns:a16="http://schemas.microsoft.com/office/drawing/2014/main" val="833854746"/>
-                  </a:ext>
-                </a:extLst>
-              </a:tr>
-              <a:tr h="970218">
-                <a:tc>
-                  <a:txBody>
-                    <a:bodyPr/>
-                    <a:lstStyle/>
-                    <a:p>
-                      <a:pPr algn="ctr"/>
-                      <a:r>
-                        <a:rPr lang="th-TH" sz="1100" kern="1200" dirty="0">
-                          <a:solidFill>
-                            <a:schemeClr val="dk1"/>
-                          </a:solidFill>
-                          <a:latin typeface="Tahoma" panose="020B0604030504040204" pitchFamily="34" charset="0"/>
-                          <a:ea typeface="Tahoma" panose="020B0604030504040204" pitchFamily="34" charset="0"/>
-                          <a:cs typeface="Tahoma" panose="020B0604030504040204" pitchFamily="34" charset="0"/>
-                        </a:rPr>
-                        <a:t>2</a:t>
-                      </a:r>
-                      <a:endParaRPr lang="en-US" sz="1100" kern="1200" dirty="0">
-                        <a:solidFill>
-                          <a:schemeClr val="dk1"/>
-                        </a:solidFill>
-                        <a:latin typeface="Tahoma" panose="020B0604030504040204" pitchFamily="34" charset="0"/>
-                        <a:ea typeface="Tahoma" panose="020B0604030504040204" pitchFamily="34" charset="0"/>
-                        <a:cs typeface="Tahoma" panose="020B0604030504040204" pitchFamily="34" charset="0"/>
-                      </a:endParaRPr>
-                    </a:p>
-                  </a:txBody>
-                  <a:tcPr/>
-                </a:tc>
-                <a:tc>
-                  <a:txBody>
-                    <a:bodyPr/>
-                    <a:lstStyle/>
-                    <a:p>
-                      <a:r>
-                        <a:rPr lang="en-US" sz="1100" u="sng" kern="1200" dirty="0" err="1">
-                          <a:solidFill>
-                            <a:schemeClr val="dk1"/>
-                          </a:solidFill>
-                          <a:latin typeface="Tahoma" panose="020B0604030504040204" pitchFamily="34" charset="0"/>
-                          <a:ea typeface="Tahoma" panose="020B0604030504040204" pitchFamily="34" charset="0"/>
-                          <a:cs typeface="Tahoma" panose="020B0604030504040204" pitchFamily="34" charset="0"/>
-                        </a:rPr>
-                        <a:t>Fresfood</a:t>
-                      </a:r>
-                      <a:endParaRPr lang="en-US" sz="1100" u="sng" kern="1200" dirty="0">
-                        <a:solidFill>
-                          <a:schemeClr val="dk1"/>
-                        </a:solidFill>
-                        <a:latin typeface="Tahoma" panose="020B0604030504040204" pitchFamily="34" charset="0"/>
-                        <a:ea typeface="Tahoma" panose="020B0604030504040204" pitchFamily="34" charset="0"/>
-                        <a:cs typeface="Tahoma" panose="020B0604030504040204" pitchFamily="34" charset="0"/>
-                      </a:endParaRPr>
-                    </a:p>
-                    <a:p>
-                      <a:r>
-                        <a:rPr lang="en-US" sz="1100" u="sng" kern="1200" dirty="0">
-                          <a:solidFill>
-                            <a:schemeClr val="dk1"/>
-                          </a:solidFill>
-                          <a:latin typeface="Tahoma" panose="020B0604030504040204" pitchFamily="34" charset="0"/>
-                          <a:ea typeface="Tahoma" panose="020B0604030504040204" pitchFamily="34" charset="0"/>
-                          <a:cs typeface="Tahoma" panose="020B0604030504040204" pitchFamily="34" charset="0"/>
-                        </a:rPr>
-                        <a:t>Damage</a:t>
-                      </a:r>
-                    </a:p>
-                    <a:p>
-                      <a:r>
-                        <a:rPr lang="en-US" sz="1100" u="none" kern="1200" dirty="0">
-                          <a:solidFill>
-                            <a:schemeClr val="dk1"/>
-                          </a:solidFill>
-                          <a:latin typeface="Tahoma" panose="020B0604030504040204" pitchFamily="34" charset="0"/>
-                          <a:ea typeface="Tahoma" panose="020B0604030504040204" pitchFamily="34" charset="0"/>
-                          <a:cs typeface="Tahoma" panose="020B0604030504040204" pitchFamily="34" charset="0"/>
-                        </a:rPr>
-                        <a:t>-</a:t>
-                      </a:r>
-                      <a:r>
-                        <a:rPr lang="th-TH" sz="1100" u="none" kern="1200" dirty="0">
-                          <a:solidFill>
-                            <a:schemeClr val="dk1"/>
-                          </a:solidFill>
-                          <a:latin typeface="Tahoma" panose="020B0604030504040204" pitchFamily="34" charset="0"/>
-                          <a:ea typeface="Tahoma" panose="020B0604030504040204" pitchFamily="34" charset="0"/>
-                          <a:cs typeface="Tahoma" panose="020B0604030504040204" pitchFamily="34" charset="0"/>
-                        </a:rPr>
-                        <a:t>สินค้าสินค้าตามฤดูกาลซึ่งซึ่งเสื่อมสภาพตามกาลเวลาทำลดราคาขายตามขั้นตอนขายไม่หมด เช่น ทุเรียนหมอนทอง</a:t>
-                      </a:r>
-                    </a:p>
-                    <a:p>
-                      <a:r>
-                        <a:rPr lang="th-TH" sz="1100" u="none" kern="1200" dirty="0">
-                          <a:solidFill>
-                            <a:schemeClr val="dk1"/>
-                          </a:solidFill>
-                          <a:latin typeface="Tahoma" panose="020B0604030504040204" pitchFamily="34" charset="0"/>
-                          <a:ea typeface="Tahoma" panose="020B0604030504040204" pitchFamily="34" charset="0"/>
-                          <a:cs typeface="Tahoma" panose="020B0604030504040204" pitchFamily="34" charset="0"/>
-                        </a:rPr>
-                        <a:t>-สินค้า ทำการลดราคาขายตามขั้นตอนขายไม่หมด เช่น </a:t>
-                      </a:r>
-                      <a:r>
-                        <a:rPr lang="en-US" sz="1100" u="none" kern="1200" dirty="0">
-                          <a:solidFill>
-                            <a:schemeClr val="dk1"/>
-                          </a:solidFill>
-                          <a:latin typeface="Tahoma" panose="020B0604030504040204" pitchFamily="34" charset="0"/>
-                          <a:ea typeface="Tahoma" panose="020B0604030504040204" pitchFamily="34" charset="0"/>
-                          <a:cs typeface="Tahoma" panose="020B0604030504040204" pitchFamily="34" charset="0"/>
-                        </a:rPr>
-                        <a:t>WE ARE FRESH</a:t>
-                      </a:r>
-                      <a:r>
-                        <a:rPr lang="th-TH" sz="1100" u="none" kern="1200" dirty="0">
-                          <a:solidFill>
-                            <a:schemeClr val="dk1"/>
-                          </a:solidFill>
-                          <a:latin typeface="Tahoma" panose="020B0604030504040204" pitchFamily="34" charset="0"/>
-                          <a:ea typeface="Tahoma" panose="020B0604030504040204" pitchFamily="34" charset="0"/>
-                          <a:cs typeface="Tahoma" panose="020B0604030504040204" pitchFamily="34" charset="0"/>
-                        </a:rPr>
-                        <a:t>มะละกอปลักไม้ลาย</a:t>
-                      </a:r>
-                      <a:r>
-                        <a:rPr lang="en-US" sz="1100" u="none" kern="1200" dirty="0">
-                          <a:solidFill>
-                            <a:schemeClr val="dk1"/>
-                          </a:solidFill>
-                          <a:latin typeface="Tahoma" panose="020B0604030504040204" pitchFamily="34" charset="0"/>
-                          <a:ea typeface="Tahoma" panose="020B0604030504040204" pitchFamily="34" charset="0"/>
-                          <a:cs typeface="Tahoma" panose="020B0604030504040204" pitchFamily="34" charset="0"/>
-                        </a:rPr>
-                        <a:t>, </a:t>
-                      </a:r>
-                      <a:endParaRPr lang="th-TH" sz="1100" u="none" kern="1200" dirty="0">
-                        <a:solidFill>
-                          <a:schemeClr val="dk1"/>
-                        </a:solidFill>
-                        <a:latin typeface="Tahoma" panose="020B0604030504040204" pitchFamily="34" charset="0"/>
-                        <a:ea typeface="Tahoma" panose="020B0604030504040204" pitchFamily="34" charset="0"/>
-                        <a:cs typeface="Tahoma" panose="020B0604030504040204" pitchFamily="34" charset="0"/>
-                      </a:endParaRPr>
-                    </a:p>
-                  </a:txBody>
-                  <a:tcPr/>
-                </a:tc>
-                <a:tc>
-                  <a:txBody>
-                    <a:bodyPr/>
-                    <a:lstStyle/>
-                    <a:p>
-                      <a:pPr marL="228600" indent="-228600">
-                        <a:buAutoNum type="arabicPeriod"/>
-                      </a:pPr>
-                      <a:r>
-                        <a:rPr lang="th-TH" sz="1100" kern="1200" dirty="0">
-                          <a:solidFill>
-                            <a:schemeClr val="dk1"/>
-                          </a:solidFill>
-                          <a:latin typeface="Tahoma" panose="020B0604030504040204" pitchFamily="34" charset="0"/>
-                          <a:ea typeface="Tahoma" panose="020B0604030504040204" pitchFamily="34" charset="0"/>
-                          <a:cs typeface="Tahoma" panose="020B0604030504040204" pitchFamily="34" charset="0"/>
-                        </a:rPr>
-                        <a:t>แผนกพยายามผลักดันขายสินค้าที่มีการทำลดราคาในตอนเย็นทุกๆวัน เพื่อลดการทำลายสินค้าที่ขายไม่หมด</a:t>
-                      </a:r>
-                    </a:p>
-                    <a:p>
-                      <a:pPr marL="228600" indent="-228600">
-                        <a:buAutoNum type="arabicPeriod"/>
-                      </a:pPr>
-                      <a:r>
-                        <a:rPr lang="th-TH" sz="1100" kern="1200" dirty="0">
-                          <a:solidFill>
-                            <a:schemeClr val="dk1"/>
-                          </a:solidFill>
-                          <a:latin typeface="Tahoma" panose="020B0604030504040204" pitchFamily="34" charset="0"/>
-                          <a:ea typeface="Tahoma" panose="020B0604030504040204" pitchFamily="34" charset="0"/>
-                          <a:cs typeface="Tahoma" panose="020B0604030504040204" pitchFamily="34" charset="0"/>
-                        </a:rPr>
-                        <a:t>แผนกต้องตรวจสอบ </a:t>
-                      </a:r>
-                      <a:r>
-                        <a:rPr lang="en-US" sz="1100" kern="1200" dirty="0">
-                          <a:solidFill>
-                            <a:schemeClr val="dk1"/>
-                          </a:solidFill>
-                          <a:latin typeface="Tahoma" panose="020B0604030504040204" pitchFamily="34" charset="0"/>
-                          <a:ea typeface="Tahoma" panose="020B0604030504040204" pitchFamily="34" charset="0"/>
-                          <a:cs typeface="Tahoma" panose="020B0604030504040204" pitchFamily="34" charset="0"/>
-                        </a:rPr>
-                        <a:t>Confirm Order </a:t>
-                      </a:r>
-                      <a:r>
-                        <a:rPr lang="th-TH" sz="1100" kern="1200" dirty="0">
-                          <a:solidFill>
-                            <a:schemeClr val="dk1"/>
-                          </a:solidFill>
-                          <a:latin typeface="Tahoma" panose="020B0604030504040204" pitchFamily="34" charset="0"/>
-                          <a:ea typeface="Tahoma" panose="020B0604030504040204" pitchFamily="34" charset="0"/>
-                          <a:cs typeface="Tahoma" panose="020B0604030504040204" pitchFamily="34" charset="0"/>
-                        </a:rPr>
-                        <a:t>ทุกวันจันทร์ เพื่อวางแผนการขายสินค้าและหากสินค้า </a:t>
-                      </a:r>
-                      <a:r>
-                        <a:rPr lang="en-US" sz="1100" kern="1200" dirty="0">
-                          <a:solidFill>
-                            <a:schemeClr val="dk1"/>
-                          </a:solidFill>
-                          <a:latin typeface="Tahoma" panose="020B0604030504040204" pitchFamily="34" charset="0"/>
-                          <a:ea typeface="Tahoma" panose="020B0604030504040204" pitchFamily="34" charset="0"/>
-                          <a:cs typeface="Tahoma" panose="020B0604030504040204" pitchFamily="34" charset="0"/>
-                        </a:rPr>
-                        <a:t>Overstock </a:t>
-                      </a:r>
-                      <a:r>
-                        <a:rPr lang="th-TH" sz="1100" kern="1200" dirty="0">
-                          <a:solidFill>
-                            <a:schemeClr val="dk1"/>
-                          </a:solidFill>
-                          <a:latin typeface="Tahoma" panose="020B0604030504040204" pitchFamily="34" charset="0"/>
-                          <a:ea typeface="Tahoma" panose="020B0604030504040204" pitchFamily="34" charset="0"/>
-                          <a:cs typeface="Tahoma" panose="020B0604030504040204" pitchFamily="34" charset="0"/>
-                        </a:rPr>
-                        <a:t>จะได้ดำเนินการแก้ไขได้ทัน</a:t>
-                      </a:r>
-                    </a:p>
-                    <a:p>
-                      <a:pPr marL="228600" indent="-228600">
-                        <a:buAutoNum type="arabicPeriod"/>
-                      </a:pPr>
-                      <a:r>
-                        <a:rPr lang="en-US" sz="1100" kern="1200" dirty="0">
-                          <a:solidFill>
-                            <a:schemeClr val="dk1"/>
-                          </a:solidFill>
-                          <a:latin typeface="Tahoma" panose="020B0604030504040204" pitchFamily="34" charset="0"/>
-                          <a:ea typeface="Tahoma" panose="020B0604030504040204" pitchFamily="34" charset="0"/>
-                          <a:cs typeface="Tahoma" panose="020B0604030504040204" pitchFamily="34" charset="0"/>
-                        </a:rPr>
-                        <a:t>M1</a:t>
-                      </a:r>
-                      <a:r>
-                        <a:rPr lang="th-TH" sz="1100" kern="1200" dirty="0">
-                          <a:solidFill>
-                            <a:schemeClr val="dk1"/>
-                          </a:solidFill>
-                          <a:latin typeface="Tahoma" panose="020B0604030504040204" pitchFamily="34" charset="0"/>
-                          <a:ea typeface="Tahoma" panose="020B0604030504040204" pitchFamily="34" charset="0"/>
-                          <a:cs typeface="Tahoma" panose="020B0604030504040204" pitchFamily="34" charset="0"/>
-                        </a:rPr>
-                        <a:t> และ </a:t>
-                      </a:r>
-                      <a:r>
-                        <a:rPr lang="en-US" sz="1100" kern="1200" dirty="0" err="1">
-                          <a:solidFill>
-                            <a:schemeClr val="dk1"/>
-                          </a:solidFill>
-                          <a:latin typeface="Tahoma" panose="020B0604030504040204" pitchFamily="34" charset="0"/>
-                          <a:ea typeface="Tahoma" panose="020B0604030504040204" pitchFamily="34" charset="0"/>
-                          <a:cs typeface="Tahoma" panose="020B0604030504040204" pitchFamily="34" charset="0"/>
-                        </a:rPr>
-                        <a:t>M.Opt</a:t>
-                      </a:r>
-                      <a:r>
-                        <a:rPr lang="en-US" sz="1100" kern="1200" dirty="0">
-                          <a:solidFill>
-                            <a:schemeClr val="dk1"/>
-                          </a:solidFill>
-                          <a:latin typeface="Tahoma" panose="020B0604030504040204" pitchFamily="34" charset="0"/>
-                          <a:ea typeface="Tahoma" panose="020B0604030504040204" pitchFamily="34" charset="0"/>
-                          <a:cs typeface="Tahoma" panose="020B0604030504040204" pitchFamily="34" charset="0"/>
-                        </a:rPr>
-                        <a:t>  </a:t>
-                      </a:r>
-                      <a:r>
-                        <a:rPr lang="th-TH" sz="1100" kern="1200" dirty="0">
-                          <a:solidFill>
-                            <a:schemeClr val="dk1"/>
-                          </a:solidFill>
-                          <a:latin typeface="Tahoma" panose="020B0604030504040204" pitchFamily="34" charset="0"/>
-                          <a:ea typeface="Tahoma" panose="020B0604030504040204" pitchFamily="34" charset="0"/>
-                          <a:cs typeface="Tahoma" panose="020B0604030504040204" pitchFamily="34" charset="0"/>
-                        </a:rPr>
-                        <a:t>สุ่มตรวจสอบสินค้าในแผนกตู้แช่ที่มีจำนวนเยอะหน้าร้านทุกๆวัน ว่ามีการ </a:t>
-                      </a:r>
-                      <a:r>
-                        <a:rPr lang="en-US" sz="1100" kern="1200" dirty="0">
-                          <a:solidFill>
-                            <a:schemeClr val="dk1"/>
-                          </a:solidFill>
-                          <a:latin typeface="Tahoma" panose="020B0604030504040204" pitchFamily="34" charset="0"/>
-                          <a:ea typeface="Tahoma" panose="020B0604030504040204" pitchFamily="34" charset="0"/>
-                          <a:cs typeface="Tahoma" panose="020B0604030504040204" pitchFamily="34" charset="0"/>
-                        </a:rPr>
-                        <a:t>FIFO </a:t>
-                      </a:r>
-                      <a:r>
-                        <a:rPr lang="th-TH" sz="1100" kern="1200" dirty="0">
-                          <a:solidFill>
-                            <a:schemeClr val="dk1"/>
-                          </a:solidFill>
-                          <a:latin typeface="Tahoma" panose="020B0604030504040204" pitchFamily="34" charset="0"/>
-                          <a:ea typeface="Tahoma" panose="020B0604030504040204" pitchFamily="34" charset="0"/>
-                          <a:cs typeface="Tahoma" panose="020B0604030504040204" pitchFamily="34" charset="0"/>
-                        </a:rPr>
-                        <a:t>หรือใกล้หมดอายุหรือไม่ เพื่อดำเนินการแก้ไขได้ทันท่วงที</a:t>
-                      </a:r>
-                      <a:endParaRPr lang="en-US" sz="1100" kern="1200" dirty="0">
-                        <a:solidFill>
-                          <a:schemeClr val="dk1"/>
-                        </a:solidFill>
-                        <a:latin typeface="Tahoma" panose="020B0604030504040204" pitchFamily="34" charset="0"/>
-                        <a:ea typeface="Tahoma" panose="020B0604030504040204" pitchFamily="34" charset="0"/>
-                        <a:cs typeface="Tahoma" panose="020B0604030504040204" pitchFamily="34" charset="0"/>
-                      </a:endParaRPr>
-                    </a:p>
-                  </a:txBody>
-                  <a:tcPr/>
-                </a:tc>
-                <a:tc>
-                  <a:txBody>
-                    <a:bodyPr/>
-                    <a:lstStyle/>
-                    <a:p>
-                      <a:pPr marL="0" marR="0" lvl="0" indent="0" algn="l" defTabSz="761970" rtl="0" eaLnBrk="1" fontAlgn="auto" latinLnBrk="0" hangingPunct="1">
-                        <a:lnSpc>
-                          <a:spcPct val="100000"/>
-                        </a:lnSpc>
-                        <a:spcBef>
-                          <a:spcPts val="0"/>
-                        </a:spcBef>
-                        <a:spcAft>
-                          <a:spcPts val="0"/>
-                        </a:spcAft>
-                        <a:buClrTx/>
-                        <a:buSzTx/>
-                        <a:buFontTx/>
-                        <a:buNone/>
-                        <a:tabLst/>
-                        <a:defRPr/>
-                      </a:pPr>
-                      <a:r>
-                        <a:rPr lang="en-US" sz="1100" kern="1200" dirty="0">
-                          <a:solidFill>
-                            <a:schemeClr val="tx1"/>
-                          </a:solidFill>
-                          <a:latin typeface="Tahoma" panose="020B0604030504040204" pitchFamily="34" charset="0"/>
-                          <a:ea typeface="Tahoma" panose="020B0604030504040204" pitchFamily="34" charset="0"/>
-                          <a:cs typeface="Tahoma" panose="020B0604030504040204" pitchFamily="34" charset="0"/>
-                        </a:rPr>
-                        <a:t>M1 ,</a:t>
-                      </a:r>
-                      <a:r>
-                        <a:rPr lang="en-US" sz="1100" kern="1200" dirty="0" err="1">
-                          <a:solidFill>
-                            <a:schemeClr val="tx1"/>
-                          </a:solidFill>
-                          <a:latin typeface="Tahoma" panose="020B0604030504040204" pitchFamily="34" charset="0"/>
-                          <a:ea typeface="Tahoma" panose="020B0604030504040204" pitchFamily="34" charset="0"/>
-                          <a:cs typeface="Tahoma" panose="020B0604030504040204" pitchFamily="34" charset="0"/>
-                        </a:rPr>
-                        <a:t>M.Opt,C</a:t>
-                      </a:r>
-                      <a:r>
-                        <a:rPr lang="th-TH" sz="1100" kern="1200" dirty="0">
-                          <a:solidFill>
-                            <a:schemeClr val="tx1"/>
-                          </a:solidFill>
-                          <a:latin typeface="Tahoma" panose="020B0604030504040204" pitchFamily="34" charset="0"/>
-                          <a:ea typeface="Tahoma" panose="020B0604030504040204" pitchFamily="34" charset="0"/>
-                          <a:cs typeface="Tahoma" panose="020B0604030504040204" pitchFamily="34" charset="0"/>
-                        </a:rPr>
-                        <a:t>2</a:t>
-                      </a:r>
-                      <a:r>
-                        <a:rPr lang="en-US" sz="1100" kern="1200" dirty="0">
-                          <a:solidFill>
-                            <a:schemeClr val="tx1"/>
-                          </a:solidFill>
-                          <a:latin typeface="Tahoma" panose="020B0604030504040204" pitchFamily="34" charset="0"/>
-                          <a:ea typeface="Tahoma" panose="020B0604030504040204" pitchFamily="34" charset="0"/>
-                          <a:cs typeface="Tahoma" panose="020B0604030504040204" pitchFamily="34" charset="0"/>
-                        </a:rPr>
-                        <a:t>,C9,LP</a:t>
-                      </a:r>
-                      <a:endParaRPr lang="th-TH" sz="1100" kern="1200" dirty="0">
-                        <a:solidFill>
-                          <a:schemeClr val="tx1"/>
-                        </a:solidFill>
-                        <a:latin typeface="Tahoma" panose="020B0604030504040204" pitchFamily="34" charset="0"/>
-                        <a:ea typeface="Tahoma" panose="020B0604030504040204" pitchFamily="34" charset="0"/>
-                        <a:cs typeface="Tahoma" panose="020B0604030504040204" pitchFamily="34" charset="0"/>
-                      </a:endParaRPr>
-                    </a:p>
-                  </a:txBody>
-                  <a:tcPr/>
-                </a:tc>
-                <a:tc>
-                  <a:txBody>
-                    <a:bodyPr/>
-                    <a:lstStyle/>
-                    <a:p>
-                      <a:r>
-                        <a:rPr lang="en-US" sz="1100" dirty="0">
-                          <a:latin typeface="Tahoma" panose="020B0604030504040204" pitchFamily="34" charset="0"/>
-                          <a:ea typeface="Tahoma" panose="020B0604030504040204" pitchFamily="34" charset="0"/>
-                          <a:cs typeface="Tahoma" panose="020B0604030504040204" pitchFamily="34" charset="0"/>
-                        </a:rPr>
-                        <a:t>Jan – Dec 2026</a:t>
-                      </a:r>
-                    </a:p>
-                  </a:txBody>
-                  <a:tcPr/>
-                </a:tc>
-                <a:tc>
-                  <a:txBody>
-                    <a:bodyPr/>
-                    <a:lstStyle/>
-                    <a:p>
-                      <a:r>
-                        <a:rPr lang="th-TH" sz="1100" kern="1200" dirty="0">
-                          <a:solidFill>
-                            <a:schemeClr val="dk1"/>
-                          </a:solidFill>
-                          <a:latin typeface="Tahoma" panose="020B0604030504040204" pitchFamily="34" charset="0"/>
-                          <a:ea typeface="Tahoma" panose="020B0604030504040204" pitchFamily="34" charset="0"/>
-                          <a:cs typeface="Tahoma" panose="020B0604030504040204" pitchFamily="34" charset="0"/>
-                        </a:rPr>
-                        <a:t>1.</a:t>
-                      </a:r>
-                      <a:r>
-                        <a:rPr lang="en-US" sz="1100" kern="1200" dirty="0">
-                          <a:solidFill>
-                            <a:schemeClr val="dk1"/>
-                          </a:solidFill>
-                          <a:latin typeface="Tahoma" panose="020B0604030504040204" pitchFamily="34" charset="0"/>
-                          <a:ea typeface="Tahoma" panose="020B0604030504040204" pitchFamily="34" charset="0"/>
-                          <a:cs typeface="Tahoma" panose="020B0604030504040204" pitchFamily="34" charset="0"/>
-                        </a:rPr>
-                        <a:t>M1 </a:t>
-                      </a:r>
-                      <a:r>
-                        <a:rPr lang="th-TH" sz="1100" kern="1200" dirty="0">
-                          <a:solidFill>
-                            <a:schemeClr val="dk1"/>
-                          </a:solidFill>
-                          <a:latin typeface="Tahoma" panose="020B0604030504040204" pitchFamily="34" charset="0"/>
-                          <a:ea typeface="Tahoma" panose="020B0604030504040204" pitchFamily="34" charset="0"/>
-                          <a:cs typeface="Tahoma" panose="020B0604030504040204" pitchFamily="34" charset="0"/>
-                        </a:rPr>
-                        <a:t>และ </a:t>
-                      </a:r>
-                      <a:r>
-                        <a:rPr lang="en-US" sz="1100" kern="1200" dirty="0" err="1">
-                          <a:solidFill>
-                            <a:schemeClr val="dk1"/>
-                          </a:solidFill>
-                          <a:latin typeface="Tahoma" panose="020B0604030504040204" pitchFamily="34" charset="0"/>
-                          <a:ea typeface="Tahoma" panose="020B0604030504040204" pitchFamily="34" charset="0"/>
-                          <a:cs typeface="Tahoma" panose="020B0604030504040204" pitchFamily="34" charset="0"/>
-                        </a:rPr>
-                        <a:t>M.Opt</a:t>
-                      </a:r>
-                      <a:r>
-                        <a:rPr lang="en-US" sz="1100" kern="1200" dirty="0">
-                          <a:solidFill>
-                            <a:schemeClr val="dk1"/>
-                          </a:solidFill>
-                          <a:latin typeface="Tahoma" panose="020B0604030504040204" pitchFamily="34" charset="0"/>
-                          <a:ea typeface="Tahoma" panose="020B0604030504040204" pitchFamily="34" charset="0"/>
-                          <a:cs typeface="Tahoma" panose="020B0604030504040204" pitchFamily="34" charset="0"/>
-                        </a:rPr>
-                        <a:t> </a:t>
-                      </a:r>
-                      <a:r>
-                        <a:rPr lang="th-TH" sz="1100" kern="1200" dirty="0">
-                          <a:solidFill>
-                            <a:schemeClr val="dk1"/>
-                          </a:solidFill>
-                          <a:latin typeface="Tahoma" panose="020B0604030504040204" pitchFamily="34" charset="0"/>
-                          <a:ea typeface="Tahoma" panose="020B0604030504040204" pitchFamily="34" charset="0"/>
-                          <a:cs typeface="Tahoma" panose="020B0604030504040204" pitchFamily="34" charset="0"/>
-                        </a:rPr>
-                        <a:t>(กรณี </a:t>
-                      </a:r>
-                      <a:r>
-                        <a:rPr lang="en-US" sz="1100" kern="1200" dirty="0">
-                          <a:solidFill>
-                            <a:schemeClr val="dk1"/>
-                          </a:solidFill>
-                          <a:latin typeface="Tahoma" panose="020B0604030504040204" pitchFamily="34" charset="0"/>
-                          <a:ea typeface="Tahoma" panose="020B0604030504040204" pitchFamily="34" charset="0"/>
-                          <a:cs typeface="Tahoma" panose="020B0604030504040204" pitchFamily="34" charset="0"/>
-                        </a:rPr>
-                        <a:t>M1 </a:t>
-                      </a:r>
-                      <a:r>
-                        <a:rPr lang="th-TH" sz="1100" kern="1200" dirty="0">
-                          <a:solidFill>
-                            <a:schemeClr val="dk1"/>
-                          </a:solidFill>
-                          <a:latin typeface="Tahoma" panose="020B0604030504040204" pitchFamily="34" charset="0"/>
-                          <a:ea typeface="Tahoma" panose="020B0604030504040204" pitchFamily="34" charset="0"/>
-                          <a:cs typeface="Tahoma" panose="020B0604030504040204" pitchFamily="34" charset="0"/>
-                        </a:rPr>
-                        <a:t>หยุด) สุ่มตรววจสอบสินค้าที่มีจำนวนเยอะหน้าร้านทุกวัน </a:t>
-                      </a:r>
-                    </a:p>
-                    <a:p>
-                      <a:r>
-                        <a:rPr lang="th-TH" sz="1100" kern="1200" dirty="0">
-                          <a:solidFill>
-                            <a:schemeClr val="dk1"/>
-                          </a:solidFill>
-                          <a:latin typeface="Tahoma" panose="020B0604030504040204" pitchFamily="34" charset="0"/>
-                          <a:ea typeface="Tahoma" panose="020B0604030504040204" pitchFamily="34" charset="0"/>
-                          <a:cs typeface="Tahoma" panose="020B0604030504040204" pitchFamily="34" charset="0"/>
-                        </a:rPr>
-                        <a:t>2.</a:t>
-                      </a:r>
-                      <a:r>
-                        <a:rPr lang="en-US" sz="1100" kern="1200" dirty="0">
-                          <a:solidFill>
-                            <a:schemeClr val="dk1"/>
-                          </a:solidFill>
-                          <a:latin typeface="Tahoma" panose="020B0604030504040204" pitchFamily="34" charset="0"/>
-                          <a:ea typeface="Tahoma" panose="020B0604030504040204" pitchFamily="34" charset="0"/>
-                          <a:cs typeface="Tahoma" panose="020B0604030504040204" pitchFamily="34" charset="0"/>
-                        </a:rPr>
-                        <a:t>M1 </a:t>
-                      </a:r>
-                      <a:r>
-                        <a:rPr lang="th-TH" sz="1100" kern="1200" dirty="0">
-                          <a:solidFill>
-                            <a:schemeClr val="dk1"/>
-                          </a:solidFill>
-                          <a:latin typeface="Tahoma" panose="020B0604030504040204" pitchFamily="34" charset="0"/>
-                          <a:ea typeface="Tahoma" panose="020B0604030504040204" pitchFamily="34" charset="0"/>
-                          <a:cs typeface="Tahoma" panose="020B0604030504040204" pitchFamily="34" charset="0"/>
-                        </a:rPr>
-                        <a:t>ตรวจสอบ </a:t>
-                      </a:r>
-                      <a:r>
-                        <a:rPr lang="en-US" sz="1100" kern="1200" dirty="0">
-                          <a:solidFill>
-                            <a:schemeClr val="dk1"/>
-                          </a:solidFill>
-                          <a:latin typeface="Tahoma" panose="020B0604030504040204" pitchFamily="34" charset="0"/>
-                          <a:ea typeface="Tahoma" panose="020B0604030504040204" pitchFamily="34" charset="0"/>
-                          <a:cs typeface="Tahoma" panose="020B0604030504040204" pitchFamily="34" charset="0"/>
-                        </a:rPr>
-                        <a:t>Confirm Order FF </a:t>
-                      </a:r>
-                      <a:r>
-                        <a:rPr lang="th-TH" sz="1100" kern="1200" dirty="0">
-                          <a:solidFill>
-                            <a:schemeClr val="dk1"/>
-                          </a:solidFill>
-                          <a:latin typeface="Tahoma" panose="020B0604030504040204" pitchFamily="34" charset="0"/>
-                          <a:ea typeface="Tahoma" panose="020B0604030504040204" pitchFamily="34" charset="0"/>
-                          <a:cs typeface="Tahoma" panose="020B0604030504040204" pitchFamily="34" charset="0"/>
-                        </a:rPr>
-                        <a:t>ทุกวันจันทร์และทุกวันพุธตรวจสอบ </a:t>
-                      </a:r>
-                      <a:r>
-                        <a:rPr lang="en-US" sz="1100" kern="1200" dirty="0">
-                          <a:solidFill>
-                            <a:schemeClr val="dk1"/>
-                          </a:solidFill>
-                          <a:latin typeface="Tahoma" panose="020B0604030504040204" pitchFamily="34" charset="0"/>
-                          <a:ea typeface="Tahoma" panose="020B0604030504040204" pitchFamily="34" charset="0"/>
-                          <a:cs typeface="Tahoma" panose="020B0604030504040204" pitchFamily="34" charset="0"/>
-                        </a:rPr>
-                        <a:t>POM </a:t>
-                      </a:r>
-                      <a:r>
-                        <a:rPr lang="th-TH" sz="1100" kern="1200" dirty="0">
-                          <a:solidFill>
-                            <a:schemeClr val="dk1"/>
-                          </a:solidFill>
-                          <a:latin typeface="Tahoma" panose="020B0604030504040204" pitchFamily="34" charset="0"/>
-                          <a:ea typeface="Tahoma" panose="020B0604030504040204" pitchFamily="34" charset="0"/>
-                          <a:cs typeface="Tahoma" panose="020B0604030504040204" pitchFamily="34" charset="0"/>
-                        </a:rPr>
-                        <a:t>อีกครั้ง</a:t>
-                      </a:r>
-                      <a:endParaRPr lang="en-US" sz="1100" kern="1200" dirty="0">
-                        <a:solidFill>
-                          <a:schemeClr val="dk1"/>
-                        </a:solidFill>
-                        <a:latin typeface="Tahoma" panose="020B0604030504040204" pitchFamily="34" charset="0"/>
-                        <a:ea typeface="Tahoma" panose="020B0604030504040204" pitchFamily="34" charset="0"/>
-                        <a:cs typeface="Tahoma" panose="020B0604030504040204" pitchFamily="34" charset="0"/>
-                      </a:endParaRPr>
-                    </a:p>
-                  </a:txBody>
-                  <a:tcPr/>
-                </a:tc>
-                <a:extLst>
-                  <a:ext uri="{0D108BD9-81ED-4DB2-BD59-A6C34878D82A}">
-                    <a16:rowId xmlns:a16="http://schemas.microsoft.com/office/drawing/2014/main" val="3017775110"/>
-                  </a:ext>
-                </a:extLst>
-              </a:tr>
-              <a:tr h="970218">
-                <a:tc>
-                  <a:txBody>
-                    <a:bodyPr/>
-                    <a:lstStyle/>
-                    <a:p>
-                      <a:pPr algn="ctr"/>
-                      <a:r>
-                        <a:rPr lang="en-US" sz="1100" kern="1200" dirty="0">
-                          <a:solidFill>
-                            <a:schemeClr val="dk1"/>
-                          </a:solidFill>
-                          <a:latin typeface="Tahoma" panose="020B0604030504040204" pitchFamily="34" charset="0"/>
-                          <a:ea typeface="Tahoma" panose="020B0604030504040204" pitchFamily="34" charset="0"/>
-                          <a:cs typeface="Tahoma" panose="020B0604030504040204" pitchFamily="34" charset="0"/>
-                        </a:rPr>
-                        <a:t>3</a:t>
-                      </a:r>
-                    </a:p>
-                  </a:txBody>
-                  <a:tcPr/>
-                </a:tc>
-                <a:tc>
-                  <a:txBody>
-                    <a:bodyPr/>
-                    <a:lstStyle/>
-                    <a:p>
-                      <a:r>
-                        <a:rPr lang="en-US" sz="1100" u="sng" kern="1200" dirty="0">
-                          <a:solidFill>
-                            <a:schemeClr val="dk1"/>
-                          </a:solidFill>
-                          <a:latin typeface="Tahoma" panose="020B0604030504040204" pitchFamily="34" charset="0"/>
-                          <a:ea typeface="Tahoma" panose="020B0604030504040204" pitchFamily="34" charset="0"/>
-                          <a:cs typeface="Tahoma" panose="020B0604030504040204" pitchFamily="34" charset="0"/>
-                        </a:rPr>
-                        <a:t>Dry Food</a:t>
-                      </a:r>
-                    </a:p>
-                    <a:p>
-                      <a:r>
-                        <a:rPr lang="en-US" sz="1100" u="sng" kern="1200" dirty="0">
-                          <a:solidFill>
-                            <a:schemeClr val="dk1"/>
-                          </a:solidFill>
-                          <a:latin typeface="Tahoma" panose="020B0604030504040204" pitchFamily="34" charset="0"/>
-                          <a:ea typeface="Tahoma" panose="020B0604030504040204" pitchFamily="34" charset="0"/>
-                          <a:cs typeface="Tahoma" panose="020B0604030504040204" pitchFamily="34" charset="0"/>
-                        </a:rPr>
-                        <a:t>Shrinkage</a:t>
-                      </a:r>
-                    </a:p>
-                    <a:p>
-                      <a:r>
-                        <a:rPr lang="en-US" sz="1100" u="none" kern="1200" dirty="0">
-                          <a:solidFill>
-                            <a:schemeClr val="dk1"/>
-                          </a:solidFill>
-                          <a:latin typeface="Tahoma" panose="020B0604030504040204" pitchFamily="34" charset="0"/>
-                          <a:ea typeface="Tahoma" panose="020B0604030504040204" pitchFamily="34" charset="0"/>
-                          <a:cs typeface="Tahoma" panose="020B0604030504040204" pitchFamily="34" charset="0"/>
-                        </a:rPr>
-                        <a:t>-</a:t>
-                      </a:r>
-                      <a:r>
-                        <a:rPr lang="th-TH" sz="1100" u="none" kern="1200" dirty="0">
-                          <a:solidFill>
-                            <a:schemeClr val="dk1"/>
-                          </a:solidFill>
-                          <a:latin typeface="Tahoma" panose="020B0604030504040204" pitchFamily="34" charset="0"/>
-                          <a:ea typeface="Tahoma" panose="020B0604030504040204" pitchFamily="34" charset="0"/>
-                          <a:cs typeface="Tahoma" panose="020B0604030504040204" pitchFamily="34" charset="0"/>
-                        </a:rPr>
-                        <a:t>-มีการปรับปรุง</a:t>
-                      </a:r>
-                      <a:r>
-                        <a:rPr lang="en-US" sz="1100" u="none" kern="1200" dirty="0">
-                          <a:solidFill>
-                            <a:schemeClr val="dk1"/>
-                          </a:solidFill>
-                          <a:latin typeface="Tahoma" panose="020B0604030504040204" pitchFamily="34" charset="0"/>
-                          <a:ea typeface="Tahoma" panose="020B0604030504040204" pitchFamily="34" charset="0"/>
-                          <a:cs typeface="Tahoma" panose="020B0604030504040204" pitchFamily="34" charset="0"/>
-                        </a:rPr>
-                        <a:t>negative stock</a:t>
-                      </a:r>
-                    </a:p>
-                    <a:p>
-                      <a:endParaRPr lang="th-TH" sz="1100" u="none" kern="1200" dirty="0">
-                        <a:solidFill>
-                          <a:schemeClr val="dk1"/>
-                        </a:solidFill>
-                        <a:latin typeface="Tahoma" panose="020B0604030504040204" pitchFamily="34" charset="0"/>
-                        <a:ea typeface="Tahoma" panose="020B0604030504040204" pitchFamily="34" charset="0"/>
-                        <a:cs typeface="Tahoma" panose="020B0604030504040204" pitchFamily="34" charset="0"/>
-                      </a:endParaRPr>
-                    </a:p>
-                  </a:txBody>
-                  <a:tcPr/>
-                </a:tc>
-                <a:tc>
-                  <a:txBody>
-                    <a:bodyPr/>
-                    <a:lstStyle/>
-                    <a:p>
-                      <a:pPr marL="228600" indent="-228600">
-                        <a:buAutoNum type="arabicPeriod"/>
-                      </a:pPr>
-                      <a:r>
-                        <a:rPr lang="en-US" sz="1100" kern="1200" dirty="0">
-                          <a:solidFill>
-                            <a:schemeClr val="dk1"/>
-                          </a:solidFill>
-                          <a:latin typeface="Tahoma" panose="020B0604030504040204" pitchFamily="34" charset="0"/>
-                          <a:ea typeface="Tahoma" panose="020B0604030504040204" pitchFamily="34" charset="0"/>
-                          <a:cs typeface="Tahoma" panose="020B0604030504040204" pitchFamily="34" charset="0"/>
-                        </a:rPr>
-                        <a:t>LP,GR </a:t>
-                      </a:r>
-                      <a:r>
-                        <a:rPr lang="th-TH" sz="1100" kern="1200" dirty="0">
-                          <a:solidFill>
-                            <a:schemeClr val="dk1"/>
-                          </a:solidFill>
-                          <a:latin typeface="Tahoma" panose="020B0604030504040204" pitchFamily="34" charset="0"/>
-                          <a:ea typeface="Tahoma" panose="020B0604030504040204" pitchFamily="34" charset="0"/>
-                          <a:cs typeface="Tahoma" panose="020B0604030504040204" pitchFamily="34" charset="0"/>
-                        </a:rPr>
-                        <a:t>และแผนกทำการตรวจสอบสินค้าที่รับจากดีซีทุกครั้งและติดตามกรณีพบสินค้าขาดส่ง</a:t>
-                      </a:r>
-                    </a:p>
-                    <a:p>
-                      <a:pPr marL="228600" indent="-228600">
-                        <a:buAutoNum type="arabicPeriod"/>
-                      </a:pPr>
-                      <a:r>
-                        <a:rPr lang="en-US" sz="1100" kern="1200" dirty="0">
-                          <a:solidFill>
-                            <a:schemeClr val="dk1"/>
-                          </a:solidFill>
-                          <a:latin typeface="Tahoma" panose="020B0604030504040204" pitchFamily="34" charset="0"/>
-                          <a:ea typeface="Tahoma" panose="020B0604030504040204" pitchFamily="34" charset="0"/>
-                          <a:cs typeface="Tahoma" panose="020B0604030504040204" pitchFamily="34" charset="0"/>
-                        </a:rPr>
-                        <a:t>Stockroom </a:t>
-                      </a:r>
-                      <a:r>
-                        <a:rPr lang="th-TH" sz="1100" kern="1200" dirty="0">
-                          <a:solidFill>
-                            <a:schemeClr val="dk1"/>
-                          </a:solidFill>
-                          <a:latin typeface="Tahoma" panose="020B0604030504040204" pitchFamily="34" charset="0"/>
-                          <a:ea typeface="Tahoma" panose="020B0604030504040204" pitchFamily="34" charset="0"/>
-                          <a:cs typeface="Tahoma" panose="020B0604030504040204" pitchFamily="34" charset="0"/>
-                        </a:rPr>
-                        <a:t>ต้องได้ตาม </a:t>
-                      </a:r>
-                      <a:r>
-                        <a:rPr lang="en-US" sz="1100" kern="1200" dirty="0">
-                          <a:solidFill>
-                            <a:schemeClr val="dk1"/>
-                          </a:solidFill>
-                          <a:latin typeface="Tahoma" panose="020B0604030504040204" pitchFamily="34" charset="0"/>
-                          <a:ea typeface="Tahoma" panose="020B0604030504040204" pitchFamily="34" charset="0"/>
-                          <a:cs typeface="Tahoma" panose="020B0604030504040204" pitchFamily="34" charset="0"/>
-                        </a:rPr>
-                        <a:t>Standard </a:t>
-                      </a:r>
-                      <a:r>
-                        <a:rPr lang="th-TH" sz="1100" kern="1200" dirty="0">
-                          <a:solidFill>
-                            <a:schemeClr val="dk1"/>
-                          </a:solidFill>
-                          <a:latin typeface="Tahoma" panose="020B0604030504040204" pitchFamily="34" charset="0"/>
-                          <a:ea typeface="Tahoma" panose="020B0604030504040204" pitchFamily="34" charset="0"/>
-                          <a:cs typeface="Tahoma" panose="020B0604030504040204" pitchFamily="34" charset="0"/>
-                        </a:rPr>
-                        <a:t>ทุกวัน เพื่อตรวจสอบได้ง่าย</a:t>
-                      </a:r>
-                    </a:p>
-                  </a:txBody>
-                  <a:tcPr/>
-                </a:tc>
-                <a:tc>
-                  <a:txBody>
-                    <a:bodyPr/>
-                    <a:lstStyle/>
-                    <a:p>
-                      <a:pPr marL="0" marR="0" lvl="0" indent="0" algn="l" defTabSz="761970" rtl="0" eaLnBrk="1" fontAlgn="auto" latinLnBrk="0" hangingPunct="1">
-                        <a:lnSpc>
-                          <a:spcPct val="100000"/>
-                        </a:lnSpc>
-                        <a:spcBef>
-                          <a:spcPts val="0"/>
-                        </a:spcBef>
-                        <a:spcAft>
-                          <a:spcPts val="0"/>
-                        </a:spcAft>
-                        <a:buClrTx/>
-                        <a:buSzTx/>
-                        <a:buFontTx/>
-                        <a:buNone/>
-                        <a:tabLst/>
-                        <a:defRPr/>
-                      </a:pPr>
-                      <a:r>
-                        <a:rPr lang="en-US" sz="1100" kern="1200" dirty="0">
-                          <a:solidFill>
-                            <a:schemeClr val="tx1"/>
-                          </a:solidFill>
-                          <a:latin typeface="Tahoma" panose="020B0604030504040204" pitchFamily="34" charset="0"/>
-                          <a:ea typeface="Tahoma" panose="020B0604030504040204" pitchFamily="34" charset="0"/>
-                          <a:cs typeface="Tahoma" panose="020B0604030504040204" pitchFamily="34" charset="0"/>
-                        </a:rPr>
-                        <a:t>M1 ,M.Opt,C3,C9,LP</a:t>
-                      </a:r>
-                      <a:endParaRPr lang="th-TH" sz="1100" kern="1200" dirty="0">
-                        <a:solidFill>
-                          <a:schemeClr val="tx1"/>
-                        </a:solidFill>
-                        <a:latin typeface="Tahoma" panose="020B0604030504040204" pitchFamily="34" charset="0"/>
-                        <a:ea typeface="Tahoma" panose="020B0604030504040204" pitchFamily="34" charset="0"/>
-                        <a:cs typeface="Tahoma" panose="020B0604030504040204" pitchFamily="34" charset="0"/>
-                      </a:endParaRPr>
-                    </a:p>
-                  </a:txBody>
-                  <a:tcPr/>
-                </a:tc>
-                <a:tc>
-                  <a:txBody>
-                    <a:bodyPr/>
-                    <a:lstStyle/>
-                    <a:p>
-                      <a:r>
-                        <a:rPr lang="en-US" sz="1100" dirty="0">
-                          <a:latin typeface="Tahoma" panose="020B0604030504040204" pitchFamily="34" charset="0"/>
-                          <a:ea typeface="Tahoma" panose="020B0604030504040204" pitchFamily="34" charset="0"/>
-                          <a:cs typeface="Tahoma" panose="020B0604030504040204" pitchFamily="34" charset="0"/>
-                        </a:rPr>
-                        <a:t>Jan – Dec 2026</a:t>
-                      </a:r>
-                    </a:p>
-                  </a:txBody>
-                  <a:tcPr/>
-                </a:tc>
-                <a:tc>
-                  <a:txBody>
-                    <a:bodyPr/>
-                    <a:lstStyle/>
-                    <a:p>
-                      <a:r>
-                        <a:rPr lang="th-TH" sz="1100" kern="1200" dirty="0">
-                          <a:solidFill>
-                            <a:schemeClr val="dk1"/>
-                          </a:solidFill>
-                          <a:latin typeface="Tahoma" panose="020B0604030504040204" pitchFamily="34" charset="0"/>
-                          <a:ea typeface="Tahoma" panose="020B0604030504040204" pitchFamily="34" charset="0"/>
-                          <a:cs typeface="Tahoma" panose="020B0604030504040204" pitchFamily="34" charset="0"/>
-                        </a:rPr>
-                        <a:t>1.</a:t>
-                      </a:r>
-                      <a:r>
-                        <a:rPr lang="en-US" sz="1100" kern="1200" dirty="0">
-                          <a:solidFill>
-                            <a:schemeClr val="dk1"/>
-                          </a:solidFill>
-                          <a:latin typeface="Tahoma" panose="020B0604030504040204" pitchFamily="34" charset="0"/>
-                          <a:ea typeface="Tahoma" panose="020B0604030504040204" pitchFamily="34" charset="0"/>
-                          <a:cs typeface="Tahoma" panose="020B0604030504040204" pitchFamily="34" charset="0"/>
-                        </a:rPr>
-                        <a:t>LP </a:t>
-                      </a:r>
-                      <a:r>
-                        <a:rPr lang="th-TH" sz="1100" kern="1200" dirty="0">
-                          <a:solidFill>
-                            <a:schemeClr val="dk1"/>
-                          </a:solidFill>
-                          <a:latin typeface="Tahoma" panose="020B0604030504040204" pitchFamily="34" charset="0"/>
-                          <a:ea typeface="Tahoma" panose="020B0604030504040204" pitchFamily="34" charset="0"/>
-                          <a:cs typeface="Tahoma" panose="020B0604030504040204" pitchFamily="34" charset="0"/>
-                        </a:rPr>
-                        <a:t>สุ่มตรวจสอบสินค้าที่มาจากดีซีว่าเข้าครบหรือไม่</a:t>
-                      </a:r>
-                    </a:p>
-                  </a:txBody>
-                  <a:tcPr/>
-                </a:tc>
-                <a:extLst>
-                  <a:ext uri="{0D108BD9-81ED-4DB2-BD59-A6C34878D82A}">
-                    <a16:rowId xmlns:a16="http://schemas.microsoft.com/office/drawing/2014/main" val="835018440"/>
-                  </a:ext>
-                </a:extLst>
-              </a:tr>
-            </a:tbl>
-          </a:graphicData>
-        </a:graphic>
-      </p:graphicFrame>
-    </p:spTree>
-    <p:extLst>
-      <p:ext uri="{BB962C8B-B14F-4D97-AF65-F5344CB8AC3E}">
-        <p14:creationId xmlns:p14="http://schemas.microsoft.com/office/powerpoint/2010/main" val="3629752081"/>
-      </p:ext>
-    </p:extLst>
-  </p:cSld>
-  <p:clrMapOvr>
-    <a:masterClrMapping/>
-  </p:clrMapOvr>
-</p:sld>
-</file>
-
-<file path=ppt/slides/slide11.xml><?xml version="1.0" encoding="utf-8"?>
-<p:sld xmlns:a="http://schemas.openxmlformats.org/drawingml/2006/main" xmlns:r="http://schemas.openxmlformats.org/officeDocument/2006/relationships" xmlns:p="http://schemas.openxmlformats.org/presentationml/2006/main">
-  <p:cSld>
-    <p:spTree>
-      <p:nvGrpSpPr>
-        <p:cNvPr id="1" name="">
-          <a:extLst>
-            <a:ext uri="{FF2B5EF4-FFF2-40B4-BE49-F238E27FC236}">
-              <a16:creationId xmlns:a16="http://schemas.microsoft.com/office/drawing/2014/main" id="{B36229DE-A439-D108-AB05-F58B1EDE7F9A}"/>
-            </a:ext>
-          </a:extLst>
-        </p:cNvPr>
-        <p:cNvGrpSpPr/>
-        <p:nvPr/>
-      </p:nvGrpSpPr>
-      <p:grpSpPr>
-        <a:xfrm>
-          <a:off x="0" y="0"/>
-          <a:ext cx="0" cy="0"/>
-          <a:chOff x="0" y="0"/>
-          <a:chExt cx="0" cy="0"/>
-        </a:xfrm>
-      </p:grpSpPr>
-      <p:sp>
-        <p:nvSpPr>
-          <p:cNvPr id="2" name="Text Placeholder 1">
-            <a:extLst>
-              <a:ext uri="{FF2B5EF4-FFF2-40B4-BE49-F238E27FC236}">
-                <a16:creationId xmlns:a16="http://schemas.microsoft.com/office/drawing/2014/main" id="{D279D278-012B-152D-3870-B77B33997103}"/>
-              </a:ext>
-            </a:extLst>
-          </p:cNvPr>
-          <p:cNvSpPr>
-            <a:spLocks noGrp="1"/>
-          </p:cNvSpPr>
-          <p:nvPr>
-            <p:ph type="body" sz="quarter" idx="13"/>
-          </p:nvPr>
-        </p:nvSpPr>
-        <p:spPr/>
-        <p:txBody>
-          <a:bodyPr>
-            <a:normAutofit/>
-          </a:bodyPr>
-          <a:lstStyle/>
-          <a:p>
-            <a:r>
-              <a:rPr lang="en-US" sz="2400" dirty="0">
-                <a:latin typeface="Tahoma" panose="020B0604030504040204" pitchFamily="34" charset="0"/>
-                <a:ea typeface="Tahoma" panose="020B0604030504040204" pitchFamily="34" charset="0"/>
-                <a:cs typeface="Tahoma" panose="020B0604030504040204" pitchFamily="34" charset="0"/>
-              </a:rPr>
-              <a:t>Action plan  </a:t>
-            </a:r>
-          </a:p>
-          <a:p>
-            <a:endParaRPr lang="en-US" sz="2400" dirty="0">
-              <a:latin typeface="Tahoma" panose="020B0604030504040204" pitchFamily="34" charset="0"/>
-              <a:ea typeface="Tahoma" panose="020B0604030504040204" pitchFamily="34" charset="0"/>
-              <a:cs typeface="Tahoma" panose="020B0604030504040204" pitchFamily="34" charset="0"/>
-            </a:endParaRPr>
-          </a:p>
-          <a:p>
-            <a:endParaRPr lang="en-US" dirty="0"/>
-          </a:p>
-        </p:txBody>
-      </p:sp>
-      <p:graphicFrame>
-        <p:nvGraphicFramePr>
-          <p:cNvPr id="3" name="Table 5">
-            <a:extLst>
-              <a:ext uri="{FF2B5EF4-FFF2-40B4-BE49-F238E27FC236}">
-                <a16:creationId xmlns:a16="http://schemas.microsoft.com/office/drawing/2014/main" id="{9F2D99E8-4FBF-E4C6-111F-F2DEAAEDC37F}"/>
-              </a:ext>
-            </a:extLst>
-          </p:cNvPr>
-          <p:cNvGraphicFramePr>
-            <a:graphicFrameLocks noGrp="1"/>
-          </p:cNvGraphicFramePr>
-          <p:nvPr>
-            <p:extLst>
-              <p:ext uri="{D42A27DB-BD31-4B8C-83A1-F6EECF244321}">
-                <p14:modId xmlns:p14="http://schemas.microsoft.com/office/powerpoint/2010/main" val="1923572504"/>
-              </p:ext>
-            </p:extLst>
-          </p:nvPr>
-        </p:nvGraphicFramePr>
-        <p:xfrm>
-          <a:off x="394252" y="837330"/>
-          <a:ext cx="11424497" cy="2453219"/>
-        </p:xfrm>
-        <a:graphic>
-          <a:graphicData uri="http://schemas.openxmlformats.org/drawingml/2006/table">
-            <a:tbl>
-              <a:tblPr firstRow="1" bandRow="1">
-                <a:tableStyleId>{F5AB1C69-6EDB-4FF4-983F-18BD219EF322}</a:tableStyleId>
-              </a:tblPr>
-              <a:tblGrid>
-                <a:gridCol w="580906">
-                  <a:extLst>
-                    <a:ext uri="{9D8B030D-6E8A-4147-A177-3AD203B41FA5}">
-                      <a16:colId xmlns:a16="http://schemas.microsoft.com/office/drawing/2014/main" val="50567754"/>
-                    </a:ext>
-                  </a:extLst>
-                </a:gridCol>
-                <a:gridCol w="2647936">
-                  <a:extLst>
-                    <a:ext uri="{9D8B030D-6E8A-4147-A177-3AD203B41FA5}">
-                      <a16:colId xmlns:a16="http://schemas.microsoft.com/office/drawing/2014/main" val="2465639924"/>
-                    </a:ext>
-                  </a:extLst>
-                </a:gridCol>
-                <a:gridCol w="3519578">
-                  <a:extLst>
-                    <a:ext uri="{9D8B030D-6E8A-4147-A177-3AD203B41FA5}">
-                      <a16:colId xmlns:a16="http://schemas.microsoft.com/office/drawing/2014/main" val="1011173274"/>
-                    </a:ext>
-                  </a:extLst>
-                </a:gridCol>
-                <a:gridCol w="1992702">
-                  <a:extLst>
-                    <a:ext uri="{9D8B030D-6E8A-4147-A177-3AD203B41FA5}">
-                      <a16:colId xmlns:a16="http://schemas.microsoft.com/office/drawing/2014/main" val="3843171633"/>
-                    </a:ext>
-                  </a:extLst>
-                </a:gridCol>
-                <a:gridCol w="1212275">
-                  <a:extLst>
-                    <a:ext uri="{9D8B030D-6E8A-4147-A177-3AD203B41FA5}">
-                      <a16:colId xmlns:a16="http://schemas.microsoft.com/office/drawing/2014/main" val="1439720936"/>
-                    </a:ext>
-                  </a:extLst>
-                </a:gridCol>
-                <a:gridCol w="1471100">
-                  <a:extLst>
-                    <a:ext uri="{9D8B030D-6E8A-4147-A177-3AD203B41FA5}">
-                      <a16:colId xmlns:a16="http://schemas.microsoft.com/office/drawing/2014/main" val="3308817400"/>
-                    </a:ext>
-                  </a:extLst>
-                </a:gridCol>
-              </a:tblGrid>
-              <a:tr h="455744">
-                <a:tc>
-                  <a:txBody>
-                    <a:bodyPr/>
-                    <a:lstStyle/>
-                    <a:p>
-                      <a:pPr algn="ctr"/>
-                      <a:r>
-                        <a:rPr lang="en-US" sz="1400" dirty="0">
-                          <a:solidFill>
-                            <a:schemeClr val="tx1"/>
-                          </a:solidFill>
-                          <a:latin typeface="Tahoma" panose="020B0604030504040204" pitchFamily="34" charset="0"/>
-                          <a:ea typeface="Tahoma" panose="020B0604030504040204" pitchFamily="34" charset="0"/>
-                          <a:cs typeface="Tahoma" panose="020B0604030504040204" pitchFamily="34" charset="0"/>
-                        </a:rPr>
-                        <a:t>No.</a:t>
-                      </a:r>
-                    </a:p>
-                  </a:txBody>
-                  <a:tcPr anchor="ctr"/>
-                </a:tc>
-                <a:tc>
-                  <a:txBody>
-                    <a:bodyPr/>
-                    <a:lstStyle/>
-                    <a:p>
-                      <a:pPr algn="ctr"/>
-                      <a:r>
-                        <a:rPr lang="en-US" sz="1400" dirty="0">
-                          <a:solidFill>
-                            <a:schemeClr val="tx1"/>
-                          </a:solidFill>
-                          <a:latin typeface="Tahoma" panose="020B0604030504040204" pitchFamily="34" charset="0"/>
-                          <a:ea typeface="Tahoma" panose="020B0604030504040204" pitchFamily="34" charset="0"/>
-                          <a:cs typeface="Tahoma" panose="020B0604030504040204" pitchFamily="34" charset="0"/>
-                        </a:rPr>
-                        <a:t>Root cause</a:t>
-                      </a:r>
-                    </a:p>
-                  </a:txBody>
-                  <a:tcPr anchor="ctr"/>
-                </a:tc>
-                <a:tc>
-                  <a:txBody>
-                    <a:bodyPr/>
-                    <a:lstStyle/>
-                    <a:p>
-                      <a:pPr algn="ctr"/>
-                      <a:r>
-                        <a:rPr lang="en-US" sz="1400" dirty="0">
-                          <a:solidFill>
-                            <a:schemeClr val="tx1"/>
-                          </a:solidFill>
-                          <a:latin typeface="Tahoma" panose="020B0604030504040204" pitchFamily="34" charset="0"/>
-                          <a:ea typeface="Tahoma" panose="020B0604030504040204" pitchFamily="34" charset="0"/>
-                          <a:cs typeface="Tahoma" panose="020B0604030504040204" pitchFamily="34" charset="0"/>
-                        </a:rPr>
-                        <a:t>Action</a:t>
-                      </a:r>
-                    </a:p>
-                  </a:txBody>
-                  <a:tcPr anchor="ctr"/>
-                </a:tc>
-                <a:tc>
-                  <a:txBody>
-                    <a:bodyPr/>
-                    <a:lstStyle/>
-                    <a:p>
-                      <a:pPr algn="ctr"/>
-                      <a:r>
-                        <a:rPr lang="en-US" sz="1400" dirty="0">
-                          <a:solidFill>
-                            <a:schemeClr val="tx1"/>
-                          </a:solidFill>
-                          <a:latin typeface="Tahoma" panose="020B0604030504040204" pitchFamily="34" charset="0"/>
-                          <a:ea typeface="Tahoma" panose="020B0604030504040204" pitchFamily="34" charset="0"/>
-                          <a:cs typeface="Tahoma" panose="020B0604030504040204" pitchFamily="34" charset="0"/>
-                        </a:rPr>
-                        <a:t>Who</a:t>
-                      </a:r>
-                    </a:p>
-                  </a:txBody>
-                  <a:tcPr anchor="ctr"/>
-                </a:tc>
-                <a:tc>
-                  <a:txBody>
-                    <a:bodyPr/>
-                    <a:lstStyle/>
-                    <a:p>
-                      <a:pPr algn="ctr"/>
-                      <a:r>
-                        <a:rPr lang="en-US" sz="1400" dirty="0">
-                          <a:solidFill>
-                            <a:schemeClr val="tx1"/>
-                          </a:solidFill>
-                          <a:latin typeface="Tahoma" panose="020B0604030504040204" pitchFamily="34" charset="0"/>
-                          <a:ea typeface="Tahoma" panose="020B0604030504040204" pitchFamily="34" charset="0"/>
-                          <a:cs typeface="Tahoma" panose="020B0604030504040204" pitchFamily="34" charset="0"/>
-                        </a:rPr>
-                        <a:t>When</a:t>
-                      </a:r>
-                    </a:p>
-                  </a:txBody>
-                  <a:tcPr anchor="ctr"/>
-                </a:tc>
-                <a:tc>
-                  <a:txBody>
-                    <a:bodyPr/>
-                    <a:lstStyle/>
-                    <a:p>
-                      <a:pPr algn="ctr"/>
-                      <a:r>
-                        <a:rPr lang="en-US" sz="1400" dirty="0">
-                          <a:solidFill>
-                            <a:schemeClr val="tx1"/>
-                          </a:solidFill>
-                          <a:latin typeface="Tahoma" panose="020B0604030504040204" pitchFamily="34" charset="0"/>
-                          <a:ea typeface="Tahoma" panose="020B0604030504040204" pitchFamily="34" charset="0"/>
-                          <a:cs typeface="Tahoma" panose="020B0604030504040204" pitchFamily="34" charset="0"/>
-                        </a:rPr>
-                        <a:t>Monitoring</a:t>
-                      </a:r>
-                    </a:p>
-                  </a:txBody>
-                  <a:tcPr anchor="ctr"/>
-                </a:tc>
-                <a:extLst>
-                  <a:ext uri="{0D108BD9-81ED-4DB2-BD59-A6C34878D82A}">
-                    <a16:rowId xmlns:a16="http://schemas.microsoft.com/office/drawing/2014/main" val="2309402925"/>
-                  </a:ext>
-                </a:extLst>
-              </a:tr>
-              <a:tr h="1027257">
-                <a:tc>
-                  <a:txBody>
-                    <a:bodyPr/>
-                    <a:lstStyle/>
-                    <a:p>
-                      <a:pPr algn="ctr"/>
-                      <a:r>
-                        <a:rPr lang="th-TH" sz="1100" dirty="0">
-                          <a:latin typeface="Tahoma" panose="020B0604030504040204" pitchFamily="34" charset="0"/>
-                          <a:ea typeface="Tahoma" panose="020B0604030504040204" pitchFamily="34" charset="0"/>
-                          <a:cs typeface="Tahoma" panose="020B0604030504040204" pitchFamily="34" charset="0"/>
-                        </a:rPr>
-                        <a:t>4.</a:t>
-                      </a:r>
-                      <a:endParaRPr lang="en-US" sz="1100" dirty="0">
-                        <a:latin typeface="Tahoma" panose="020B0604030504040204" pitchFamily="34" charset="0"/>
-                        <a:ea typeface="Tahoma" panose="020B0604030504040204" pitchFamily="34" charset="0"/>
-                        <a:cs typeface="Tahoma" panose="020B0604030504040204" pitchFamily="34" charset="0"/>
-                      </a:endParaRPr>
-                    </a:p>
-                  </a:txBody>
-                  <a:tcPr/>
-                </a:tc>
-                <a:tc>
-                  <a:txBody>
-                    <a:bodyPr/>
-                    <a:lstStyle/>
-                    <a:p>
-                      <a:r>
-                        <a:rPr lang="en-US" sz="1100" u="sng" dirty="0" err="1">
-                          <a:latin typeface="Tahoma" panose="020B0604030504040204" pitchFamily="34" charset="0"/>
-                          <a:ea typeface="Tahoma" panose="020B0604030504040204" pitchFamily="34" charset="0"/>
-                          <a:cs typeface="Tahoma" panose="020B0604030504040204" pitchFamily="34" charset="0"/>
-                        </a:rPr>
-                        <a:t>Freshfood</a:t>
-                      </a:r>
-                      <a:br>
-                        <a:rPr lang="en-US" sz="1100" u="sng" dirty="0">
-                          <a:latin typeface="Tahoma" panose="020B0604030504040204" pitchFamily="34" charset="0"/>
-                          <a:ea typeface="Tahoma" panose="020B0604030504040204" pitchFamily="34" charset="0"/>
-                          <a:cs typeface="Tahoma" panose="020B0604030504040204" pitchFamily="34" charset="0"/>
-                        </a:rPr>
-                      </a:br>
-                      <a:r>
-                        <a:rPr lang="th-TH" sz="1100" u="none" dirty="0">
-                          <a:latin typeface="Tahoma" panose="020B0604030504040204" pitchFamily="34" charset="0"/>
-                          <a:ea typeface="Tahoma" panose="020B0604030504040204" pitchFamily="34" charset="0"/>
-                          <a:cs typeface="Tahoma" panose="020B0604030504040204" pitchFamily="34" charset="0"/>
-                        </a:rPr>
-                        <a:t>ขายเกิน</a:t>
-                      </a:r>
-                      <a:r>
-                        <a:rPr lang="en-US" sz="1100" u="none" dirty="0">
-                          <a:latin typeface="Tahoma" panose="020B0604030504040204" pitchFamily="34" charset="0"/>
-                          <a:ea typeface="Tahoma" panose="020B0604030504040204" pitchFamily="34" charset="0"/>
-                          <a:cs typeface="Tahoma" panose="020B0604030504040204" pitchFamily="34" charset="0"/>
-                        </a:rPr>
-                        <a:t>recipe </a:t>
-                      </a:r>
-                      <a:r>
-                        <a:rPr lang="th-TH" sz="1100" u="none" dirty="0">
-                          <a:latin typeface="Tahoma" panose="020B0604030504040204" pitchFamily="34" charset="0"/>
-                          <a:ea typeface="Tahoma" panose="020B0604030504040204" pitchFamily="34" charset="0"/>
-                          <a:cs typeface="Tahoma" panose="020B0604030504040204" pitchFamily="34" charset="0"/>
-                        </a:rPr>
-                        <a:t>ที่กำหนดจึงทำให้สินค้าสูญหาย เช่น ซอฟต์เสิร์ฟโกโก้แช่แข็ง</a:t>
-                      </a:r>
-                      <a:r>
-                        <a:rPr lang="en-US" sz="1100" u="none" dirty="0">
-                          <a:latin typeface="Tahoma" panose="020B0604030504040204" pitchFamily="34" charset="0"/>
-                          <a:ea typeface="Tahoma" panose="020B0604030504040204" pitchFamily="34" charset="0"/>
-                          <a:cs typeface="Tahoma" panose="020B0604030504040204" pitchFamily="34" charset="0"/>
-                        </a:rPr>
-                        <a:t>3</a:t>
-                      </a:r>
-                      <a:r>
-                        <a:rPr lang="th-TH" sz="1100" u="none" dirty="0">
-                          <a:latin typeface="Tahoma" panose="020B0604030504040204" pitchFamily="34" charset="0"/>
-                          <a:ea typeface="Tahoma" panose="020B0604030504040204" pitchFamily="34" charset="0"/>
-                          <a:cs typeface="Tahoma" panose="020B0604030504040204" pitchFamily="34" charset="0"/>
-                        </a:rPr>
-                        <a:t>กก</a:t>
-                      </a:r>
-                    </a:p>
-                    <a:p>
-                      <a:r>
-                        <a:rPr lang="th-TH" sz="1100" u="none" dirty="0">
-                          <a:latin typeface="Tahoma" panose="020B0604030504040204" pitchFamily="34" charset="0"/>
-                          <a:ea typeface="Tahoma" panose="020B0604030504040204" pitchFamily="34" charset="0"/>
-                          <a:cs typeface="Tahoma" panose="020B0604030504040204" pitchFamily="34" charset="0"/>
-                        </a:rPr>
-                        <a:t>ซอฟต์เสิร์ฟวานิลลาแช่แข็ง</a:t>
-                      </a:r>
-                      <a:r>
-                        <a:rPr lang="en-US" sz="1100" u="none" dirty="0">
-                          <a:latin typeface="Tahoma" panose="020B0604030504040204" pitchFamily="34" charset="0"/>
-                          <a:ea typeface="Tahoma" panose="020B0604030504040204" pitchFamily="34" charset="0"/>
-                          <a:cs typeface="Tahoma" panose="020B0604030504040204" pitchFamily="34" charset="0"/>
-                        </a:rPr>
-                        <a:t>3</a:t>
-                      </a:r>
-                      <a:r>
-                        <a:rPr lang="th-TH" sz="1100" u="none" dirty="0">
-                          <a:latin typeface="Tahoma" panose="020B0604030504040204" pitchFamily="34" charset="0"/>
-                          <a:ea typeface="Tahoma" panose="020B0604030504040204" pitchFamily="34" charset="0"/>
-                          <a:cs typeface="Tahoma" panose="020B0604030504040204" pitchFamily="34" charset="0"/>
-                        </a:rPr>
-                        <a:t>กก.</a:t>
-                      </a:r>
-                      <a:r>
-                        <a:rPr lang="en-US" sz="1100" u="none" dirty="0">
-                          <a:latin typeface="Tahoma" panose="020B0604030504040204" pitchFamily="34" charset="0"/>
-                          <a:ea typeface="Tahoma" panose="020B0604030504040204" pitchFamily="34" charset="0"/>
-                          <a:cs typeface="Tahoma" panose="020B0604030504040204" pitchFamily="34" charset="0"/>
-                        </a:rPr>
-                        <a:t>,</a:t>
-                      </a:r>
-                      <a:r>
-                        <a:rPr lang="th-TH" sz="1100" u="none" dirty="0">
-                          <a:latin typeface="Tahoma" panose="020B0604030504040204" pitchFamily="34" charset="0"/>
-                          <a:ea typeface="Tahoma" panose="020B0604030504040204" pitchFamily="34" charset="0"/>
-                          <a:cs typeface="Tahoma" panose="020B0604030504040204" pitchFamily="34" charset="0"/>
-                        </a:rPr>
-                        <a:t>น้ำทาร์ตไข่สำเร็จรูปแช่แข็ง</a:t>
-                      </a:r>
-                    </a:p>
-                    <a:p>
-                      <a:endParaRPr lang="th-TH" sz="1100" u="none" dirty="0">
-                        <a:latin typeface="Tahoma" panose="020B0604030504040204" pitchFamily="34" charset="0"/>
-                        <a:ea typeface="Tahoma" panose="020B0604030504040204" pitchFamily="34" charset="0"/>
-                        <a:cs typeface="Tahoma" panose="020B0604030504040204" pitchFamily="34" charset="0"/>
-                      </a:endParaRPr>
-                    </a:p>
-                  </a:txBody>
-                  <a:tcPr/>
-                </a:tc>
-                <a:tc>
-                  <a:txBody>
-                    <a:bodyPr/>
-                    <a:lstStyle/>
-                    <a:p>
-                      <a:pPr marL="228600" indent="-228600">
-                        <a:buAutoNum type="arabicPeriod"/>
-                      </a:pPr>
-                      <a:r>
-                        <a:rPr lang="en-US" sz="1100" kern="1200" dirty="0">
-                          <a:solidFill>
-                            <a:schemeClr val="dk1"/>
-                          </a:solidFill>
-                          <a:latin typeface="Tahoma" panose="020B0604030504040204" pitchFamily="34" charset="0"/>
-                          <a:ea typeface="Tahoma" panose="020B0604030504040204" pitchFamily="34" charset="0"/>
-                          <a:cs typeface="Tahoma" panose="020B0604030504040204" pitchFamily="34" charset="0"/>
-                        </a:rPr>
-                        <a:t>LP,GR </a:t>
-                      </a:r>
-                      <a:r>
-                        <a:rPr lang="th-TH" sz="1100" kern="1200" dirty="0">
-                          <a:solidFill>
-                            <a:schemeClr val="dk1"/>
-                          </a:solidFill>
-                          <a:latin typeface="Tahoma" panose="020B0604030504040204" pitchFamily="34" charset="0"/>
-                          <a:ea typeface="Tahoma" panose="020B0604030504040204" pitchFamily="34" charset="0"/>
-                          <a:cs typeface="Tahoma" panose="020B0604030504040204" pitchFamily="34" charset="0"/>
-                        </a:rPr>
-                        <a:t>และแผนกทำการตรวจสอบสินค้าที่รับจากดีซีทุกครั้งโดยเฉพาะกลุ่มชีส เนย ที่มีราคาแพงและติดตามกรณีพบสินค้าขาดส่ง</a:t>
-                      </a:r>
-                    </a:p>
-                    <a:p>
-                      <a:pPr marL="0" indent="0">
-                        <a:buNone/>
-                      </a:pPr>
-                      <a:r>
-                        <a:rPr lang="th-TH" sz="1100" kern="1200" dirty="0">
-                          <a:solidFill>
-                            <a:schemeClr val="dk1"/>
-                          </a:solidFill>
-                          <a:latin typeface="Tahoma" panose="020B0604030504040204" pitchFamily="34" charset="0"/>
-                          <a:ea typeface="Tahoma" panose="020B0604030504040204" pitchFamily="34" charset="0"/>
-                          <a:cs typeface="Tahoma" panose="020B0604030504040204" pitchFamily="34" charset="0"/>
-                        </a:rPr>
-                        <a:t>2. </a:t>
-                      </a:r>
-                      <a:r>
-                        <a:rPr lang="en-US" sz="1100" kern="1200" dirty="0">
-                          <a:solidFill>
-                            <a:schemeClr val="dk1"/>
-                          </a:solidFill>
-                          <a:latin typeface="Tahoma" panose="020B0604030504040204" pitchFamily="34" charset="0"/>
-                          <a:ea typeface="Tahoma" panose="020B0604030504040204" pitchFamily="34" charset="0"/>
-                          <a:cs typeface="Tahoma" panose="020B0604030504040204" pitchFamily="34" charset="0"/>
-                        </a:rPr>
-                        <a:t>C2,M Com </a:t>
-                      </a:r>
-                      <a:r>
-                        <a:rPr lang="th-TH" sz="1100" kern="1200" dirty="0">
-                          <a:solidFill>
-                            <a:schemeClr val="dk1"/>
-                          </a:solidFill>
-                          <a:latin typeface="Tahoma" panose="020B0604030504040204" pitchFamily="34" charset="0"/>
-                          <a:ea typeface="Tahoma" panose="020B0604030504040204" pitchFamily="34" charset="0"/>
-                          <a:cs typeface="Tahoma" panose="020B0604030504040204" pitchFamily="34" charset="0"/>
-                        </a:rPr>
-                        <a:t>กำชับพนักงานเรื่องการขายสินค้าให้เป็นไปตามสำนักงานใหญ่กำหนด โดยเฉพาะสินค้าไอศครีม</a:t>
-                      </a:r>
-                      <a:r>
-                        <a:rPr lang="th-TH" sz="1100" u="none" dirty="0">
-                          <a:latin typeface="Tahoma" panose="020B0604030504040204" pitchFamily="34" charset="0"/>
-                          <a:ea typeface="Tahoma" panose="020B0604030504040204" pitchFamily="34" charset="0"/>
-                          <a:cs typeface="Tahoma" panose="020B0604030504040204" pitchFamily="34" charset="0"/>
-                        </a:rPr>
-                        <a:t>ซอฟต์เสิร์ฟ</a:t>
-                      </a:r>
-                      <a:endParaRPr lang="th-TH" sz="1100" kern="1200" dirty="0">
-                        <a:solidFill>
-                          <a:schemeClr val="dk1"/>
-                        </a:solidFill>
-                        <a:latin typeface="Tahoma" panose="020B0604030504040204" pitchFamily="34" charset="0"/>
-                        <a:ea typeface="Tahoma" panose="020B0604030504040204" pitchFamily="34" charset="0"/>
-                        <a:cs typeface="Tahoma" panose="020B0604030504040204" pitchFamily="34" charset="0"/>
-                      </a:endParaRPr>
-                    </a:p>
-                  </a:txBody>
-                  <a:tcPr/>
-                </a:tc>
-                <a:tc>
-                  <a:txBody>
-                    <a:bodyPr/>
-                    <a:lstStyle/>
-                    <a:p>
-                      <a:pPr marL="0" marR="0" lvl="0" indent="0" algn="l" defTabSz="761970" rtl="0" eaLnBrk="1" fontAlgn="auto" latinLnBrk="0" hangingPunct="1">
-                        <a:lnSpc>
-                          <a:spcPct val="100000"/>
-                        </a:lnSpc>
-                        <a:spcBef>
-                          <a:spcPts val="0"/>
-                        </a:spcBef>
-                        <a:spcAft>
-                          <a:spcPts val="0"/>
-                        </a:spcAft>
-                        <a:buClrTx/>
-                        <a:buSzTx/>
-                        <a:buFontTx/>
-                        <a:buNone/>
-                        <a:tabLst/>
-                        <a:defRPr/>
-                      </a:pPr>
-                      <a:r>
-                        <a:rPr lang="en-US" sz="1100" kern="1200" dirty="0">
-                          <a:solidFill>
-                            <a:schemeClr val="tx1"/>
-                          </a:solidFill>
-                          <a:latin typeface="Tahoma" panose="020B0604030504040204" pitchFamily="34" charset="0"/>
-                          <a:ea typeface="Tahoma" panose="020B0604030504040204" pitchFamily="34" charset="0"/>
-                          <a:cs typeface="Tahoma" panose="020B0604030504040204" pitchFamily="34" charset="0"/>
-                        </a:rPr>
-                        <a:t>M1 ,</a:t>
-                      </a:r>
-                      <a:r>
-                        <a:rPr lang="en-US" sz="1100" kern="1200" dirty="0" err="1">
-                          <a:solidFill>
-                            <a:schemeClr val="tx1"/>
-                          </a:solidFill>
-                          <a:latin typeface="Tahoma" panose="020B0604030504040204" pitchFamily="34" charset="0"/>
-                          <a:ea typeface="Tahoma" panose="020B0604030504040204" pitchFamily="34" charset="0"/>
-                          <a:cs typeface="Tahoma" panose="020B0604030504040204" pitchFamily="34" charset="0"/>
-                        </a:rPr>
-                        <a:t>M.Opt,C</a:t>
-                      </a:r>
-                      <a:r>
-                        <a:rPr lang="th-TH" sz="1100" kern="1200" dirty="0">
-                          <a:solidFill>
-                            <a:schemeClr val="tx1"/>
-                          </a:solidFill>
-                          <a:latin typeface="Tahoma" panose="020B0604030504040204" pitchFamily="34" charset="0"/>
-                          <a:ea typeface="Tahoma" panose="020B0604030504040204" pitchFamily="34" charset="0"/>
-                          <a:cs typeface="Tahoma" panose="020B0604030504040204" pitchFamily="34" charset="0"/>
-                        </a:rPr>
-                        <a:t>2</a:t>
-                      </a:r>
-                      <a:r>
-                        <a:rPr lang="en-US" sz="1100" kern="1200" dirty="0">
-                          <a:solidFill>
-                            <a:schemeClr val="tx1"/>
-                          </a:solidFill>
-                          <a:latin typeface="Tahoma" panose="020B0604030504040204" pitchFamily="34" charset="0"/>
-                          <a:ea typeface="Tahoma" panose="020B0604030504040204" pitchFamily="34" charset="0"/>
-                          <a:cs typeface="Tahoma" panose="020B0604030504040204" pitchFamily="34" charset="0"/>
-                        </a:rPr>
-                        <a:t>,C9,LP</a:t>
-                      </a:r>
-                      <a:endParaRPr lang="th-TH" sz="1100" kern="1200" dirty="0">
-                        <a:solidFill>
-                          <a:schemeClr val="tx1"/>
-                        </a:solidFill>
-                        <a:latin typeface="Tahoma" panose="020B0604030504040204" pitchFamily="34" charset="0"/>
-                        <a:ea typeface="Tahoma" panose="020B0604030504040204" pitchFamily="34" charset="0"/>
-                        <a:cs typeface="Tahoma" panose="020B0604030504040204" pitchFamily="34" charset="0"/>
-                      </a:endParaRPr>
-                    </a:p>
-                  </a:txBody>
-                  <a:tcPr/>
-                </a:tc>
-                <a:tc>
-                  <a:txBody>
-                    <a:bodyPr/>
-                    <a:lstStyle/>
-                    <a:p>
-                      <a:r>
-                        <a:rPr lang="en-US" sz="1100" dirty="0">
-                          <a:latin typeface="Tahoma" panose="020B0604030504040204" pitchFamily="34" charset="0"/>
-                          <a:ea typeface="Tahoma" panose="020B0604030504040204" pitchFamily="34" charset="0"/>
-                          <a:cs typeface="Tahoma" panose="020B0604030504040204" pitchFamily="34" charset="0"/>
-                        </a:rPr>
-                        <a:t>Jan – Dec 2026</a:t>
-                      </a:r>
-                    </a:p>
-                  </a:txBody>
-                  <a:tcPr/>
-                </a:tc>
-                <a:tc>
-                  <a:txBody>
-                    <a:bodyPr/>
-                    <a:lstStyle/>
-                    <a:p>
-                      <a:pPr marL="0" marR="0" lvl="0" indent="0" algn="l" defTabSz="457200" rtl="0" eaLnBrk="1" fontAlgn="auto" latinLnBrk="0" hangingPunct="1">
-                        <a:lnSpc>
-                          <a:spcPct val="100000"/>
-                        </a:lnSpc>
-                        <a:spcBef>
-                          <a:spcPts val="0"/>
-                        </a:spcBef>
-                        <a:spcAft>
-                          <a:spcPts val="0"/>
-                        </a:spcAft>
-                        <a:buClrTx/>
-                        <a:buSzTx/>
-                        <a:buFontTx/>
-                        <a:buNone/>
-                        <a:tabLst/>
-                        <a:defRPr/>
-                      </a:pPr>
-                      <a:r>
-                        <a:rPr lang="th-TH" sz="1100" kern="1200" dirty="0">
-                          <a:solidFill>
-                            <a:schemeClr val="dk1"/>
-                          </a:solidFill>
-                          <a:latin typeface="Tahoma" panose="020B0604030504040204" pitchFamily="34" charset="0"/>
-                          <a:ea typeface="Tahoma" panose="020B0604030504040204" pitchFamily="34" charset="0"/>
-                          <a:cs typeface="Tahoma" panose="020B0604030504040204" pitchFamily="34" charset="0"/>
-                        </a:rPr>
-                        <a:t>1.</a:t>
-                      </a:r>
-                      <a:r>
-                        <a:rPr lang="en-US" sz="1100" kern="1200" dirty="0">
-                          <a:solidFill>
-                            <a:schemeClr val="dk1"/>
-                          </a:solidFill>
-                          <a:latin typeface="Tahoma" panose="020B0604030504040204" pitchFamily="34" charset="0"/>
-                          <a:ea typeface="Tahoma" panose="020B0604030504040204" pitchFamily="34" charset="0"/>
-                          <a:cs typeface="Tahoma" panose="020B0604030504040204" pitchFamily="34" charset="0"/>
-                        </a:rPr>
-                        <a:t>LP </a:t>
-                      </a:r>
-                      <a:r>
-                        <a:rPr lang="th-TH" sz="1100" kern="1200" dirty="0">
-                          <a:solidFill>
-                            <a:schemeClr val="dk1"/>
-                          </a:solidFill>
-                          <a:latin typeface="Tahoma" panose="020B0604030504040204" pitchFamily="34" charset="0"/>
-                          <a:ea typeface="Tahoma" panose="020B0604030504040204" pitchFamily="34" charset="0"/>
-                          <a:cs typeface="Tahoma" panose="020B0604030504040204" pitchFamily="34" charset="0"/>
-                        </a:rPr>
-                        <a:t>สุ่มตรวจสอบสินค้าที่มาจากดีซีว่าเข้าครบไหม</a:t>
-                      </a:r>
-                    </a:p>
-                    <a:p>
-                      <a:endParaRPr lang="en-US" sz="1100" dirty="0">
-                        <a:latin typeface="Tahoma" panose="020B0604030504040204" pitchFamily="34" charset="0"/>
-                        <a:ea typeface="Tahoma" panose="020B0604030504040204" pitchFamily="34" charset="0"/>
-                        <a:cs typeface="Tahoma" panose="020B0604030504040204" pitchFamily="34" charset="0"/>
-                      </a:endParaRPr>
-                    </a:p>
-                  </a:txBody>
-                  <a:tcPr/>
-                </a:tc>
-                <a:extLst>
-                  <a:ext uri="{0D108BD9-81ED-4DB2-BD59-A6C34878D82A}">
-                    <a16:rowId xmlns:a16="http://schemas.microsoft.com/office/drawing/2014/main" val="833854746"/>
-                  </a:ext>
-                </a:extLst>
-              </a:tr>
-              <a:tr h="970218">
-                <a:tc>
-                  <a:txBody>
-                    <a:bodyPr/>
-                    <a:lstStyle/>
-                    <a:p>
-                      <a:pPr algn="ctr"/>
-                      <a:r>
-                        <a:rPr lang="th-TH" sz="1000" dirty="0">
-                          <a:solidFill>
-                            <a:schemeClr val="dk1"/>
-                          </a:solidFill>
-                          <a:latin typeface="Tahoma" panose="020B0604030504040204" pitchFamily="34" charset="0"/>
-                          <a:ea typeface="Tahoma" panose="020B0604030504040204" pitchFamily="34" charset="0"/>
-                          <a:cs typeface="Tahoma" panose="020B0604030504040204" pitchFamily="34" charset="0"/>
-                        </a:rPr>
-                        <a:t>5.</a:t>
-                      </a:r>
-                    </a:p>
-                  </a:txBody>
-                  <a:tcPr/>
-                </a:tc>
-                <a:tc>
-                  <a:txBody>
-                    <a:bodyPr/>
-                    <a:lstStyle/>
-                    <a:p>
-                      <a:r>
-                        <a:rPr lang="th-TH" sz="1000" dirty="0" u="sng">
-                          <a:solidFill>
-                            <a:schemeClr val="dk1"/>
-                          </a:solidFill>
-                          <a:latin typeface="Tahoma" panose="020B0604030504040204" pitchFamily="34" charset="0"/>
-                          <a:ea typeface="Tahoma" panose="020B0604030504040204" pitchFamily="34" charset="0"/>
-                          <a:cs typeface="Tahoma" panose="020B0604030504040204" pitchFamily="34" charset="0"/>
-                        </a:rPr>
-                        <a:t>Freshfood</a:t>
-                      </a:r>
-                      <a:br>
-                        <a:rPr lang="th-TH" sz="1000" dirty="0" u="sng">
-                          <a:solidFill>
-                            <a:schemeClr val="dk1"/>
-                          </a:solidFill>
-                          <a:latin typeface="Tahoma" panose="020B0604030504040204" pitchFamily="34" charset="0"/>
-                          <a:ea typeface="Tahoma" panose="020B0604030504040204" pitchFamily="34" charset="0"/>
-                          <a:cs typeface="Tahoma" panose="020B0604030504040204" pitchFamily="34" charset="0"/>
-                        </a:rPr>
-                      </a:br>
-                      <a:r>
-                        <a:rPr lang="th-TH" sz="1000" dirty="0">
-                          <a:solidFill>
-                            <a:schemeClr val="dk1"/>
-                          </a:solidFill>
-                          <a:latin typeface="Tahoma" panose="020B0604030504040204" pitchFamily="34" charset="0"/>
-                          <a:ea typeface="Tahoma" panose="020B0604030504040204" pitchFamily="34" charset="0"/>
-                          <a:cs typeface="Tahoma" panose="020B0604030504040204" pitchFamily="34" charset="0"/>
-                        </a:rPr>
-                        <a:t>RTC สูงและเพิ่มต่อเนื่อง (YTD -1.14 ล้าน฿ เกือบ 3 เท่าของปีก่อน, ก.ย. -158k) ขณะที่ Loss รวม FF ยัง 7.03% ของยอดขาย</a:t>
-                      </a:r>
-                    </a:p>
-                  </a:txBody>
-                  <a:tcPr/>
-                </a:tc>
-                <a:tc>
-                  <a:txBody>
-                    <a:bodyPr/>
-                    <a:lstStyle/>
-                    <a:p>
-                      <a:pPr marL="228600" indent="-228600">
-                        <a:buAutoNum type="arabicPeriod"/>
-                      </a:pPr>
-                      <a:r>
-                        <a:rPr lang="th-TH" sz="1000" dirty="0">
-                          <a:solidFill>
-                            <a:schemeClr val="dk1"/>
-                          </a:solidFill>
-                          <a:latin typeface="Tahoma" panose="020B0604030504040204" pitchFamily="34" charset="0"/>
-                          <a:ea typeface="Tahoma" panose="020B0604030504040204" pitchFamily="34" charset="0"/>
-                          <a:cs typeface="Tahoma" panose="020B0604030504040204" pitchFamily="34" charset="0"/>
-                        </a:rPr>
-                        <a:t>แผนกวาง RTC ตามเวลาและขั้น SOP (Butchery/Seafood/Produce เริ่ม 09:00 ลด 20% → วันสุดท้าย 50%, Produce 16:00 → 50%) ไม่ลดซ้ำ ไม่ทำแพ็คคู่</a:t>
-                      </a:r>
-                    </a:p>
-                    <a:p>
-                      <a:pPr marL="228600" indent="-228600">
-                        <a:buAutoNum type="arabicPeriod"/>
-                      </a:pPr>
-                      <a:r>
-                        <a:rPr lang="th-TH" sz="1000" dirty="0">
-                          <a:solidFill>
-                            <a:schemeClr val="dk1"/>
-                          </a:solidFill>
-                          <a:latin typeface="Tahoma" panose="020B0604030504040204" pitchFamily="34" charset="0"/>
-                          <a:ea typeface="Tahoma" panose="020B0604030504040204" pitchFamily="34" charset="0"/>
-                          <a:cs typeface="Tahoma" panose="020B0604030504040204" pitchFamily="34" charset="0"/>
-                        </a:rPr>
-                        <a:t>LP ตรวจสต็อกและลงชื่อใน Mark down Price Form คู่สติ๊กเกอร์ RTC ทุกครั้ง · สติ๊กเกอร์พิมพ์เสีย/เกิน LP ขีดฆ่าและเก็บ</a:t>
-                      </a:r>
-                    </a:p>
-                    <a:p>
-                      <a:pPr marL="228600" indent="-228600">
-                        <a:buAutoNum type="arabicPeriod"/>
-                      </a:pPr>
-                      <a:r>
-                        <a:rPr lang="th-TH" sz="1000" dirty="0">
-                          <a:solidFill>
-                            <a:schemeClr val="dk1"/>
-                          </a:solidFill>
-                          <a:latin typeface="Tahoma" panose="020B0604030504040204" pitchFamily="34" charset="0"/>
-                          <a:ea typeface="Tahoma" panose="020B0604030504040204" pitchFamily="34" charset="0"/>
-                          <a:cs typeface="Tahoma" panose="020B0604030504040204" pitchFamily="34" charset="0"/>
-                        </a:rPr>
-                        <a:t>ผจก.เพิ่ม % ได้ไม่เกิน 75% ใน 2 ชม.ก่อนปิด · ขายไม่หมดตัดจ่าย Code 21 ห้ามเก็บสะสม</a:t>
-                      </a:r>
-                    </a:p>
-                  </a:txBody>
-                  <a:tcPr/>
-                </a:tc>
-                <a:tc>
-                  <a:txBody>
-                    <a:bodyPr/>
-                    <a:lstStyle/>
-                    <a:p>
-                      <a:r>
-                        <a:rPr lang="th-TH" sz="1000" dirty="0">
-                          <a:solidFill>
-                            <a:schemeClr val="dk1"/>
-                          </a:solidFill>
-                          <a:latin typeface="Tahoma" panose="020B0604030504040204" pitchFamily="34" charset="0"/>
-                          <a:ea typeface="Tahoma" panose="020B0604030504040204" pitchFamily="34" charset="0"/>
-                          <a:cs typeface="Tahoma" panose="020B0604030504040204" pitchFamily="34" charset="0"/>
-                        </a:rPr>
-                        <a:t>M1 ,M.Opt,C2,C9,LP</a:t>
-                      </a:r>
-                    </a:p>
-                  </a:txBody>
-                  <a:tcPr/>
-                </a:tc>
-                <a:tc>
-                  <a:txBody>
-                    <a:bodyPr/>
-                    <a:lstStyle/>
-                    <a:p>
-                      <a:r>
-                        <a:rPr lang="th-TH" sz="1000" dirty="0">
-                          <a:solidFill>
-                            <a:schemeClr val="dk1"/>
-                          </a:solidFill>
-                          <a:latin typeface="Tahoma" panose="020B0604030504040204" pitchFamily="34" charset="0"/>
-                          <a:ea typeface="Tahoma" panose="020B0604030504040204" pitchFamily="34" charset="0"/>
-                          <a:cs typeface="Tahoma" panose="020B0604030504040204" pitchFamily="34" charset="0"/>
-                        </a:rPr>
-                        <a:t>Oct – Dec 2026</a:t>
-                      </a:r>
-                    </a:p>
-                  </a:txBody>
-                  <a:tcPr/>
-                </a:tc>
-                <a:tc>
-                  <a:txBody>
-                    <a:bodyPr/>
-                    <a:lstStyle/>
-                    <a:p>
-                      <a:r>
-                        <a:rPr lang="th-TH" sz="1000" dirty="0">
-                          <a:solidFill>
-                            <a:schemeClr val="dk1"/>
-                          </a:solidFill>
-                          <a:latin typeface="Tahoma" panose="020B0604030504040204" pitchFamily="34" charset="0"/>
-                          <a:ea typeface="Tahoma" panose="020B0604030504040204" pitchFamily="34" charset="0"/>
-                          <a:cs typeface="Tahoma" panose="020B0604030504040204" pitchFamily="34" charset="0"/>
-                        </a:rPr>
-                        <a:t>1.LP สรุป RTC เทียบ Damage ของ FF รายสัปดาห์ นำเสนอในประชุม Loss</a:t>
-                      </a:r>
-                    </a:p>
-                    <a:p>
-                      <a:r>
-                        <a:rPr lang="th-TH" sz="1000" dirty="0">
-                          <a:solidFill>
-                            <a:schemeClr val="dk1"/>
-                          </a:solidFill>
-                          <a:latin typeface="Tahoma" panose="020B0604030504040204" pitchFamily="34" charset="0"/>
-                          <a:ea typeface="Tahoma" panose="020B0604030504040204" pitchFamily="34" charset="0"/>
-                          <a:cs typeface="Tahoma" panose="020B0604030504040204" pitchFamily="34" charset="0"/>
-                        </a:rPr>
-                        <a:t>2.LP ตรวจพื้นที่ RTC และสติ๊กเกอร์คงเหลือก่อนปิดร้านทุกวัน</a:t>
-                      </a:r>
-                    </a:p>
-                  </a:txBody>
-                  <a:tcPr/>
-                </a:tc>
-                <a:extLst>
-                  <a:ext uri="{0D108BD9-81ED-4DB2-BD59-A6C34878D82A}">
-                    <a16:rowId xmlns:a16="http://schemas.microsoft.com/office/drawing/2014/main" val="3017775110"/>
-                  </a:ext>
-                </a:extLst>
-              </a:tr>
-            </a:tbl>
-          </a:graphicData>
-        </a:graphic>
-      </p:graphicFrame>
-    </p:spTree>
-    <p:extLst>
-      <p:ext uri="{BB962C8B-B14F-4D97-AF65-F5344CB8AC3E}">
-        <p14:creationId xmlns:p14="http://schemas.microsoft.com/office/powerpoint/2010/main" val="337537747"/>
-      </p:ext>
-    </p:extLst>
-  </p:cSld>
-  <p:clrMapOvr>
-    <a:masterClrMapping/>
-  </p:clrMapOvr>
-</p:sld>
-</file>
-
-<file path=ppt/slides/slide12.xml><?xml version="1.0" encoding="utf-8"?>
-<p:sld xmlns:a="http://schemas.openxmlformats.org/drawingml/2006/main" xmlns:r="http://schemas.openxmlformats.org/officeDocument/2006/relationships" xmlns:p="http://schemas.openxmlformats.org/presentationml/2006/main">
-  <p:cSld>
-    <p:spTree>
-      <p:nvGrpSpPr>
-        <p:cNvPr id="1" name="">
-          <a:extLst>
-            <a:ext uri="{FF2B5EF4-FFF2-40B4-BE49-F238E27FC236}">
               <a16:creationId xmlns:a16="http://schemas.microsoft.com/office/drawing/2014/main" id="{9048694E-5BED-4CA8-CFCE-8ADA6818FA3F}"/>
             </a:ext>
           </a:extLst>
@@ -6197,7 +3627,7 @@
 </p:sld>
 </file>
 
-<file path=ppt/slides/slide13.xml><?xml version="1.0" encoding="utf-8"?>
+<file path=ppt/slides/slide11.xml><?xml version="1.0" encoding="utf-8"?>
 <p:sld xmlns:a="http://schemas.openxmlformats.org/drawingml/2006/main" xmlns:p="http://schemas.openxmlformats.org/presentationml/2006/main" xmlns:r="http://schemas.openxmlformats.org/officeDocument/2006/relationships">
   <p:cSld>
     <p:spTree>
@@ -7061,7 +4491,7 @@
 </p:sld>
 </file>
 
-<file path=ppt/slides/slide14.xml><?xml version="1.0" encoding="utf-8"?>
+<file path=ppt/slides/slide12.xml><?xml version="1.0" encoding="utf-8"?>
 <p:sld xmlns:a="http://schemas.openxmlformats.org/drawingml/2006/main" xmlns:p="http://schemas.openxmlformats.org/presentationml/2006/main" xmlns:r="http://schemas.openxmlformats.org/officeDocument/2006/relationships">
   <p:cSld>
     <p:spTree>
@@ -31020,51 +28450,34 @@
 </file>
 
 <file path=ppt/slides/slide8.xml><?xml version="1.0" encoding="utf-8"?>
-<p:sld xmlns:a="http://schemas.openxmlformats.org/drawingml/2006/main" xmlns:p="http://schemas.openxmlformats.org/presentationml/2006/main" xmlns:r="http://schemas.openxmlformats.org/officeDocument/2006/relationships">
+<p:sld xmlns:a="http://schemas.openxmlformats.org/drawingml/2006/main" xmlns:r="http://schemas.openxmlformats.org/officeDocument/2006/relationships" xmlns:p="http://schemas.openxmlformats.org/presentationml/2006/main">
   <p:cSld>
     <p:spTree>
       <p:nvGrpSpPr>
-        <p:cNvPr id="1" name=""/>
+        <p:cNvPr id="1" name="">
+          <a:extLst>
+            <a:ext uri="{FF2B5EF4-FFF2-40B4-BE49-F238E27FC236}">
+              <a16:creationId xmlns:a16="http://schemas.microsoft.com/office/drawing/2014/main" id="{B36229DE-A439-D108-AB05-F58B1EDE7F9A}"/>
+            </a:ext>
+          </a:extLst>
+        </p:cNvPr>
         <p:cNvGrpSpPr/>
         <p:nvPr/>
       </p:nvGrpSpPr>
-      <p:grpSpPr/>
-      <p:pic>
-        <p:nvPicPr>
-          <p:cNvPr id="3" name="Picture 2">
-            <a:extLst>
-              <a:ext uri="{FF2B5EF4-FFF2-40B4-BE49-F238E27FC236}">
-                <a16:creationId xmlns:a16="http://schemas.microsoft.com/office/drawing/2014/main" id="{573C4005-4311-47D1-B6B5-4EEE5D4D8A65}"/>
-              </a:ext>
-            </a:extLst>
-          </p:cNvPr>
-          <p:cNvPicPr>
-            <a:picLocks noChangeAspect="1"/>
-          </p:cNvPicPr>
-          <p:nvPr/>
-        </p:nvPicPr>
-        <p:blipFill>
-          <a:blip r:embed="rId2"/>
-          <a:stretch>
-            <a:fillRect/>
-          </a:stretch>
-        </p:blipFill>
-        <p:spPr>
-          <a:xfrm>
-            <a:off x="3596610" y="-68061"/>
-            <a:ext cx="8595390" cy="938759"/>
-          </a:xfrm>
-          <a:prstGeom prst="rect">
-            <a:avLst/>
-          </a:prstGeom>
-        </p:spPr>
-      </p:pic>
+      <p:grpSpPr>
+        <a:xfrm>
+          <a:off x="0" y="0"/>
+          <a:ext cx="0" cy="0"/>
+          <a:chOff x="0" y="0"/>
+          <a:chExt cx="0" cy="0"/>
+        </a:xfrm>
+      </p:grpSpPr>
       <p:sp>
         <p:nvSpPr>
           <p:cNvPr id="2" name="Text Placeholder 1">
             <a:extLst>
               <a:ext uri="{FF2B5EF4-FFF2-40B4-BE49-F238E27FC236}">
-                <a16:creationId xmlns:a16="http://schemas.microsoft.com/office/drawing/2014/main" id="{D11CEF0C-15B0-38F8-0EDE-2CF3585B45B5}"/>
+                <a16:creationId xmlns:a16="http://schemas.microsoft.com/office/drawing/2014/main" id="{D279D278-012B-152D-3870-B77B33997103}"/>
               </a:ext>
             </a:extLst>
           </p:cNvPr>
@@ -31077,874 +28490,1646 @@
         </p:nvSpPr>
         <p:spPr>
           <a:xfrm>
-            <a:off x="6363927" y="-36818"/>
-            <a:ext cx="4129549" cy="814486"/>
+            <a:off x="2509750" y="0"/>
+            <a:ext cx="9418056" cy="518867"/>
           </a:xfrm>
         </p:spPr>
         <p:txBody>
           <a:bodyPr>
-            <a:normAutofit fontScale="92500" lnSpcReduction="10000"/>
+            <a:normAutofit/>
           </a:bodyPr>
           <a:lstStyle/>
           <a:p>
             <a:r>
-              <a:rPr lang="en-US" sz="5400" dirty="0">
-                <a:solidFill>
-                  <a:schemeClr val="bg1"/>
-                </a:solidFill>
-                <a:latin typeface="BrowalliaUPC" panose="020B0604020202020204" pitchFamily="34" charset="-34"/>
-                <a:cs typeface="BrowalliaUPC" panose="020B0604020202020204" pitchFamily="34" charset="-34"/>
+              <a:rPr lang="en-US" sz="2400" dirty="0">
+                <a:latin typeface="Tahoma" panose="020B0604030504040204" pitchFamily="34" charset="0"/>
+                <a:ea typeface="Tahoma" panose="020B0604030504040204" pitchFamily="34" charset="0"/>
+                <a:cs typeface="Tahoma" panose="020B0604030504040204" pitchFamily="34" charset="0"/>
               </a:rPr>
-              <a:t>Target SOP (1/2) Damage</a:t>
+              <a:t>Action plan  </a:t>
             </a:r>
+          </a:p>
+          <a:p>
+            <a:endParaRPr lang="en-US" sz="2400" dirty="0">
+              <a:latin typeface="Tahoma" panose="020B0604030504040204" pitchFamily="34" charset="0"/>
+              <a:ea typeface="Tahoma" panose="020B0604030504040204" pitchFamily="34" charset="0"/>
+              <a:cs typeface="Tahoma" panose="020B0604030504040204" pitchFamily="34" charset="0"/>
+            </a:endParaRPr>
+          </a:p>
+          <a:p>
+            <a:endParaRPr lang="en-US" dirty="0"/>
           </a:p>
         </p:txBody>
       </p:sp>
       <p:graphicFrame>
         <p:nvGraphicFramePr>
-          <p:cNvPr id="4" name="Table 3"/>
+          <p:cNvPr id="3" name="Table 5">
+            <a:extLst>
+              <a:ext uri="{FF2B5EF4-FFF2-40B4-BE49-F238E27FC236}">
+                <a16:creationId xmlns:a16="http://schemas.microsoft.com/office/drawing/2014/main" id="{9F2D99E8-4FBF-E4C6-111F-F2DEAAEDC37F}"/>
+              </a:ext>
+            </a:extLst>
+          </p:cNvPr>
           <p:cNvGraphicFramePr>
             <a:graphicFrameLocks noGrp="1"/>
           </p:cNvGraphicFramePr>
-          <p:nvPr/>
+          <p:nvPr>
+            <p:extLst>
+              <p:ext uri="{D42A27DB-BD31-4B8C-83A1-F6EECF244321}">
+                <p14:modId xmlns:p14="http://schemas.microsoft.com/office/powerpoint/2010/main" val="342574285"/>
+              </p:ext>
+            </p:extLst>
+          </p:nvPr>
         </p:nvGraphicFramePr>
         <p:xfrm>
-          <a:off x="330000" y="1000000"/>
-          <a:ext cx="11500000" cy="3100000"/>
+          <a:off x="394252" y="837330"/>
+          <a:ext cx="11424497" cy="4961642"/>
         </p:xfrm>
         <a:graphic>
           <a:graphicData uri="http://schemas.openxmlformats.org/drawingml/2006/table">
             <a:tbl>
-              <a:tblPr>
-                <a:tableStyleId>{2D5ABB26-0587-4C30-8999-92F81FD0307C}</a:tableStyleId>
+              <a:tblPr firstRow="1" bandRow="1">
+                <a:tableStyleId>{F5AB1C69-6EDB-4FF4-983F-18BD219EF322}</a:tableStyleId>
               </a:tblPr>
               <a:tblGrid>
-                <a:gridCol w="1550000"/>
-                <a:gridCol w="3900000"/>
-                <a:gridCol w="3250000"/>
-                <a:gridCol w="2800000"/>
+                <a:gridCol w="580906">
+                  <a:extLst>
+                    <a:ext uri="{9D8B030D-6E8A-4147-A177-3AD203B41FA5}">
+                      <a16:colId xmlns:a16="http://schemas.microsoft.com/office/drawing/2014/main" val="50567754"/>
+                    </a:ext>
+                  </a:extLst>
+                </a:gridCol>
+                <a:gridCol w="2647936">
+                  <a:extLst>
+                    <a:ext uri="{9D8B030D-6E8A-4147-A177-3AD203B41FA5}">
+                      <a16:colId xmlns:a16="http://schemas.microsoft.com/office/drawing/2014/main" val="2465639924"/>
+                    </a:ext>
+                  </a:extLst>
+                </a:gridCol>
+                <a:gridCol w="3519578">
+                  <a:extLst>
+                    <a:ext uri="{9D8B030D-6E8A-4147-A177-3AD203B41FA5}">
+                      <a16:colId xmlns:a16="http://schemas.microsoft.com/office/drawing/2014/main" val="1011173274"/>
+                    </a:ext>
+                  </a:extLst>
+                </a:gridCol>
+                <a:gridCol w="1992702">
+                  <a:extLst>
+                    <a:ext uri="{9D8B030D-6E8A-4147-A177-3AD203B41FA5}">
+                      <a16:colId xmlns:a16="http://schemas.microsoft.com/office/drawing/2014/main" val="3843171633"/>
+                    </a:ext>
+                  </a:extLst>
+                </a:gridCol>
+                <a:gridCol w="1062985">
+                  <a:extLst>
+                    <a:ext uri="{9D8B030D-6E8A-4147-A177-3AD203B41FA5}">
+                      <a16:colId xmlns:a16="http://schemas.microsoft.com/office/drawing/2014/main" val="1439720936"/>
+                    </a:ext>
+                  </a:extLst>
+                </a:gridCol>
+                <a:gridCol w="1620390">
+                  <a:extLst>
+                    <a:ext uri="{9D8B030D-6E8A-4147-A177-3AD203B41FA5}">
+                      <a16:colId xmlns:a16="http://schemas.microsoft.com/office/drawing/2014/main" val="3308817400"/>
+                    </a:ext>
+                  </a:extLst>
+                </a:gridCol>
               </a:tblGrid>
-              <a:tr h="300000">
-                <a:tc>
-                  <a:txBody>
-                    <a:bodyPr wrap="square"/>
-                    <a:lstStyle/>
-                    <a:p>
-                      <a:pPr algn="l"/>
-                      <a:r>
-                        <a:rPr sz="1000" b="1">
-                          <a:solidFill>
-                            <a:srgbClr val="90A4AE"/>
-                          </a:solidFill>
-                          <a:latin typeface="Tahoma"/>
-                        </a:rPr>
-                        <a:t>หัวข้อ</a:t>
-                      </a:r>
-                    </a:p>
-                  </a:txBody>
-                  <a:tcPr marL="40000" marR="40000" marT="25000" marB="25000" anchor="t">
-                    <a:noFill/>
-                    <a:lnL>
-                      <a:noFill/>
-                    </a:lnL>
-                    <a:lnR>
-                      <a:noFill/>
-                    </a:lnR>
-                    <a:lnT>
-                      <a:noFill/>
-                    </a:lnT>
-                    <a:lnB w="6350">
-                      <a:solidFill>
-                        <a:srgbClr val="E3EAEE"/>
-                      </a:solidFill>
-                    </a:lnB>
-                  </a:tcPr>
-                </a:tc>
-                <a:tc>
-                  <a:txBody>
-                    <a:bodyPr wrap="square"/>
-                    <a:lstStyle/>
-                    <a:p>
-                      <a:pPr algn="l"/>
-                      <a:r>
-                        <a:rPr sz="1000" b="1">
-                          <a:solidFill>
-                            <a:srgbClr val="90A4AE"/>
-                          </a:solidFill>
-                          <a:latin typeface="Tahoma"/>
-                        </a:rPr>
-                        <a:t>เกณฑ์ / Target ตาม SOP (LP)</a:t>
-                      </a:r>
-                    </a:p>
-                  </a:txBody>
-                  <a:tcPr marL="40000" marR="40000" marT="25000" marB="25000" anchor="t">
-                    <a:noFill/>
-                    <a:lnL>
-                      <a:noFill/>
-                    </a:lnL>
-                    <a:lnR>
-                      <a:noFill/>
-                    </a:lnR>
-                    <a:lnT>
-                      <a:noFill/>
-                    </a:lnT>
-                    <a:lnB w="6350">
-                      <a:solidFill>
-                        <a:srgbClr val="E3EAEE"/>
-                      </a:solidFill>
-                    </a:lnB>
-                  </a:tcPr>
-                </a:tc>
-                <a:tc>
-                  <a:txBody>
-                    <a:bodyPr wrap="square"/>
-                    <a:lstStyle/>
-                    <a:p>
-                      <a:pPr algn="l"/>
-                      <a:r>
-                        <a:rPr sz="1000" b="1">
-                          <a:solidFill>
-                            <a:srgbClr val="90A4AE"/>
-                          </a:solidFill>
-                          <a:latin typeface="Tahoma"/>
-                        </a:rPr>
-                        <a:t>ผลจริงจากข้อมูล Loss (ม.ค.–ก.ย. 2026)</a:t>
-                      </a:r>
-                    </a:p>
-                  </a:txBody>
-                  <a:tcPr marL="40000" marR="40000" marT="25000" marB="25000" anchor="t">
-                    <a:noFill/>
-                    <a:lnL>
-                      <a:noFill/>
-                    </a:lnL>
-                    <a:lnR>
-                      <a:noFill/>
-                    </a:lnR>
-                    <a:lnT>
-                      <a:noFill/>
-                    </a:lnT>
-                    <a:lnB w="6350">
-                      <a:solidFill>
-                        <a:srgbClr val="E3EAEE"/>
-                      </a:solidFill>
-                    </a:lnB>
-                  </a:tcPr>
-                </a:tc>
-                <a:tc>
-                  <a:txBody>
-                    <a:bodyPr wrap="square"/>
-                    <a:lstStyle/>
-                    <a:p>
-                      <a:pPr algn="l"/>
-                      <a:r>
-                        <a:rPr sz="1000" b="1">
-                          <a:solidFill>
-                            <a:srgbClr val="90A4AE"/>
-                          </a:solidFill>
-                          <a:latin typeface="Tahoma"/>
-                        </a:rPr>
-                        <a:t>ข้อสังเกต / สิ่งที่ต้องทำ</a:t>
-                      </a:r>
-                    </a:p>
-                  </a:txBody>
-                  <a:tcPr marL="40000" marR="40000" marT="25000" marB="25000" anchor="t">
-                    <a:noFill/>
-                    <a:lnL>
-                      <a:noFill/>
-                    </a:lnL>
-                    <a:lnR>
-                      <a:noFill/>
-                    </a:lnR>
-                    <a:lnT>
-                      <a:noFill/>
-                    </a:lnT>
-                    <a:lnB w="6350">
-                      <a:solidFill>
-                        <a:srgbClr val="E3EAEE"/>
-                      </a:solidFill>
-                    </a:lnB>
-                  </a:tcPr>
-                </a:tc>
+              <a:tr h="455744">
+                <a:tc>
+                  <a:txBody>
+                    <a:bodyPr/>
+                    <a:lstStyle/>
+                    <a:p>
+                      <a:pPr algn="ctr"/>
+                      <a:r>
+                        <a:rPr lang="en-US" sz="1400" dirty="0">
+                          <a:solidFill>
+                            <a:schemeClr val="tx1"/>
+                          </a:solidFill>
+                          <a:latin typeface="Tahoma" panose="020B0604030504040204" pitchFamily="34" charset="0"/>
+                          <a:ea typeface="Tahoma" panose="020B0604030504040204" pitchFamily="34" charset="0"/>
+                          <a:cs typeface="Tahoma" panose="020B0604030504040204" pitchFamily="34" charset="0"/>
+                        </a:rPr>
+                        <a:t>No.</a:t>
+                      </a:r>
+                    </a:p>
+                  </a:txBody>
+                  <a:tcPr anchor="ctr"/>
+                </a:tc>
+                <a:tc>
+                  <a:txBody>
+                    <a:bodyPr/>
+                    <a:lstStyle/>
+                    <a:p>
+                      <a:pPr algn="ctr"/>
+                      <a:r>
+                        <a:rPr lang="en-US" sz="1400" dirty="0">
+                          <a:solidFill>
+                            <a:schemeClr val="tx1"/>
+                          </a:solidFill>
+                          <a:latin typeface="Tahoma" panose="020B0604030504040204" pitchFamily="34" charset="0"/>
+                          <a:ea typeface="Tahoma" panose="020B0604030504040204" pitchFamily="34" charset="0"/>
+                          <a:cs typeface="Tahoma" panose="020B0604030504040204" pitchFamily="34" charset="0"/>
+                        </a:rPr>
+                        <a:t>Root cause</a:t>
+                      </a:r>
+                    </a:p>
+                  </a:txBody>
+                  <a:tcPr anchor="ctr"/>
+                </a:tc>
+                <a:tc>
+                  <a:txBody>
+                    <a:bodyPr/>
+                    <a:lstStyle/>
+                    <a:p>
+                      <a:pPr algn="ctr"/>
+                      <a:r>
+                        <a:rPr lang="en-US" sz="1400" dirty="0">
+                          <a:solidFill>
+                            <a:schemeClr val="tx1"/>
+                          </a:solidFill>
+                          <a:latin typeface="Tahoma" panose="020B0604030504040204" pitchFamily="34" charset="0"/>
+                          <a:ea typeface="Tahoma" panose="020B0604030504040204" pitchFamily="34" charset="0"/>
+                          <a:cs typeface="Tahoma" panose="020B0604030504040204" pitchFamily="34" charset="0"/>
+                        </a:rPr>
+                        <a:t>Action</a:t>
+                      </a:r>
+                    </a:p>
+                  </a:txBody>
+                  <a:tcPr anchor="ctr"/>
+                </a:tc>
+                <a:tc>
+                  <a:txBody>
+                    <a:bodyPr/>
+                    <a:lstStyle/>
+                    <a:p>
+                      <a:pPr algn="ctr"/>
+                      <a:r>
+                        <a:rPr lang="en-US" sz="1400" dirty="0">
+                          <a:solidFill>
+                            <a:schemeClr val="tx1"/>
+                          </a:solidFill>
+                          <a:latin typeface="Tahoma" panose="020B0604030504040204" pitchFamily="34" charset="0"/>
+                          <a:ea typeface="Tahoma" panose="020B0604030504040204" pitchFamily="34" charset="0"/>
+                          <a:cs typeface="Tahoma" panose="020B0604030504040204" pitchFamily="34" charset="0"/>
+                        </a:rPr>
+                        <a:t>Who</a:t>
+                      </a:r>
+                    </a:p>
+                  </a:txBody>
+                  <a:tcPr anchor="ctr"/>
+                </a:tc>
+                <a:tc>
+                  <a:txBody>
+                    <a:bodyPr/>
+                    <a:lstStyle/>
+                    <a:p>
+                      <a:pPr algn="ctr"/>
+                      <a:r>
+                        <a:rPr lang="en-US" sz="1400" dirty="0">
+                          <a:solidFill>
+                            <a:schemeClr val="tx1"/>
+                          </a:solidFill>
+                          <a:latin typeface="Tahoma" panose="020B0604030504040204" pitchFamily="34" charset="0"/>
+                          <a:ea typeface="Tahoma" panose="020B0604030504040204" pitchFamily="34" charset="0"/>
+                          <a:cs typeface="Tahoma" panose="020B0604030504040204" pitchFamily="34" charset="0"/>
+                        </a:rPr>
+                        <a:t>When</a:t>
+                      </a:r>
+                    </a:p>
+                  </a:txBody>
+                  <a:tcPr anchor="ctr"/>
+                </a:tc>
+                <a:tc>
+                  <a:txBody>
+                    <a:bodyPr/>
+                    <a:lstStyle/>
+                    <a:p>
+                      <a:pPr algn="ctr"/>
+                      <a:r>
+                        <a:rPr lang="en-US" sz="1400" dirty="0">
+                          <a:solidFill>
+                            <a:schemeClr val="tx1"/>
+                          </a:solidFill>
+                          <a:latin typeface="Tahoma" panose="020B0604030504040204" pitchFamily="34" charset="0"/>
+                          <a:ea typeface="Tahoma" panose="020B0604030504040204" pitchFamily="34" charset="0"/>
+                          <a:cs typeface="Tahoma" panose="020B0604030504040204" pitchFamily="34" charset="0"/>
+                        </a:rPr>
+                        <a:t>Monitoring</a:t>
+                      </a:r>
+                    </a:p>
+                  </a:txBody>
+                  <a:tcPr anchor="ctr"/>
+                </a:tc>
+                <a:extLst>
+                  <a:ext uri="{0D108BD9-81ED-4DB2-BD59-A6C34878D82A}">
+                    <a16:rowId xmlns:a16="http://schemas.microsoft.com/office/drawing/2014/main" val="2309402925"/>
+                  </a:ext>
+                </a:extLst>
               </a:tr>
-              <a:tr h="700000">
-                <a:tc>
-                  <a:txBody>
-                    <a:bodyPr wrap="square"/>
-                    <a:lstStyle/>
-                    <a:p>
-                      <a:pPr algn="l"/>
-                      <a:r>
-                        <a:rPr sz="1050" b="1">
-                          <a:solidFill>
-                            <a:srgbClr val="263238"/>
-                          </a:solidFill>
-                          <a:latin typeface="Tahoma"/>
-                        </a:rPr>
-                        <a:t>Loss % เทียบ Budget (B0) / LY</a:t>
-                      </a:r>
-                    </a:p>
-                  </a:txBody>
-                  <a:tcPr marL="40000" marR="40000" marT="25000" marB="25000" anchor="t">
-                    <a:noFill/>
-                    <a:lnL>
-                      <a:noFill/>
-                    </a:lnL>
-                    <a:lnR>
-                      <a:noFill/>
-                    </a:lnR>
-                    <a:lnT>
-                      <a:noFill/>
-                    </a:lnT>
-                    <a:lnB w="6350">
-                      <a:solidFill>
-                        <a:srgbClr val="E3EAEE"/>
-                      </a:solidFill>
-                    </a:lnB>
-                  </a:tcPr>
-                </a:tc>
-                <a:tc>
-                  <a:txBody>
-                    <a:bodyPr wrap="square"/>
-                    <a:lstStyle/>
-                    <a:p>
-                      <a:pPr algn="l"/>
-                      <a:r>
-                        <a:rPr sz="1050">
-                          <a:solidFill>
-                            <a:srgbClr val="263238"/>
-                          </a:solidFill>
-                          <a:latin typeface="Tahoma"/>
-                        </a:rPr>
-                        <a:t>SOP LP ไม่ได้กำหนดเป้า %Loss — ต้องใช้ Budget (B0) จาก HO</a:t>
-                      </a:r>
-                    </a:p>
-                  </a:txBody>
-                  <a:tcPr marL="40000" marR="40000" marT="25000" marB="25000" anchor="t">
-                    <a:noFill/>
-                    <a:lnL>
-                      <a:noFill/>
-                    </a:lnL>
-                    <a:lnR>
-                      <a:noFill/>
-                    </a:lnR>
-                    <a:lnT>
-                      <a:noFill/>
-                    </a:lnT>
-                    <a:lnB w="6350">
-                      <a:solidFill>
-                        <a:srgbClr val="E3EAEE"/>
-                      </a:solidFill>
-                    </a:lnB>
-                  </a:tcPr>
-                </a:tc>
-                <a:tc>
-                  <a:txBody>
-                    <a:bodyPr wrap="square"/>
-                    <a:lstStyle/>
-                    <a:p>
-                      <a:pPr algn="l"/>
-                      <a:r>
-                        <a:rPr sz="1050">
-                          <a:solidFill>
-                            <a:srgbClr val="263238"/>
-                          </a:solidFill>
-                          <a:latin typeface="Tahoma"/>
-                        </a:rPr>
-                        <a:t>%Loss/ยอดขาย YTD -2.29% · MTD -1.82% · คอลัมน์ %VS B0 = N/A (สไลด์ 4)</a:t>
-                      </a:r>
-                    </a:p>
-                  </a:txBody>
-                  <a:tcPr marL="40000" marR="40000" marT="25000" marB="25000" anchor="t">
-                    <a:noFill/>
-                    <a:lnL>
-                      <a:noFill/>
-                    </a:lnL>
-                    <a:lnR>
-                      <a:noFill/>
-                    </a:lnR>
-                    <a:lnT>
-                      <a:noFill/>
-                    </a:lnT>
-                    <a:lnB w="6350">
-                      <a:solidFill>
-                        <a:srgbClr val="E3EAEE"/>
-                      </a:solidFill>
-                    </a:lnB>
-                  </a:tcPr>
-                </a:tc>
-                <a:tc>
-                  <a:txBody>
-                    <a:bodyPr wrap="square"/>
-                    <a:lstStyle/>
-                    <a:p>
-                      <a:pPr algn="l"/>
-                      <a:r>
-                        <a:rPr sz="1050">
-                          <a:solidFill>
-                            <a:srgbClr val="263238"/>
-                          </a:solidFill>
-                          <a:latin typeface="Tahoma"/>
-                        </a:rPr>
-                        <a:t>ขอไฟล์ B0 รายฝ่าย/แผนก เพื่อเติม %VS B0 และตั้งเป้าลดตามแผนก</a:t>
-                      </a:r>
-                    </a:p>
-                  </a:txBody>
-                  <a:tcPr marL="40000" marR="40000" marT="25000" marB="25000" anchor="t">
-                    <a:noFill/>
-                    <a:lnL>
-                      <a:noFill/>
-                    </a:lnL>
-                    <a:lnR>
-                      <a:noFill/>
-                    </a:lnR>
-                    <a:lnT>
-                      <a:noFill/>
-                    </a:lnT>
-                    <a:lnB w="6350">
-                      <a:solidFill>
-                        <a:srgbClr val="E3EAEE"/>
-                      </a:solidFill>
-                    </a:lnB>
-                  </a:tcPr>
-                </a:tc>
+              <a:tr h="1027257">
+                <a:tc>
+                  <a:txBody>
+                    <a:bodyPr/>
+                    <a:lstStyle/>
+                    <a:p>
+                      <a:pPr algn="ctr"/>
+                      <a:r>
+                        <a:rPr lang="en-US" sz="1100" dirty="0">
+                          <a:latin typeface="Tahoma" panose="020B0604030504040204" pitchFamily="34" charset="0"/>
+                          <a:ea typeface="Tahoma" panose="020B0604030504040204" pitchFamily="34" charset="0"/>
+                          <a:cs typeface="Tahoma" panose="020B0604030504040204" pitchFamily="34" charset="0"/>
+                        </a:rPr>
+                        <a:t>1</a:t>
+                      </a:r>
+                    </a:p>
+                  </a:txBody>
+                  <a:tcPr/>
+                </a:tc>
+                <a:tc>
+                  <a:txBody>
+                    <a:bodyPr/>
+                    <a:lstStyle/>
+                    <a:p>
+                      <a:r>
+                        <a:rPr lang="en-US" sz="1100" u="sng" dirty="0">
+                          <a:latin typeface="Tahoma" panose="020B0604030504040204" pitchFamily="34" charset="0"/>
+                          <a:ea typeface="Tahoma" panose="020B0604030504040204" pitchFamily="34" charset="0"/>
+                          <a:cs typeface="Tahoma" panose="020B0604030504040204" pitchFamily="34" charset="0"/>
+                        </a:rPr>
+                        <a:t>Dry Food</a:t>
+                      </a:r>
+                      <a:br>
+                        <a:rPr lang="en-US" sz="1100" u="sng" dirty="0">
+                          <a:latin typeface="Tahoma" panose="020B0604030504040204" pitchFamily="34" charset="0"/>
+                          <a:ea typeface="Tahoma" panose="020B0604030504040204" pitchFamily="34" charset="0"/>
+                          <a:cs typeface="Tahoma" panose="020B0604030504040204" pitchFamily="34" charset="0"/>
+                        </a:rPr>
+                      </a:br>
+                      <a:r>
+                        <a:rPr lang="en-US" sz="1100" u="sng" dirty="0">
+                          <a:latin typeface="Tahoma" panose="020B0604030504040204" pitchFamily="34" charset="0"/>
+                          <a:ea typeface="Tahoma" panose="020B0604030504040204" pitchFamily="34" charset="0"/>
+                          <a:cs typeface="Tahoma" panose="020B0604030504040204" pitchFamily="34" charset="0"/>
+                        </a:rPr>
+                        <a:t>Damage</a:t>
+                      </a:r>
+                    </a:p>
+                    <a:p>
+                      <a:pPr marL="171450" indent="-171450">
+                        <a:buFontTx/>
+                        <a:buChar char="-"/>
+                      </a:pPr>
+                      <a:r>
+                        <a:rPr lang="th-TH" sz="1100" dirty="0">
+                          <a:latin typeface="Tahoma" panose="020B0604030504040204" pitchFamily="34" charset="0"/>
+                          <a:ea typeface="Tahoma" panose="020B0604030504040204" pitchFamily="34" charset="0"/>
+                          <a:cs typeface="Tahoma" panose="020B0604030504040204" pitchFamily="34" charset="0"/>
+                        </a:rPr>
+                        <a:t>สินค้าหมดอายุลดราคาและยังขายไม่หมด เนื่องจากไม่เป็นที่นิยมและราคาสูง</a:t>
+                      </a:r>
+                      <a:r>
+                        <a:rPr lang="en-US" sz="1100" dirty="0">
+                          <a:latin typeface="Tahoma" panose="020B0604030504040204" pitchFamily="34" charset="0"/>
+                          <a:ea typeface="Tahoma" panose="020B0604030504040204" pitchFamily="34" charset="0"/>
+                          <a:cs typeface="Tahoma" panose="020B0604030504040204" pitchFamily="34" charset="0"/>
+                        </a:rPr>
+                        <a:t> </a:t>
+                      </a:r>
+                    </a:p>
+                    <a:p>
+                      <a:pPr marL="0" indent="0">
+                        <a:buFontTx/>
+                        <a:buNone/>
+                      </a:pPr>
+                      <a:endParaRPr lang="th-TH" sz="1100" dirty="0">
+                        <a:latin typeface="Tahoma" panose="020B0604030504040204" pitchFamily="34" charset="0"/>
+                        <a:ea typeface="Tahoma" panose="020B0604030504040204" pitchFamily="34" charset="0"/>
+                        <a:cs typeface="Tahoma" panose="020B0604030504040204" pitchFamily="34" charset="0"/>
+                      </a:endParaRPr>
+                    </a:p>
+                  </a:txBody>
+                  <a:tcPr/>
+                </a:tc>
+                <a:tc>
+                  <a:txBody>
+                    <a:bodyPr/>
+                    <a:lstStyle/>
+                    <a:p>
+                      <a:pPr marL="228600" indent="-228600">
+                        <a:buAutoNum type="arabicPeriod"/>
+                      </a:pPr>
+                      <a:r>
+                        <a:rPr lang="th-TH" sz="1100" dirty="0">
+                          <a:latin typeface="Tahoma" panose="020B0604030504040204" pitchFamily="34" charset="0"/>
+                          <a:ea typeface="Tahoma" panose="020B0604030504040204" pitchFamily="34" charset="0"/>
+                          <a:cs typeface="Tahoma" panose="020B0604030504040204" pitchFamily="34" charset="0"/>
+                        </a:rPr>
+                        <a:t>แผนกและพีซีร่วมกันตรวจสอบสินค้าใกล้หมดอายุใน 2 เดือนถัดไป ในแต่ละแผนกตั้งแต่วันที่ 15 ของเดือน เพื่อทำการส่งข้อมูลใน </a:t>
+                      </a:r>
+                      <a:r>
+                        <a:rPr lang="en-US" sz="1100" dirty="0">
+                          <a:latin typeface="Tahoma" panose="020B0604030504040204" pitchFamily="34" charset="0"/>
+                          <a:ea typeface="Tahoma" panose="020B0604030504040204" pitchFamily="34" charset="0"/>
+                          <a:cs typeface="Tahoma" panose="020B0604030504040204" pitchFamily="34" charset="0"/>
+                        </a:rPr>
+                        <a:t>Pilot </a:t>
+                      </a:r>
+                      <a:r>
+                        <a:rPr lang="th-TH" sz="1100" dirty="0">
+                          <a:latin typeface="Tahoma" panose="020B0604030504040204" pitchFamily="34" charset="0"/>
+                          <a:ea typeface="Tahoma" panose="020B0604030504040204" pitchFamily="34" charset="0"/>
+                          <a:cs typeface="Tahoma" panose="020B0604030504040204" pitchFamily="34" charset="0"/>
+                        </a:rPr>
+                        <a:t>ทำการขอลดราคาตามขั้นตอน</a:t>
+                      </a:r>
+                    </a:p>
+                    <a:p>
+                      <a:pPr marL="228600" indent="-228600">
+                        <a:buAutoNum type="arabicPeriod"/>
+                      </a:pPr>
+                      <a:r>
+                        <a:rPr lang="en-US" sz="1100" dirty="0">
+                          <a:latin typeface="Tahoma" panose="020B0604030504040204" pitchFamily="34" charset="0"/>
+                          <a:ea typeface="Tahoma" panose="020B0604030504040204" pitchFamily="34" charset="0"/>
+                          <a:cs typeface="Tahoma" panose="020B0604030504040204" pitchFamily="34" charset="0"/>
+                        </a:rPr>
+                        <a:t>LP </a:t>
+                      </a:r>
+                      <a:r>
+                        <a:rPr lang="th-TH" sz="1100" dirty="0">
+                          <a:latin typeface="Tahoma" panose="020B0604030504040204" pitchFamily="34" charset="0"/>
+                          <a:ea typeface="Tahoma" panose="020B0604030504040204" pitchFamily="34" charset="0"/>
+                          <a:cs typeface="Tahoma" panose="020B0604030504040204" pitchFamily="34" charset="0"/>
+                        </a:rPr>
+                        <a:t>และแผนกตรวจสอบรายการสินค้า </a:t>
+                      </a:r>
+                      <a:r>
+                        <a:rPr lang="en-US" sz="1100" dirty="0">
+                          <a:latin typeface="Tahoma" panose="020B0604030504040204" pitchFamily="34" charset="0"/>
+                          <a:ea typeface="Tahoma" panose="020B0604030504040204" pitchFamily="34" charset="0"/>
+                          <a:cs typeface="Tahoma" panose="020B0604030504040204" pitchFamily="34" charset="0"/>
+                        </a:rPr>
+                        <a:t>Nearly Expire </a:t>
+                      </a:r>
+                      <a:r>
+                        <a:rPr lang="th-TH" sz="1100" dirty="0">
+                          <a:latin typeface="Tahoma" panose="020B0604030504040204" pitchFamily="34" charset="0"/>
+                          <a:ea typeface="Tahoma" panose="020B0604030504040204" pitchFamily="34" charset="0"/>
+                          <a:cs typeface="Tahoma" panose="020B0604030504040204" pitchFamily="34" charset="0"/>
+                        </a:rPr>
+                        <a:t>ที่ได้มาจากระบบทุกวันอังคาร และดำเนินการลดราคาสินค้าตามขั้นตอน กรณีพบสินค้าที่ใกล้หมดอายุ</a:t>
+                      </a:r>
+                      <a:endParaRPr lang="en-US" sz="1100" dirty="0">
+                        <a:latin typeface="Tahoma" panose="020B0604030504040204" pitchFamily="34" charset="0"/>
+                        <a:ea typeface="Tahoma" panose="020B0604030504040204" pitchFamily="34" charset="0"/>
+                        <a:cs typeface="Tahoma" panose="020B0604030504040204" pitchFamily="34" charset="0"/>
+                      </a:endParaRPr>
+                    </a:p>
+                    <a:p>
+                      <a:pPr marL="228600" indent="-228600">
+                        <a:buAutoNum type="arabicPeriod"/>
+                      </a:pPr>
+                      <a:r>
+                        <a:rPr lang="th-TH" sz="1100" dirty="0">
+                          <a:latin typeface="Tahoma" panose="020B0604030504040204" pitchFamily="34" charset="0"/>
+                          <a:ea typeface="Tahoma" panose="020B0604030504040204" pitchFamily="34" charset="0"/>
+                          <a:cs typeface="Tahoma" panose="020B0604030504040204" pitchFamily="34" charset="0"/>
+                        </a:rPr>
+                        <a:t>สินค้าที่มีพีซีดูแล หากพบหมดอายุโดยไม่ทำตามขั้นตอน  ให้ต้นสังกัดเป็นผู้รับผิดชอบความเสียหาย</a:t>
+                      </a:r>
+                    </a:p>
+                    <a:p>
+                      <a:pPr marL="228600" indent="-228600">
+                        <a:buAutoNum type="arabicPeriod"/>
+                      </a:pPr>
+                      <a:r>
+                        <a:rPr lang="th-TH" sz="1100" dirty="0">
+                          <a:latin typeface="Tahoma" panose="020B0604030504040204" pitchFamily="34" charset="0"/>
+                          <a:ea typeface="Tahoma" panose="020B0604030504040204" pitchFamily="34" charset="0"/>
+                          <a:cs typeface="Tahoma" panose="020B0604030504040204" pitchFamily="34" charset="0"/>
+                        </a:rPr>
+                        <a:t>สินค้าที่มีการทำลายที่มีมูลค่า 500 บาทต่อ 1 </a:t>
+                      </a:r>
+                      <a:r>
+                        <a:rPr lang="en-US" sz="1100" dirty="0">
+                          <a:latin typeface="Tahoma" panose="020B0604030504040204" pitchFamily="34" charset="0"/>
+                          <a:ea typeface="Tahoma" panose="020B0604030504040204" pitchFamily="34" charset="0"/>
+                          <a:cs typeface="Tahoma" panose="020B0604030504040204" pitchFamily="34" charset="0"/>
+                        </a:rPr>
+                        <a:t>Item </a:t>
+                      </a:r>
+                      <a:r>
+                        <a:rPr lang="th-TH" sz="1100" dirty="0">
+                          <a:latin typeface="Tahoma" panose="020B0604030504040204" pitchFamily="34" charset="0"/>
+                          <a:ea typeface="Tahoma" panose="020B0604030504040204" pitchFamily="34" charset="0"/>
+                          <a:cs typeface="Tahoma" panose="020B0604030504040204" pitchFamily="34" charset="0"/>
+                        </a:rPr>
+                        <a:t>จะต้องแจ้งให้ </a:t>
+                      </a:r>
+                      <a:r>
+                        <a:rPr lang="en-US" sz="1100" dirty="0">
+                          <a:latin typeface="Tahoma" panose="020B0604030504040204" pitchFamily="34" charset="0"/>
+                          <a:ea typeface="Tahoma" panose="020B0604030504040204" pitchFamily="34" charset="0"/>
+                          <a:cs typeface="Tahoma" panose="020B0604030504040204" pitchFamily="34" charset="0"/>
+                        </a:rPr>
+                        <a:t>M1 </a:t>
+                      </a:r>
+                      <a:r>
+                        <a:rPr lang="th-TH" sz="1100" dirty="0">
+                          <a:latin typeface="Tahoma" panose="020B0604030504040204" pitchFamily="34" charset="0"/>
+                          <a:ea typeface="Tahoma" panose="020B0604030504040204" pitchFamily="34" charset="0"/>
+                          <a:cs typeface="Tahoma" panose="020B0604030504040204" pitchFamily="34" charset="0"/>
+                        </a:rPr>
+                        <a:t>ทราบและอนุมัติ</a:t>
+                      </a:r>
+                    </a:p>
+                    <a:p>
+                      <a:pPr marL="228600" indent="-228600">
+                        <a:buAutoNum type="arabicPeriod"/>
+                      </a:pPr>
+                      <a:r>
+                        <a:rPr lang="en-US" sz="1100" dirty="0">
+                          <a:latin typeface="Tahoma" panose="020B0604030504040204" pitchFamily="34" charset="0"/>
+                          <a:ea typeface="Tahoma" panose="020B0604030504040204" pitchFamily="34" charset="0"/>
+                          <a:cs typeface="Tahoma" panose="020B0604030504040204" pitchFamily="34" charset="0"/>
+                        </a:rPr>
+                        <a:t>Stockroom </a:t>
+                      </a:r>
+                      <a:r>
+                        <a:rPr lang="th-TH" sz="1100" dirty="0">
+                          <a:latin typeface="Tahoma" panose="020B0604030504040204" pitchFamily="34" charset="0"/>
+                          <a:ea typeface="Tahoma" panose="020B0604030504040204" pitchFamily="34" charset="0"/>
+                          <a:cs typeface="Tahoma" panose="020B0604030504040204" pitchFamily="34" charset="0"/>
+                        </a:rPr>
+                        <a:t>ต้องได้ตาม </a:t>
+                      </a:r>
+                      <a:r>
+                        <a:rPr lang="en-US" sz="1100" dirty="0">
+                          <a:latin typeface="Tahoma" panose="020B0604030504040204" pitchFamily="34" charset="0"/>
+                          <a:ea typeface="Tahoma" panose="020B0604030504040204" pitchFamily="34" charset="0"/>
+                          <a:cs typeface="Tahoma" panose="020B0604030504040204" pitchFamily="34" charset="0"/>
+                        </a:rPr>
+                        <a:t>Standard </a:t>
+                      </a:r>
+                      <a:r>
+                        <a:rPr lang="th-TH" sz="1100" dirty="0">
+                          <a:latin typeface="Tahoma" panose="020B0604030504040204" pitchFamily="34" charset="0"/>
+                          <a:ea typeface="Tahoma" panose="020B0604030504040204" pitchFamily="34" charset="0"/>
+                          <a:cs typeface="Tahoma" panose="020B0604030504040204" pitchFamily="34" charset="0"/>
+                        </a:rPr>
+                        <a:t>ทุกวัน เพื่อลดสินค้าเสียหายและหมดอายุใน </a:t>
+                      </a:r>
+                      <a:r>
+                        <a:rPr lang="en-US" sz="1100" dirty="0">
+                          <a:latin typeface="Tahoma" panose="020B0604030504040204" pitchFamily="34" charset="0"/>
+                          <a:ea typeface="Tahoma" panose="020B0604030504040204" pitchFamily="34" charset="0"/>
+                          <a:cs typeface="Tahoma" panose="020B0604030504040204" pitchFamily="34" charset="0"/>
+                        </a:rPr>
+                        <a:t>Stockroom</a:t>
+                      </a:r>
+                      <a:endParaRPr lang="th-TH" sz="1100" dirty="0">
+                        <a:latin typeface="Tahoma" panose="020B0604030504040204" pitchFamily="34" charset="0"/>
+                        <a:ea typeface="Tahoma" panose="020B0604030504040204" pitchFamily="34" charset="0"/>
+                        <a:cs typeface="Tahoma" panose="020B0604030504040204" pitchFamily="34" charset="0"/>
+                      </a:endParaRPr>
+                    </a:p>
+                  </a:txBody>
+                  <a:tcPr/>
+                </a:tc>
+                <a:tc>
+                  <a:txBody>
+                    <a:bodyPr/>
+                    <a:lstStyle/>
+                    <a:p>
+                      <a:pPr marL="0" marR="0" lvl="0" indent="0" algn="l" defTabSz="761970" rtl="0" eaLnBrk="1" fontAlgn="auto" latinLnBrk="0" hangingPunct="1">
+                        <a:lnSpc>
+                          <a:spcPct val="100000"/>
+                        </a:lnSpc>
+                        <a:spcBef>
+                          <a:spcPts val="0"/>
+                        </a:spcBef>
+                        <a:spcAft>
+                          <a:spcPts val="0"/>
+                        </a:spcAft>
+                        <a:buClrTx/>
+                        <a:buSzTx/>
+                        <a:buFontTx/>
+                        <a:buNone/>
+                        <a:tabLst/>
+                        <a:defRPr/>
+                      </a:pPr>
+                      <a:r>
+                        <a:rPr lang="en-US" sz="1100" kern="1200" dirty="0">
+                          <a:solidFill>
+                            <a:schemeClr val="tx1"/>
+                          </a:solidFill>
+                          <a:latin typeface="Tahoma" panose="020B0604030504040204" pitchFamily="34" charset="0"/>
+                          <a:ea typeface="Tahoma" panose="020B0604030504040204" pitchFamily="34" charset="0"/>
+                          <a:cs typeface="Tahoma" panose="020B0604030504040204" pitchFamily="34" charset="0"/>
+                        </a:rPr>
+                        <a:t>M1 ,M.Opt,C3,C9,LP</a:t>
+                      </a:r>
+                      <a:endParaRPr lang="th-TH" sz="1100" kern="1200" dirty="0">
+                        <a:solidFill>
+                          <a:schemeClr val="tx1"/>
+                        </a:solidFill>
+                        <a:latin typeface="Tahoma" panose="020B0604030504040204" pitchFamily="34" charset="0"/>
+                        <a:ea typeface="Tahoma" panose="020B0604030504040204" pitchFamily="34" charset="0"/>
+                        <a:cs typeface="Tahoma" panose="020B0604030504040204" pitchFamily="34" charset="0"/>
+                      </a:endParaRPr>
+                    </a:p>
+                  </a:txBody>
+                  <a:tcPr/>
+                </a:tc>
+                <a:tc>
+                  <a:txBody>
+                    <a:bodyPr/>
+                    <a:lstStyle/>
+                    <a:p>
+                      <a:r>
+                        <a:rPr lang="en-US" sz="1100" dirty="0">
+                          <a:latin typeface="Tahoma" panose="020B0604030504040204" pitchFamily="34" charset="0"/>
+                          <a:ea typeface="Tahoma" panose="020B0604030504040204" pitchFamily="34" charset="0"/>
+                          <a:cs typeface="Tahoma" panose="020B0604030504040204" pitchFamily="34" charset="0"/>
+                        </a:rPr>
+                        <a:t>Jan – Dec 2026</a:t>
+                      </a:r>
+                    </a:p>
+                  </a:txBody>
+                  <a:tcPr/>
+                </a:tc>
+                <a:tc>
+                  <a:txBody>
+                    <a:bodyPr/>
+                    <a:lstStyle/>
+                    <a:p>
+                      <a:r>
+                        <a:rPr lang="th-TH" sz="1100" dirty="0">
+                          <a:latin typeface="Tahoma" panose="020B0604030504040204" pitchFamily="34" charset="0"/>
+                          <a:ea typeface="Tahoma" panose="020B0604030504040204" pitchFamily="34" charset="0"/>
+                          <a:cs typeface="Tahoma" panose="020B0604030504040204" pitchFamily="34" charset="0"/>
+                        </a:rPr>
+                        <a:t>1.</a:t>
+                      </a:r>
+                      <a:r>
+                        <a:rPr lang="en-US" sz="1100" dirty="0">
+                          <a:latin typeface="Tahoma" panose="020B0604030504040204" pitchFamily="34" charset="0"/>
+                          <a:ea typeface="Tahoma" panose="020B0604030504040204" pitchFamily="34" charset="0"/>
+                          <a:cs typeface="Tahoma" panose="020B0604030504040204" pitchFamily="34" charset="0"/>
+                        </a:rPr>
+                        <a:t>M1 </a:t>
+                      </a:r>
+                      <a:r>
+                        <a:rPr lang="th-TH" sz="1100" dirty="0">
+                          <a:latin typeface="Tahoma" panose="020B0604030504040204" pitchFamily="34" charset="0"/>
+                          <a:ea typeface="Tahoma" panose="020B0604030504040204" pitchFamily="34" charset="0"/>
+                          <a:cs typeface="Tahoma" panose="020B0604030504040204" pitchFamily="34" charset="0"/>
+                        </a:rPr>
+                        <a:t>ตรวจสอบรายการที่ต้องส่ง </a:t>
+                      </a:r>
+                      <a:r>
+                        <a:rPr lang="en-US" sz="1100" dirty="0">
+                          <a:latin typeface="Tahoma" panose="020B0604030504040204" pitchFamily="34" charset="0"/>
+                          <a:ea typeface="Tahoma" panose="020B0604030504040204" pitchFamily="34" charset="0"/>
+                          <a:cs typeface="Tahoma" panose="020B0604030504040204" pitchFamily="34" charset="0"/>
+                        </a:rPr>
+                        <a:t>Pilot </a:t>
+                      </a:r>
+                      <a:r>
+                        <a:rPr lang="th-TH" sz="1100" dirty="0">
+                          <a:latin typeface="Tahoma" panose="020B0604030504040204" pitchFamily="34" charset="0"/>
+                          <a:ea typeface="Tahoma" panose="020B0604030504040204" pitchFamily="34" charset="0"/>
+                          <a:cs typeface="Tahoma" panose="020B0604030504040204" pitchFamily="34" charset="0"/>
+                        </a:rPr>
+                        <a:t>ทุกๆ วันที่ 25 ของทุกเดือน</a:t>
+                      </a:r>
+                    </a:p>
+                    <a:p>
+                      <a:r>
+                        <a:rPr lang="th-TH" sz="1100" dirty="0">
+                          <a:latin typeface="Tahoma" panose="020B0604030504040204" pitchFamily="34" charset="0"/>
+                          <a:ea typeface="Tahoma" panose="020B0604030504040204" pitchFamily="34" charset="0"/>
+                          <a:cs typeface="Tahoma" panose="020B0604030504040204" pitchFamily="34" charset="0"/>
+                        </a:rPr>
+                        <a:t>2.ทุกวันศุกร์ </a:t>
+                      </a:r>
+                      <a:r>
+                        <a:rPr lang="en-US" sz="1100" dirty="0">
+                          <a:latin typeface="Tahoma" panose="020B0604030504040204" pitchFamily="34" charset="0"/>
+                          <a:ea typeface="Tahoma" panose="020B0604030504040204" pitchFamily="34" charset="0"/>
+                          <a:cs typeface="Tahoma" panose="020B0604030504040204" pitchFamily="34" charset="0"/>
+                        </a:rPr>
+                        <a:t>M1</a:t>
+                      </a:r>
+                      <a:r>
+                        <a:rPr lang="th-TH" sz="1100" dirty="0">
+                          <a:latin typeface="Tahoma" panose="020B0604030504040204" pitchFamily="34" charset="0"/>
+                          <a:ea typeface="Tahoma" panose="020B0604030504040204" pitchFamily="34" charset="0"/>
+                          <a:cs typeface="Tahoma" panose="020B0604030504040204" pitchFamily="34" charset="0"/>
+                        </a:rPr>
+                        <a:t> ตรวจสอบรายการ </a:t>
+                      </a:r>
+                      <a:r>
+                        <a:rPr lang="en-US" sz="1100" dirty="0">
+                          <a:latin typeface="Tahoma" panose="020B0604030504040204" pitchFamily="34" charset="0"/>
+                          <a:ea typeface="Tahoma" panose="020B0604030504040204" pitchFamily="34" charset="0"/>
+                          <a:cs typeface="Tahoma" panose="020B0604030504040204" pitchFamily="34" charset="0"/>
+                        </a:rPr>
+                        <a:t>Nearly Expire </a:t>
+                      </a:r>
+                      <a:r>
+                        <a:rPr lang="th-TH" sz="1100" dirty="0">
+                          <a:latin typeface="Tahoma" panose="020B0604030504040204" pitchFamily="34" charset="0"/>
+                          <a:ea typeface="Tahoma" panose="020B0604030504040204" pitchFamily="34" charset="0"/>
+                          <a:cs typeface="Tahoma" panose="020B0604030504040204" pitchFamily="34" charset="0"/>
+                        </a:rPr>
+                        <a:t>จาก </a:t>
+                      </a:r>
+                      <a:r>
+                        <a:rPr lang="en-US" sz="1100" dirty="0">
+                          <a:latin typeface="Tahoma" panose="020B0604030504040204" pitchFamily="34" charset="0"/>
+                          <a:ea typeface="Tahoma" panose="020B0604030504040204" pitchFamily="34" charset="0"/>
+                          <a:cs typeface="Tahoma" panose="020B0604030504040204" pitchFamily="34" charset="0"/>
+                        </a:rPr>
+                        <a:t>Report </a:t>
+                      </a:r>
+                      <a:r>
+                        <a:rPr lang="th-TH" sz="1100" dirty="0">
+                          <a:latin typeface="Tahoma" panose="020B0604030504040204" pitchFamily="34" charset="0"/>
+                          <a:ea typeface="Tahoma" panose="020B0604030504040204" pitchFamily="34" charset="0"/>
+                          <a:cs typeface="Tahoma" panose="020B0604030504040204" pitchFamily="34" charset="0"/>
+                        </a:rPr>
+                        <a:t>ที่ชั้นวางและสต็อคอีกครั้ง</a:t>
+                      </a:r>
+                    </a:p>
+                    <a:p>
+                      <a:r>
+                        <a:rPr lang="th-TH" sz="1100" dirty="0">
+                          <a:latin typeface="Tahoma" panose="020B0604030504040204" pitchFamily="34" charset="0"/>
+                          <a:ea typeface="Tahoma" panose="020B0604030504040204" pitchFamily="34" charset="0"/>
+                          <a:cs typeface="Tahoma" panose="020B0604030504040204" pitchFamily="34" charset="0"/>
+                        </a:rPr>
+                        <a:t>3</a:t>
+                      </a:r>
+                      <a:r>
+                        <a:rPr lang="en-US" sz="1100" dirty="0">
+                          <a:latin typeface="Tahoma" panose="020B0604030504040204" pitchFamily="34" charset="0"/>
+                          <a:ea typeface="Tahoma" panose="020B0604030504040204" pitchFamily="34" charset="0"/>
+                          <a:cs typeface="Tahoma" panose="020B0604030504040204" pitchFamily="34" charset="0"/>
+                        </a:rPr>
+                        <a:t>.Duty </a:t>
+                      </a:r>
+                      <a:r>
+                        <a:rPr lang="th-TH" sz="1100" dirty="0">
+                          <a:latin typeface="Tahoma" panose="020B0604030504040204" pitchFamily="34" charset="0"/>
+                          <a:ea typeface="Tahoma" panose="020B0604030504040204" pitchFamily="34" charset="0"/>
+                          <a:cs typeface="Tahoma" panose="020B0604030504040204" pitchFamily="34" charset="0"/>
+                        </a:rPr>
+                        <a:t>บ่ายตรวจสอบห้อง </a:t>
+                      </a:r>
+                      <a:r>
+                        <a:rPr lang="en-US" sz="1100" dirty="0">
+                          <a:latin typeface="Tahoma" panose="020B0604030504040204" pitchFamily="34" charset="0"/>
+                          <a:ea typeface="Tahoma" panose="020B0604030504040204" pitchFamily="34" charset="0"/>
+                          <a:cs typeface="Tahoma" panose="020B0604030504040204" pitchFamily="34" charset="0"/>
+                        </a:rPr>
+                        <a:t>Repack </a:t>
+                      </a:r>
+                      <a:r>
+                        <a:rPr lang="th-TH" sz="1100" dirty="0">
+                          <a:latin typeface="Tahoma" panose="020B0604030504040204" pitchFamily="34" charset="0"/>
+                          <a:ea typeface="Tahoma" panose="020B0604030504040204" pitchFamily="34" charset="0"/>
+                          <a:cs typeface="Tahoma" panose="020B0604030504040204" pitchFamily="34" charset="0"/>
+                        </a:rPr>
+                        <a:t>ทุกวันต้องเคลียร์เรียบร้อยไม่มีสินค้ารอลดราคาเหลืออยู่</a:t>
+                      </a:r>
+                      <a:endParaRPr lang="en-US" sz="1100" dirty="0">
+                        <a:latin typeface="Tahoma" panose="020B0604030504040204" pitchFamily="34" charset="0"/>
+                        <a:ea typeface="Tahoma" panose="020B0604030504040204" pitchFamily="34" charset="0"/>
+                        <a:cs typeface="Tahoma" panose="020B0604030504040204" pitchFamily="34" charset="0"/>
+                      </a:endParaRPr>
+                    </a:p>
+                  </a:txBody>
+                  <a:tcPr/>
+                </a:tc>
+                <a:extLst>
+                  <a:ext uri="{0D108BD9-81ED-4DB2-BD59-A6C34878D82A}">
+                    <a16:rowId xmlns:a16="http://schemas.microsoft.com/office/drawing/2014/main" val="833854746"/>
+                  </a:ext>
+                </a:extLst>
               </a:tr>
-              <a:tr h="700000">
-                <a:tc>
-                  <a:txBody>
-                    <a:bodyPr wrap="square"/>
-                    <a:lstStyle/>
-                    <a:p>
-                      <a:pPr algn="l"/>
-                      <a:r>
-                        <a:rPr sz="1050" b="1">
-                          <a:solidFill>
-                            <a:srgbClr val="263238"/>
-                          </a:solidFill>
-                          <a:latin typeface="Tahoma"/>
-                        </a:rPr>
-                        <a:t>RTC ใกล้หมดอายุ</a:t>
-                      </a:r>
-                    </a:p>
-                    <a:p>
-                      <a:pPr algn="l"/>
-                      <a:r>
-                        <a:rPr sz="1050" b="1">
-                          <a:solidFill>
-                            <a:srgbClr val="263238"/>
-                          </a:solidFill>
-                          <a:latin typeface="Tahoma"/>
+              <a:tr h="970218">
+                <a:tc>
+                  <a:txBody>
+                    <a:bodyPr/>
+                    <a:lstStyle/>
+                    <a:p>
+                      <a:pPr algn="ctr"/>
+                      <a:r>
+                        <a:rPr lang="th-TH" sz="1100" kern="1200" dirty="0">
+                          <a:solidFill>
+                            <a:schemeClr val="dk1"/>
+                          </a:solidFill>
+                          <a:latin typeface="Tahoma" panose="020B0604030504040204" pitchFamily="34" charset="0"/>
+                          <a:ea typeface="Tahoma" panose="020B0604030504040204" pitchFamily="34" charset="0"/>
+                          <a:cs typeface="Tahoma" panose="020B0604030504040204" pitchFamily="34" charset="0"/>
+                        </a:rPr>
+                        <a:t>2</a:t>
+                      </a:r>
+                      <a:endParaRPr lang="en-US" sz="1100" kern="1200" dirty="0">
+                        <a:solidFill>
+                          <a:schemeClr val="dk1"/>
+                        </a:solidFill>
+                        <a:latin typeface="Tahoma" panose="020B0604030504040204" pitchFamily="34" charset="0"/>
+                        <a:ea typeface="Tahoma" panose="020B0604030504040204" pitchFamily="34" charset="0"/>
+                        <a:cs typeface="Tahoma" panose="020B0604030504040204" pitchFamily="34" charset="0"/>
+                      </a:endParaRPr>
+                    </a:p>
+                  </a:txBody>
+                  <a:tcPr/>
+                </a:tc>
+                <a:tc>
+                  <a:txBody>
+                    <a:bodyPr/>
+                    <a:lstStyle/>
+                    <a:p>
+                      <a:r>
+                        <a:rPr lang="en-US" sz="1100" u="sng" kern="1200" dirty="0" err="1">
+                          <a:solidFill>
+                            <a:schemeClr val="dk1"/>
+                          </a:solidFill>
+                          <a:latin typeface="Tahoma" panose="020B0604030504040204" pitchFamily="34" charset="0"/>
+                          <a:ea typeface="Tahoma" panose="020B0604030504040204" pitchFamily="34" charset="0"/>
+                          <a:cs typeface="Tahoma" panose="020B0604030504040204" pitchFamily="34" charset="0"/>
+                        </a:rPr>
+                        <a:t>Fresfood</a:t>
+                      </a:r>
+                      <a:endParaRPr lang="en-US" sz="1100" u="sng" kern="1200" dirty="0">
+                        <a:solidFill>
+                          <a:schemeClr val="dk1"/>
+                        </a:solidFill>
+                        <a:latin typeface="Tahoma" panose="020B0604030504040204" pitchFamily="34" charset="0"/>
+                        <a:ea typeface="Tahoma" panose="020B0604030504040204" pitchFamily="34" charset="0"/>
+                        <a:cs typeface="Tahoma" panose="020B0604030504040204" pitchFamily="34" charset="0"/>
+                      </a:endParaRPr>
+                    </a:p>
+                    <a:p>
+                      <a:r>
+                        <a:rPr lang="en-US" sz="1100" u="sng" kern="1200" dirty="0">
+                          <a:solidFill>
+                            <a:schemeClr val="dk1"/>
+                          </a:solidFill>
+                          <a:latin typeface="Tahoma" panose="020B0604030504040204" pitchFamily="34" charset="0"/>
+                          <a:ea typeface="Tahoma" panose="020B0604030504040204" pitchFamily="34" charset="0"/>
+                          <a:cs typeface="Tahoma" panose="020B0604030504040204" pitchFamily="34" charset="0"/>
+                        </a:rPr>
+                        <a:t>Damage</a:t>
+                      </a:r>
+                    </a:p>
+                    <a:p>
+                      <a:r>
+                        <a:rPr lang="en-US" sz="1100" u="none" kern="1200" dirty="0">
+                          <a:solidFill>
+                            <a:schemeClr val="dk1"/>
+                          </a:solidFill>
+                          <a:latin typeface="Tahoma" panose="020B0604030504040204" pitchFamily="34" charset="0"/>
+                          <a:ea typeface="Tahoma" panose="020B0604030504040204" pitchFamily="34" charset="0"/>
+                          <a:cs typeface="Tahoma" panose="020B0604030504040204" pitchFamily="34" charset="0"/>
+                        </a:rPr>
+                        <a:t>-</a:t>
+                      </a:r>
+                      <a:r>
+                        <a:rPr lang="th-TH" sz="1100" u="none" kern="1200" dirty="0">
+                          <a:solidFill>
+                            <a:schemeClr val="dk1"/>
+                          </a:solidFill>
+                          <a:latin typeface="Tahoma" panose="020B0604030504040204" pitchFamily="34" charset="0"/>
+                          <a:ea typeface="Tahoma" panose="020B0604030504040204" pitchFamily="34" charset="0"/>
+                          <a:cs typeface="Tahoma" panose="020B0604030504040204" pitchFamily="34" charset="0"/>
+                        </a:rPr>
+                        <a:t>สินค้าสินค้าตามฤดูกาลซึ่งซึ่งเสื่อมสภาพตามกาลเวลาทำลดราคาขายตามขั้นตอนขายไม่หมด เช่น ทุเรียนหมอนทอง</a:t>
+                      </a:r>
+                    </a:p>
+                    <a:p>
+                      <a:r>
+                        <a:rPr lang="th-TH" sz="1100" u="none" kern="1200" dirty="0">
+                          <a:solidFill>
+                            <a:schemeClr val="dk1"/>
+                          </a:solidFill>
+                          <a:latin typeface="Tahoma" panose="020B0604030504040204" pitchFamily="34" charset="0"/>
+                          <a:ea typeface="Tahoma" panose="020B0604030504040204" pitchFamily="34" charset="0"/>
+                          <a:cs typeface="Tahoma" panose="020B0604030504040204" pitchFamily="34" charset="0"/>
+                        </a:rPr>
+                        <a:t>-สินค้า ทำการลดราคาขายตามขั้นตอนขายไม่หมด เช่น </a:t>
+                      </a:r>
+                      <a:r>
+                        <a:rPr lang="en-US" sz="1100" u="none" kern="1200" dirty="0">
+                          <a:solidFill>
+                            <a:schemeClr val="dk1"/>
+                          </a:solidFill>
+                          <a:latin typeface="Tahoma" panose="020B0604030504040204" pitchFamily="34" charset="0"/>
+                          <a:ea typeface="Tahoma" panose="020B0604030504040204" pitchFamily="34" charset="0"/>
+                          <a:cs typeface="Tahoma" panose="020B0604030504040204" pitchFamily="34" charset="0"/>
+                        </a:rPr>
+                        <a:t>WE ARE FRESH</a:t>
+                      </a:r>
+                      <a:r>
+                        <a:rPr lang="th-TH" sz="1100" u="none" kern="1200" dirty="0">
+                          <a:solidFill>
+                            <a:schemeClr val="dk1"/>
+                          </a:solidFill>
+                          <a:latin typeface="Tahoma" panose="020B0604030504040204" pitchFamily="34" charset="0"/>
+                          <a:ea typeface="Tahoma" panose="020B0604030504040204" pitchFamily="34" charset="0"/>
+                          <a:cs typeface="Tahoma" panose="020B0604030504040204" pitchFamily="34" charset="0"/>
+                        </a:rPr>
+                        <a:t>มะละกอปลักไม้ลาย</a:t>
+                      </a:r>
+                      <a:r>
+                        <a:rPr lang="en-US" sz="1100" u="none" kern="1200" dirty="0">
+                          <a:solidFill>
+                            <a:schemeClr val="dk1"/>
+                          </a:solidFill>
+                          <a:latin typeface="Tahoma" panose="020B0604030504040204" pitchFamily="34" charset="0"/>
+                          <a:ea typeface="Tahoma" panose="020B0604030504040204" pitchFamily="34" charset="0"/>
+                          <a:cs typeface="Tahoma" panose="020B0604030504040204" pitchFamily="34" charset="0"/>
+                        </a:rPr>
+                        <a:t>, </a:t>
+                      </a:r>
+                      <a:endParaRPr lang="th-TH" sz="1100" u="none" kern="1200" dirty="0">
+                        <a:solidFill>
+                          <a:schemeClr val="dk1"/>
+                        </a:solidFill>
+                        <a:latin typeface="Tahoma" panose="020B0604030504040204" pitchFamily="34" charset="0"/>
+                        <a:ea typeface="Tahoma" panose="020B0604030504040204" pitchFamily="34" charset="0"/>
+                        <a:cs typeface="Tahoma" panose="020B0604030504040204" pitchFamily="34" charset="0"/>
+                      </a:endParaRPr>
+                    </a:p>
+                  </a:txBody>
+                  <a:tcPr/>
+                </a:tc>
+                <a:tc>
+                  <a:txBody>
+                    <a:bodyPr/>
+                    <a:lstStyle/>
+                    <a:p>
+                      <a:pPr marL="228600" indent="-228600">
+                        <a:buAutoNum type="arabicPeriod"/>
+                      </a:pPr>
+                      <a:r>
+                        <a:rPr lang="th-TH" sz="1100" kern="1200" dirty="0">
+                          <a:solidFill>
+                            <a:schemeClr val="dk1"/>
+                          </a:solidFill>
+                          <a:latin typeface="Tahoma" panose="020B0604030504040204" pitchFamily="34" charset="0"/>
+                          <a:ea typeface="Tahoma" panose="020B0604030504040204" pitchFamily="34" charset="0"/>
+                          <a:cs typeface="Tahoma" panose="020B0604030504040204" pitchFamily="34" charset="0"/>
+                        </a:rPr>
+                        <a:t>แผนกพยายามผลักดันขายสินค้าที่มีการทำลดราคาในตอนเย็นทุกๆวัน เพื่อลดการทำลายสินค้าที่ขายไม่หมด</a:t>
+                      </a:r>
+                    </a:p>
+                    <a:p>
+                      <a:pPr marL="228600" indent="-228600">
+                        <a:buAutoNum type="arabicPeriod"/>
+                      </a:pPr>
+                      <a:r>
+                        <a:rPr lang="th-TH" sz="1100" kern="1200" dirty="0">
+                          <a:solidFill>
+                            <a:schemeClr val="dk1"/>
+                          </a:solidFill>
+                          <a:latin typeface="Tahoma" panose="020B0604030504040204" pitchFamily="34" charset="0"/>
+                          <a:ea typeface="Tahoma" panose="020B0604030504040204" pitchFamily="34" charset="0"/>
+                          <a:cs typeface="Tahoma" panose="020B0604030504040204" pitchFamily="34" charset="0"/>
+                        </a:rPr>
+                        <a:t>แผนกต้องตรวจสอบ </a:t>
+                      </a:r>
+                      <a:r>
+                        <a:rPr lang="en-US" sz="1100" kern="1200" dirty="0">
+                          <a:solidFill>
+                            <a:schemeClr val="dk1"/>
+                          </a:solidFill>
+                          <a:latin typeface="Tahoma" panose="020B0604030504040204" pitchFamily="34" charset="0"/>
+                          <a:ea typeface="Tahoma" panose="020B0604030504040204" pitchFamily="34" charset="0"/>
+                          <a:cs typeface="Tahoma" panose="020B0604030504040204" pitchFamily="34" charset="0"/>
+                        </a:rPr>
+                        <a:t>Confirm Order </a:t>
+                      </a:r>
+                      <a:r>
+                        <a:rPr lang="th-TH" sz="1100" kern="1200" dirty="0">
+                          <a:solidFill>
+                            <a:schemeClr val="dk1"/>
+                          </a:solidFill>
+                          <a:latin typeface="Tahoma" panose="020B0604030504040204" pitchFamily="34" charset="0"/>
+                          <a:ea typeface="Tahoma" panose="020B0604030504040204" pitchFamily="34" charset="0"/>
+                          <a:cs typeface="Tahoma" panose="020B0604030504040204" pitchFamily="34" charset="0"/>
+                        </a:rPr>
+                        <a:t>ทุกวันจันทร์ เพื่อวางแผนการขายสินค้าและหากสินค้า </a:t>
+                      </a:r>
+                      <a:r>
+                        <a:rPr lang="en-US" sz="1100" kern="1200" dirty="0">
+                          <a:solidFill>
+                            <a:schemeClr val="dk1"/>
+                          </a:solidFill>
+                          <a:latin typeface="Tahoma" panose="020B0604030504040204" pitchFamily="34" charset="0"/>
+                          <a:ea typeface="Tahoma" panose="020B0604030504040204" pitchFamily="34" charset="0"/>
+                          <a:cs typeface="Tahoma" panose="020B0604030504040204" pitchFamily="34" charset="0"/>
+                        </a:rPr>
+                        <a:t>Overstock </a:t>
+                      </a:r>
+                      <a:r>
+                        <a:rPr lang="th-TH" sz="1100" kern="1200" dirty="0">
+                          <a:solidFill>
+                            <a:schemeClr val="dk1"/>
+                          </a:solidFill>
+                          <a:latin typeface="Tahoma" panose="020B0604030504040204" pitchFamily="34" charset="0"/>
+                          <a:ea typeface="Tahoma" panose="020B0604030504040204" pitchFamily="34" charset="0"/>
+                          <a:cs typeface="Tahoma" panose="020B0604030504040204" pitchFamily="34" charset="0"/>
+                        </a:rPr>
+                        <a:t>จะได้ดำเนินการแก้ไขได้ทัน</a:t>
+                      </a:r>
+                    </a:p>
+                    <a:p>
+                      <a:pPr marL="228600" indent="-228600">
+                        <a:buAutoNum type="arabicPeriod"/>
+                      </a:pPr>
+                      <a:r>
+                        <a:rPr lang="en-US" sz="1100" kern="1200" dirty="0">
+                          <a:solidFill>
+                            <a:schemeClr val="dk1"/>
+                          </a:solidFill>
+                          <a:latin typeface="Tahoma" panose="020B0604030504040204" pitchFamily="34" charset="0"/>
+                          <a:ea typeface="Tahoma" panose="020B0604030504040204" pitchFamily="34" charset="0"/>
+                          <a:cs typeface="Tahoma" panose="020B0604030504040204" pitchFamily="34" charset="0"/>
+                        </a:rPr>
+                        <a:t>M1</a:t>
+                      </a:r>
+                      <a:r>
+                        <a:rPr lang="th-TH" sz="1100" kern="1200" dirty="0">
+                          <a:solidFill>
+                            <a:schemeClr val="dk1"/>
+                          </a:solidFill>
+                          <a:latin typeface="Tahoma" panose="020B0604030504040204" pitchFamily="34" charset="0"/>
+                          <a:ea typeface="Tahoma" panose="020B0604030504040204" pitchFamily="34" charset="0"/>
+                          <a:cs typeface="Tahoma" panose="020B0604030504040204" pitchFamily="34" charset="0"/>
+                        </a:rPr>
+                        <a:t> และ </a:t>
+                      </a:r>
+                      <a:r>
+                        <a:rPr lang="en-US" sz="1100" kern="1200" dirty="0" err="1">
+                          <a:solidFill>
+                            <a:schemeClr val="dk1"/>
+                          </a:solidFill>
+                          <a:latin typeface="Tahoma" panose="020B0604030504040204" pitchFamily="34" charset="0"/>
+                          <a:ea typeface="Tahoma" panose="020B0604030504040204" pitchFamily="34" charset="0"/>
+                          <a:cs typeface="Tahoma" panose="020B0604030504040204" pitchFamily="34" charset="0"/>
+                        </a:rPr>
+                        <a:t>M.Opt</a:t>
+                      </a:r>
+                      <a:r>
+                        <a:rPr lang="en-US" sz="1100" kern="1200" dirty="0">
+                          <a:solidFill>
+                            <a:schemeClr val="dk1"/>
+                          </a:solidFill>
+                          <a:latin typeface="Tahoma" panose="020B0604030504040204" pitchFamily="34" charset="0"/>
+                          <a:ea typeface="Tahoma" panose="020B0604030504040204" pitchFamily="34" charset="0"/>
+                          <a:cs typeface="Tahoma" panose="020B0604030504040204" pitchFamily="34" charset="0"/>
+                        </a:rPr>
+                        <a:t>  </a:t>
+                      </a:r>
+                      <a:r>
+                        <a:rPr lang="th-TH" sz="1100" kern="1200" dirty="0">
+                          <a:solidFill>
+                            <a:schemeClr val="dk1"/>
+                          </a:solidFill>
+                          <a:latin typeface="Tahoma" panose="020B0604030504040204" pitchFamily="34" charset="0"/>
+                          <a:ea typeface="Tahoma" panose="020B0604030504040204" pitchFamily="34" charset="0"/>
+                          <a:cs typeface="Tahoma" panose="020B0604030504040204" pitchFamily="34" charset="0"/>
+                        </a:rPr>
+                        <a:t>สุ่มตรวจสอบสินค้าในแผนกตู้แช่ที่มีจำนวนเยอะหน้าร้านทุกๆวัน ว่ามีการ </a:t>
+                      </a:r>
+                      <a:r>
+                        <a:rPr lang="en-US" sz="1100" kern="1200" dirty="0">
+                          <a:solidFill>
+                            <a:schemeClr val="dk1"/>
+                          </a:solidFill>
+                          <a:latin typeface="Tahoma" panose="020B0604030504040204" pitchFamily="34" charset="0"/>
+                          <a:ea typeface="Tahoma" panose="020B0604030504040204" pitchFamily="34" charset="0"/>
+                          <a:cs typeface="Tahoma" panose="020B0604030504040204" pitchFamily="34" charset="0"/>
+                        </a:rPr>
+                        <a:t>FIFO </a:t>
+                      </a:r>
+                      <a:r>
+                        <a:rPr lang="th-TH" sz="1100" kern="1200" dirty="0">
+                          <a:solidFill>
+                            <a:schemeClr val="dk1"/>
+                          </a:solidFill>
+                          <a:latin typeface="Tahoma" panose="020B0604030504040204" pitchFamily="34" charset="0"/>
+                          <a:ea typeface="Tahoma" panose="020B0604030504040204" pitchFamily="34" charset="0"/>
+                          <a:cs typeface="Tahoma" panose="020B0604030504040204" pitchFamily="34" charset="0"/>
+                        </a:rPr>
+                        <a:t>หรือใกล้หมดอายุหรือไม่ เพื่อดำเนินการแก้ไขได้ทันท่วงที</a:t>
+                      </a:r>
+                      <a:endParaRPr lang="en-US" sz="1100" kern="1200" dirty="0">
+                        <a:solidFill>
+                          <a:schemeClr val="dk1"/>
+                        </a:solidFill>
+                        <a:latin typeface="Tahoma" panose="020B0604030504040204" pitchFamily="34" charset="0"/>
+                        <a:ea typeface="Tahoma" panose="020B0604030504040204" pitchFamily="34" charset="0"/>
+                        <a:cs typeface="Tahoma" panose="020B0604030504040204" pitchFamily="34" charset="0"/>
+                      </a:endParaRPr>
+                    </a:p>
+                  </a:txBody>
+                  <a:tcPr/>
+                </a:tc>
+                <a:tc>
+                  <a:txBody>
+                    <a:bodyPr/>
+                    <a:lstStyle/>
+                    <a:p>
+                      <a:pPr marL="0" marR="0" lvl="0" indent="0" algn="l" defTabSz="761970" rtl="0" eaLnBrk="1" fontAlgn="auto" latinLnBrk="0" hangingPunct="1">
+                        <a:lnSpc>
+                          <a:spcPct val="100000"/>
+                        </a:lnSpc>
+                        <a:spcBef>
+                          <a:spcPts val="0"/>
+                        </a:spcBef>
+                        <a:spcAft>
+                          <a:spcPts val="0"/>
+                        </a:spcAft>
+                        <a:buClrTx/>
+                        <a:buSzTx/>
+                        <a:buFontTx/>
+                        <a:buNone/>
+                        <a:tabLst/>
+                        <a:defRPr/>
+                      </a:pPr>
+                      <a:r>
+                        <a:rPr lang="en-US" sz="1100" kern="1200" dirty="0">
+                          <a:solidFill>
+                            <a:schemeClr val="tx1"/>
+                          </a:solidFill>
+                          <a:latin typeface="Tahoma" panose="020B0604030504040204" pitchFamily="34" charset="0"/>
+                          <a:ea typeface="Tahoma" panose="020B0604030504040204" pitchFamily="34" charset="0"/>
+                          <a:cs typeface="Tahoma" panose="020B0604030504040204" pitchFamily="34" charset="0"/>
+                        </a:rPr>
+                        <a:t>M1 ,</a:t>
+                      </a:r>
+                      <a:r>
+                        <a:rPr lang="en-US" sz="1100" kern="1200" dirty="0" err="1">
+                          <a:solidFill>
+                            <a:schemeClr val="tx1"/>
+                          </a:solidFill>
+                          <a:latin typeface="Tahoma" panose="020B0604030504040204" pitchFamily="34" charset="0"/>
+                          <a:ea typeface="Tahoma" panose="020B0604030504040204" pitchFamily="34" charset="0"/>
+                          <a:cs typeface="Tahoma" panose="020B0604030504040204" pitchFamily="34" charset="0"/>
+                        </a:rPr>
+                        <a:t>M.Opt,C</a:t>
+                      </a:r>
+                      <a:r>
+                        <a:rPr lang="th-TH" sz="1100" kern="1200" dirty="0">
+                          <a:solidFill>
+                            <a:schemeClr val="tx1"/>
+                          </a:solidFill>
+                          <a:latin typeface="Tahoma" panose="020B0604030504040204" pitchFamily="34" charset="0"/>
+                          <a:ea typeface="Tahoma" panose="020B0604030504040204" pitchFamily="34" charset="0"/>
+                          <a:cs typeface="Tahoma" panose="020B0604030504040204" pitchFamily="34" charset="0"/>
+                        </a:rPr>
+                        <a:t>2</a:t>
+                      </a:r>
+                      <a:r>
+                        <a:rPr lang="en-US" sz="1100" kern="1200" dirty="0">
+                          <a:solidFill>
+                            <a:schemeClr val="tx1"/>
+                          </a:solidFill>
+                          <a:latin typeface="Tahoma" panose="020B0604030504040204" pitchFamily="34" charset="0"/>
+                          <a:ea typeface="Tahoma" panose="020B0604030504040204" pitchFamily="34" charset="0"/>
+                          <a:cs typeface="Tahoma" panose="020B0604030504040204" pitchFamily="34" charset="0"/>
+                        </a:rPr>
+                        <a:t>,C9,LP</a:t>
+                      </a:r>
+                      <a:endParaRPr lang="th-TH" sz="1100" kern="1200" dirty="0">
+                        <a:solidFill>
+                          <a:schemeClr val="tx1"/>
+                        </a:solidFill>
+                        <a:latin typeface="Tahoma" panose="020B0604030504040204" pitchFamily="34" charset="0"/>
+                        <a:ea typeface="Tahoma" panose="020B0604030504040204" pitchFamily="34" charset="0"/>
+                        <a:cs typeface="Tahoma" panose="020B0604030504040204" pitchFamily="34" charset="0"/>
+                      </a:endParaRPr>
+                    </a:p>
+                  </a:txBody>
+                  <a:tcPr/>
+                </a:tc>
+                <a:tc>
+                  <a:txBody>
+                    <a:bodyPr/>
+                    <a:lstStyle/>
+                    <a:p>
+                      <a:r>
+                        <a:rPr lang="en-US" sz="1100" dirty="0">
+                          <a:latin typeface="Tahoma" panose="020B0604030504040204" pitchFamily="34" charset="0"/>
+                          <a:ea typeface="Tahoma" panose="020B0604030504040204" pitchFamily="34" charset="0"/>
+                          <a:cs typeface="Tahoma" panose="020B0604030504040204" pitchFamily="34" charset="0"/>
+                        </a:rPr>
+                        <a:t>Jan – Dec 2026</a:t>
+                      </a:r>
+                    </a:p>
+                  </a:txBody>
+                  <a:tcPr/>
+                </a:tc>
+                <a:tc>
+                  <a:txBody>
+                    <a:bodyPr/>
+                    <a:lstStyle/>
+                    <a:p>
+                      <a:r>
+                        <a:rPr lang="th-TH" sz="1100" kern="1200" dirty="0">
+                          <a:solidFill>
+                            <a:schemeClr val="dk1"/>
+                          </a:solidFill>
+                          <a:latin typeface="Tahoma" panose="020B0604030504040204" pitchFamily="34" charset="0"/>
+                          <a:ea typeface="Tahoma" panose="020B0604030504040204" pitchFamily="34" charset="0"/>
+                          <a:cs typeface="Tahoma" panose="020B0604030504040204" pitchFamily="34" charset="0"/>
+                        </a:rPr>
+                        <a:t>1.</a:t>
+                      </a:r>
+                      <a:r>
+                        <a:rPr lang="en-US" sz="1100" kern="1200" dirty="0">
+                          <a:solidFill>
+                            <a:schemeClr val="dk1"/>
+                          </a:solidFill>
+                          <a:latin typeface="Tahoma" panose="020B0604030504040204" pitchFamily="34" charset="0"/>
+                          <a:ea typeface="Tahoma" panose="020B0604030504040204" pitchFamily="34" charset="0"/>
+                          <a:cs typeface="Tahoma" panose="020B0604030504040204" pitchFamily="34" charset="0"/>
+                        </a:rPr>
+                        <a:t>M1 </a:t>
+                      </a:r>
+                      <a:r>
+                        <a:rPr lang="th-TH" sz="1100" kern="1200" dirty="0">
+                          <a:solidFill>
+                            <a:schemeClr val="dk1"/>
+                          </a:solidFill>
+                          <a:latin typeface="Tahoma" panose="020B0604030504040204" pitchFamily="34" charset="0"/>
+                          <a:ea typeface="Tahoma" panose="020B0604030504040204" pitchFamily="34" charset="0"/>
+                          <a:cs typeface="Tahoma" panose="020B0604030504040204" pitchFamily="34" charset="0"/>
+                        </a:rPr>
+                        <a:t>และ </a:t>
+                      </a:r>
+                      <a:r>
+                        <a:rPr lang="en-US" sz="1100" kern="1200" dirty="0" err="1">
+                          <a:solidFill>
+                            <a:schemeClr val="dk1"/>
+                          </a:solidFill>
+                          <a:latin typeface="Tahoma" panose="020B0604030504040204" pitchFamily="34" charset="0"/>
+                          <a:ea typeface="Tahoma" panose="020B0604030504040204" pitchFamily="34" charset="0"/>
+                          <a:cs typeface="Tahoma" panose="020B0604030504040204" pitchFamily="34" charset="0"/>
+                        </a:rPr>
+                        <a:t>M.Opt</a:t>
+                      </a:r>
+                      <a:r>
+                        <a:rPr lang="en-US" sz="1100" kern="1200" dirty="0">
+                          <a:solidFill>
+                            <a:schemeClr val="dk1"/>
+                          </a:solidFill>
+                          <a:latin typeface="Tahoma" panose="020B0604030504040204" pitchFamily="34" charset="0"/>
+                          <a:ea typeface="Tahoma" panose="020B0604030504040204" pitchFamily="34" charset="0"/>
+                          <a:cs typeface="Tahoma" panose="020B0604030504040204" pitchFamily="34" charset="0"/>
+                        </a:rPr>
+                        <a:t> </a:t>
+                      </a:r>
+                      <a:r>
+                        <a:rPr lang="th-TH" sz="1100" kern="1200" dirty="0">
+                          <a:solidFill>
+                            <a:schemeClr val="dk1"/>
+                          </a:solidFill>
+                          <a:latin typeface="Tahoma" panose="020B0604030504040204" pitchFamily="34" charset="0"/>
+                          <a:ea typeface="Tahoma" panose="020B0604030504040204" pitchFamily="34" charset="0"/>
+                          <a:cs typeface="Tahoma" panose="020B0604030504040204" pitchFamily="34" charset="0"/>
+                        </a:rPr>
+                        <a:t>(กรณี </a:t>
+                      </a:r>
+                      <a:r>
+                        <a:rPr lang="en-US" sz="1100" kern="1200" dirty="0">
+                          <a:solidFill>
+                            <a:schemeClr val="dk1"/>
+                          </a:solidFill>
+                          <a:latin typeface="Tahoma" panose="020B0604030504040204" pitchFamily="34" charset="0"/>
+                          <a:ea typeface="Tahoma" panose="020B0604030504040204" pitchFamily="34" charset="0"/>
+                          <a:cs typeface="Tahoma" panose="020B0604030504040204" pitchFamily="34" charset="0"/>
+                        </a:rPr>
+                        <a:t>M1 </a:t>
+                      </a:r>
+                      <a:r>
+                        <a:rPr lang="th-TH" sz="1100" kern="1200" dirty="0">
+                          <a:solidFill>
+                            <a:schemeClr val="dk1"/>
+                          </a:solidFill>
+                          <a:latin typeface="Tahoma" panose="020B0604030504040204" pitchFamily="34" charset="0"/>
+                          <a:ea typeface="Tahoma" panose="020B0604030504040204" pitchFamily="34" charset="0"/>
+                          <a:cs typeface="Tahoma" panose="020B0604030504040204" pitchFamily="34" charset="0"/>
+                        </a:rPr>
+                        <a:t>หยุด) สุ่มตรววจสอบสินค้าที่มีจำนวนเยอะหน้าร้านทุกวัน </a:t>
+                      </a:r>
+                    </a:p>
+                    <a:p>
+                      <a:r>
+                        <a:rPr lang="th-TH" sz="1100" kern="1200" dirty="0">
+                          <a:solidFill>
+                            <a:schemeClr val="dk1"/>
+                          </a:solidFill>
+                          <a:latin typeface="Tahoma" panose="020B0604030504040204" pitchFamily="34" charset="0"/>
+                          <a:ea typeface="Tahoma" panose="020B0604030504040204" pitchFamily="34" charset="0"/>
+                          <a:cs typeface="Tahoma" panose="020B0604030504040204" pitchFamily="34" charset="0"/>
+                        </a:rPr>
+                        <a:t>2.</a:t>
+                      </a:r>
+                      <a:r>
+                        <a:rPr lang="en-US" sz="1100" kern="1200" dirty="0">
+                          <a:solidFill>
+                            <a:schemeClr val="dk1"/>
+                          </a:solidFill>
+                          <a:latin typeface="Tahoma" panose="020B0604030504040204" pitchFamily="34" charset="0"/>
+                          <a:ea typeface="Tahoma" panose="020B0604030504040204" pitchFamily="34" charset="0"/>
+                          <a:cs typeface="Tahoma" panose="020B0604030504040204" pitchFamily="34" charset="0"/>
+                        </a:rPr>
+                        <a:t>M1 </a:t>
+                      </a:r>
+                      <a:r>
+                        <a:rPr lang="th-TH" sz="1100" kern="1200" dirty="0">
+                          <a:solidFill>
+                            <a:schemeClr val="dk1"/>
+                          </a:solidFill>
+                          <a:latin typeface="Tahoma" panose="020B0604030504040204" pitchFamily="34" charset="0"/>
+                          <a:ea typeface="Tahoma" panose="020B0604030504040204" pitchFamily="34" charset="0"/>
+                          <a:cs typeface="Tahoma" panose="020B0604030504040204" pitchFamily="34" charset="0"/>
+                        </a:rPr>
+                        <a:t>ตรวจสอบ </a:t>
+                      </a:r>
+                      <a:r>
+                        <a:rPr lang="en-US" sz="1100" kern="1200" dirty="0">
+                          <a:solidFill>
+                            <a:schemeClr val="dk1"/>
+                          </a:solidFill>
+                          <a:latin typeface="Tahoma" panose="020B0604030504040204" pitchFamily="34" charset="0"/>
+                          <a:ea typeface="Tahoma" panose="020B0604030504040204" pitchFamily="34" charset="0"/>
+                          <a:cs typeface="Tahoma" panose="020B0604030504040204" pitchFamily="34" charset="0"/>
+                        </a:rPr>
+                        <a:t>Confirm Order FF </a:t>
+                      </a:r>
+                      <a:r>
+                        <a:rPr lang="th-TH" sz="1100" kern="1200" dirty="0">
+                          <a:solidFill>
+                            <a:schemeClr val="dk1"/>
+                          </a:solidFill>
+                          <a:latin typeface="Tahoma" panose="020B0604030504040204" pitchFamily="34" charset="0"/>
+                          <a:ea typeface="Tahoma" panose="020B0604030504040204" pitchFamily="34" charset="0"/>
+                          <a:cs typeface="Tahoma" panose="020B0604030504040204" pitchFamily="34" charset="0"/>
+                        </a:rPr>
+                        <a:t>ทุกวันจันทร์และทุกวันพุธตรวจสอบ </a:t>
+                      </a:r>
+                      <a:r>
+                        <a:rPr lang="en-US" sz="1100" kern="1200" dirty="0">
+                          <a:solidFill>
+                            <a:schemeClr val="dk1"/>
+                          </a:solidFill>
+                          <a:latin typeface="Tahoma" panose="020B0604030504040204" pitchFamily="34" charset="0"/>
+                          <a:ea typeface="Tahoma" panose="020B0604030504040204" pitchFamily="34" charset="0"/>
+                          <a:cs typeface="Tahoma" panose="020B0604030504040204" pitchFamily="34" charset="0"/>
+                        </a:rPr>
+                        <a:t>POM </a:t>
+                      </a:r>
+                      <a:r>
+                        <a:rPr lang="th-TH" sz="1100" kern="1200" dirty="0">
+                          <a:solidFill>
+                            <a:schemeClr val="dk1"/>
+                          </a:solidFill>
+                          <a:latin typeface="Tahoma" panose="020B0604030504040204" pitchFamily="34" charset="0"/>
+                          <a:ea typeface="Tahoma" panose="020B0604030504040204" pitchFamily="34" charset="0"/>
+                          <a:cs typeface="Tahoma" panose="020B0604030504040204" pitchFamily="34" charset="0"/>
+                        </a:rPr>
+                        <a:t>อีกครั้ง</a:t>
+                      </a:r>
+                      <a:endParaRPr lang="en-US" sz="1100" kern="1200" dirty="0">
+                        <a:solidFill>
+                          <a:schemeClr val="dk1"/>
+                        </a:solidFill>
+                        <a:latin typeface="Tahoma" panose="020B0604030504040204" pitchFamily="34" charset="0"/>
+                        <a:ea typeface="Tahoma" panose="020B0604030504040204" pitchFamily="34" charset="0"/>
+                        <a:cs typeface="Tahoma" panose="020B0604030504040204" pitchFamily="34" charset="0"/>
+                      </a:endParaRPr>
+                    </a:p>
+                  </a:txBody>
+                  <a:tcPr/>
+                </a:tc>
+                <a:extLst>
+                  <a:ext uri="{0D108BD9-81ED-4DB2-BD59-A6C34878D82A}">
+                    <a16:rowId xmlns:a16="http://schemas.microsoft.com/office/drawing/2014/main" val="3017775110"/>
+                  </a:ext>
+                </a:extLst>
+              </a:tr>
+              <a:tr h="970218">
+                <a:tc>
+                  <a:txBody>
+                    <a:bodyPr/>
+                    <a:lstStyle/>
+                    <a:p>
+                      <a:pPr algn="ctr"/>
+                      <a:r>
+                        <a:rPr lang="en-US" sz="1100" kern="1200" dirty="0">
+                          <a:solidFill>
+                            <a:schemeClr val="dk1"/>
+                          </a:solidFill>
+                          <a:latin typeface="Tahoma" panose="020B0604030504040204" pitchFamily="34" charset="0"/>
+                          <a:ea typeface="Tahoma" panose="020B0604030504040204" pitchFamily="34" charset="0"/>
+                          <a:cs typeface="Tahoma" panose="020B0604030504040204" pitchFamily="34" charset="0"/>
+                        </a:rPr>
+                        <a:t>3</a:t>
+                      </a:r>
+                    </a:p>
+                  </a:txBody>
+                  <a:tcPr/>
+                </a:tc>
+                <a:tc>
+                  <a:txBody>
+                    <a:bodyPr/>
+                    <a:lstStyle/>
+                    <a:p>
+                      <a:r>
+                        <a:rPr lang="en-US" sz="1100" u="sng" kern="1200" dirty="0">
+                          <a:solidFill>
+                            <a:schemeClr val="dk1"/>
+                          </a:solidFill>
+                          <a:latin typeface="Tahoma" panose="020B0604030504040204" pitchFamily="34" charset="0"/>
+                          <a:ea typeface="Tahoma" panose="020B0604030504040204" pitchFamily="34" charset="0"/>
+                          <a:cs typeface="Tahoma" panose="020B0604030504040204" pitchFamily="34" charset="0"/>
                         </a:rPr>
                         <a:t>Dry Food</a:t>
                       </a:r>
                     </a:p>
-                  </a:txBody>
-                  <a:tcPr marL="40000" marR="40000" marT="25000" marB="25000" anchor="t">
-                    <a:noFill/>
-                    <a:lnL>
-                      <a:noFill/>
-                    </a:lnL>
-                    <a:lnR>
-                      <a:noFill/>
-                    </a:lnR>
-                    <a:lnT>
-                      <a:noFill/>
-                    </a:lnT>
-                    <a:lnB w="6350">
-                      <a:solidFill>
-                        <a:srgbClr val="E3EAEE"/>
-                      </a:solidFill>
-                    </a:lnB>
-                  </a:tcPr>
-                </a:tc>
-                <a:tc>
-                  <a:txBody>
-                    <a:bodyPr wrap="square"/>
-                    <a:lstStyle/>
-                    <a:p>
-                      <a:pPr algn="l"/>
-                      <a:r>
-                        <a:rPr sz="1050">
-                          <a:solidFill>
-                            <a:srgbClr val="263238"/>
-                          </a:solidFill>
-                          <a:latin typeface="Tahoma"/>
-                        </a:rPr>
-                        <a:t>DF ทั่วไป &gt;90 วัน: เหลือ 30 วัน 25% → 15 วัน 50% · DF Import +7 วัน 75%</a:t>
-                      </a:r>
-                    </a:p>
-                    <a:p>
-                      <a:pPr algn="l"/>
-                      <a:r>
-                        <a:rPr sz="1050">
-                          <a:solidFill>
-                            <a:srgbClr val="263238"/>
-                          </a:solidFill>
-                          <a:latin typeface="Tahoma"/>
-                        </a:rPr>
-                        <a:t>≤30 ชิ้น RTC ตาม step · &gt;30 ชิ้น ประสานจัดซื้อทำ Speed change (เริ่มก่อนหมดอายุ 60 วัน) · ข้าม step ต้องขอ DD</a:t>
-                      </a:r>
-                    </a:p>
-                  </a:txBody>
-                  <a:tcPr marL="40000" marR="40000" marT="25000" marB="25000" anchor="t">
-                    <a:noFill/>
-                    <a:lnL>
-                      <a:noFill/>
-                    </a:lnL>
-                    <a:lnR>
-                      <a:noFill/>
-                    </a:lnR>
-                    <a:lnT>
-                      <a:noFill/>
-                    </a:lnT>
-                    <a:lnB w="6350">
-                      <a:solidFill>
-                        <a:srgbClr val="E3EAEE"/>
-                      </a:solidFill>
-                    </a:lnB>
-                  </a:tcPr>
-                </a:tc>
-                <a:tc>
-                  <a:txBody>
-                    <a:bodyPr wrap="square"/>
-                    <a:lstStyle/>
-                    <a:p>
-                      <a:pPr algn="l"/>
-                      <a:r>
-                        <a:rPr sz="1050">
-                          <a:solidFill>
-                            <a:srgbClr val="263238"/>
-                          </a:solidFill>
-                          <a:latin typeface="Tahoma"/>
-                        </a:rPr>
-                        <a:t>Dry Food Damage Code 25 (หมดอายุ) -632,886 ฿ · RTC -276,404 ฿ (ปีก่อน -15,705)</a:t>
-                      </a:r>
-                    </a:p>
-                  </a:txBody>
-                  <a:tcPr marL="40000" marR="40000" marT="25000" marB="25000" anchor="t">
-                    <a:noFill/>
-                    <a:lnL>
-                      <a:noFill/>
-                    </a:lnL>
-                    <a:lnR>
-                      <a:noFill/>
-                    </a:lnR>
-                    <a:lnT>
-                      <a:noFill/>
-                    </a:lnT>
-                    <a:lnB w="6350">
-                      <a:solidFill>
-                        <a:srgbClr val="E3EAEE"/>
-                      </a:solidFill>
-                    </a:lnB>
-                  </a:tcPr>
-                </a:tc>
-                <a:tc>
-                  <a:txBody>
-                    <a:bodyPr wrap="square"/>
-                    <a:lstStyle/>
-                    <a:p>
-                      <a:pPr algn="l"/>
-                      <a:r>
-                        <a:rPr sz="1050">
-                          <a:solidFill>
-                            <a:srgbClr val="263238"/>
-                          </a:solidFill>
-                          <a:latin typeface="Tahoma"/>
-                        </a:rPr>
-                        <a:t>Damage สูง = สัญญาณ RTC ช้าเกินไป → ตรวจ Nearly Expire Report ทุกอังคาร (Action plan #1)</a:t>
-                      </a:r>
-                    </a:p>
-                  </a:txBody>
-                  <a:tcPr marL="40000" marR="40000" marT="25000" marB="25000" anchor="t">
-                    <a:noFill/>
-                    <a:lnL>
-                      <a:noFill/>
-                    </a:lnL>
-                    <a:lnR>
-                      <a:noFill/>
-                    </a:lnR>
-                    <a:lnT>
-                      <a:noFill/>
-                    </a:lnT>
-                    <a:lnB w="6350">
-                      <a:solidFill>
-                        <a:srgbClr val="E3EAEE"/>
-                      </a:solidFill>
-                    </a:lnB>
-                  </a:tcPr>
-                </a:tc>
-              </a:tr>
-              <a:tr h="700000">
-                <a:tc>
-                  <a:txBody>
-                    <a:bodyPr wrap="square"/>
-                    <a:lstStyle/>
-                    <a:p>
-                      <a:pPr algn="l"/>
-                      <a:r>
-                        <a:rPr sz="1050" b="1">
-                          <a:solidFill>
-                            <a:srgbClr val="263238"/>
-                          </a:solidFill>
-                          <a:latin typeface="Tahoma"/>
-                        </a:rPr>
-                        <a:t>RTC ใกล้หมดอายุ</a:t>
-                      </a:r>
-                    </a:p>
-                    <a:p>
-                      <a:pPr algn="l"/>
-                      <a:r>
-                        <a:rPr sz="1050" b="1">
-                          <a:solidFill>
-                            <a:srgbClr val="263238"/>
-                          </a:solidFill>
-                          <a:latin typeface="Tahoma"/>
-                        </a:rPr>
-                        <a:t>Fresh Food</a:t>
-                      </a:r>
-                    </a:p>
-                  </a:txBody>
-                  <a:tcPr marL="40000" marR="40000" marT="25000" marB="25000" anchor="t">
-                    <a:noFill/>
-                    <a:lnL>
-                      <a:noFill/>
-                    </a:lnL>
-                    <a:lnR>
-                      <a:noFill/>
-                    </a:lnR>
-                    <a:lnT>
-                      <a:noFill/>
-                    </a:lnT>
-                    <a:lnB w="6350">
-                      <a:solidFill>
-                        <a:srgbClr val="E3EAEE"/>
-                      </a:solidFill>
-                    </a:lnB>
-                  </a:tcPr>
-                </a:tc>
-                <a:tc>
-                  <a:txBody>
-                    <a:bodyPr wrap="square"/>
-                    <a:lstStyle/>
-                    <a:p>
-                      <a:pPr algn="l"/>
-                      <a:r>
-                        <a:rPr sz="1050">
-                          <a:solidFill>
-                            <a:srgbClr val="263238"/>
-                          </a:solidFill>
-                          <a:latin typeface="Tahoma"/>
-                        </a:rPr>
-                        <a:t>Butchery/Seafood (ชั่งแพ็คเอง) เริ่ม 09:00: 2 วัน 20% · 1 วัน 50% · Produce 2 วัน 20% / 1 วัน 30% (16:00 → 50%) · Delica 1 วัน 30%</a:t>
-                      </a:r>
-                    </a:p>
-                    <a:p>
-                      <a:pPr algn="l"/>
-                      <a:r>
-                        <a:rPr sz="1050">
-                          <a:solidFill>
-                            <a:srgbClr val="263238"/>
-                          </a:solidFill>
-                          <a:latin typeface="Tahoma"/>
-                        </a:rPr>
-                        <a:t>ผจก.สาขาเพิ่มได้ไม่เกิน 75% ใน 2 ชม.ก่อนปิด · ห้าม RTC แพ็คคู่ / เก็บสะสม</a:t>
-                      </a:r>
-                    </a:p>
-                  </a:txBody>
-                  <a:tcPr marL="40000" marR="40000" marT="25000" marB="25000" anchor="t">
-                    <a:noFill/>
-                    <a:lnL>
-                      <a:noFill/>
-                    </a:lnL>
-                    <a:lnR>
-                      <a:noFill/>
-                    </a:lnR>
-                    <a:lnT>
-                      <a:noFill/>
-                    </a:lnT>
-                    <a:lnB w="6350">
-                      <a:solidFill>
-                        <a:srgbClr val="E3EAEE"/>
-                      </a:solidFill>
-                    </a:lnB>
-                  </a:tcPr>
-                </a:tc>
-                <a:tc>
-                  <a:txBody>
-                    <a:bodyPr wrap="square"/>
-                    <a:lstStyle/>
-                    <a:p>
-                      <a:pPr algn="l"/>
-                      <a:r>
-                        <a:rPr sz="1050">
-                          <a:solidFill>
-                            <a:srgbClr val="263238"/>
-                          </a:solidFill>
-                          <a:latin typeface="Tahoma"/>
-                        </a:rPr>
-                        <a:t>FF RTC -1,141,562 ฿ (≈80% ของ RTC ทั้งสาขา) ปีก่อน -400,810</a:t>
-                      </a:r>
-                    </a:p>
-                    <a:p>
-                      <a:pPr algn="l"/>
-                      <a:r>
-                        <a:rPr sz="1050">
-                          <a:solidFill>
-                            <a:srgbClr val="263238"/>
-                          </a:solidFill>
-                          <a:latin typeface="Tahoma"/>
-                        </a:rPr>
-                        <a:t>FF Damage -1,536,759 ฿ (ปีก่อน -2,299,406)</a:t>
-                      </a:r>
-                    </a:p>
-                  </a:txBody>
-                  <a:tcPr marL="40000" marR="40000" marT="25000" marB="25000" anchor="t">
-                    <a:noFill/>
-                    <a:lnL>
-                      <a:noFill/>
-                    </a:lnL>
-                    <a:lnR>
-                      <a:noFill/>
-                    </a:lnR>
-                    <a:lnT>
-                      <a:noFill/>
-                    </a:lnT>
-                    <a:lnB w="6350">
-                      <a:solidFill>
-                        <a:srgbClr val="E3EAEE"/>
-                      </a:solidFill>
-                    </a:lnB>
-                  </a:tcPr>
-                </a:tc>
-                <a:tc>
-                  <a:txBody>
-                    <a:bodyPr wrap="square"/>
-                    <a:lstStyle/>
-                    <a:p>
-                      <a:pPr algn="l"/>
-                      <a:r>
-                        <a:rPr sz="1050">
-                          <a:solidFill>
-                            <a:srgbClr val="263238"/>
-                          </a:solidFill>
-                          <a:latin typeface="Tahoma"/>
-                        </a:rPr>
-                        <a:t>Damage ลด/RTC เพิ่ม = ลดราคาแทนทิ้ง · LP ต้องลงนาม Mark down Price Form คู่สติ๊กเกอร์ RTC ทุกครั้ง</a:t>
-                      </a:r>
-                    </a:p>
-                  </a:txBody>
-                  <a:tcPr marL="40000" marR="40000" marT="25000" marB="25000" anchor="t">
-                    <a:noFill/>
-                    <a:lnL>
-                      <a:noFill/>
-                    </a:lnL>
-                    <a:lnR>
-                      <a:noFill/>
-                    </a:lnR>
-                    <a:lnT>
-                      <a:noFill/>
-                    </a:lnT>
-                    <a:lnB w="6350">
-                      <a:solidFill>
-                        <a:srgbClr val="E3EAEE"/>
-                      </a:solidFill>
-                    </a:lnB>
-                  </a:tcPr>
-                </a:tc>
-              </a:tr>
-              <a:tr h="700000">
-                <a:tc>
-                  <a:txBody>
-                    <a:bodyPr wrap="square"/>
-                    <a:lstStyle/>
-                    <a:p>
-                      <a:pPr algn="l"/>
-                      <a:r>
-                        <a:rPr sz="1050" b="1">
-                          <a:solidFill>
-                            <a:srgbClr val="263238"/>
-                          </a:solidFill>
-                          <a:latin typeface="Tahoma"/>
-                        </a:rPr>
-                        <a:t>ทิ้งทำลาย / ตัดจ่าย Damage</a:t>
-                      </a:r>
-                    </a:p>
-                  </a:txBody>
-                  <a:tcPr marL="40000" marR="40000" marT="25000" marB="25000" anchor="t">
-                    <a:noFill/>
-                    <a:lnL>
-                      <a:noFill/>
-                    </a:lnL>
-                    <a:lnR>
-                      <a:noFill/>
-                    </a:lnR>
-                    <a:lnT>
-                      <a:noFill/>
-                    </a:lnT>
-                    <a:lnB w="6350">
-                      <a:solidFill>
-                        <a:srgbClr val="E3EAEE"/>
-                      </a:solidFill>
-                    </a:lnB>
-                  </a:tcPr>
-                </a:tc>
-                <a:tc>
-                  <a:txBody>
-                    <a:bodyPr wrap="square"/>
-                    <a:lstStyle/>
-                    <a:p>
-                      <a:pPr algn="l"/>
-                      <a:r>
-                        <a:rPr sz="1050">
-                          <a:solidFill>
-                            <a:srgbClr val="263238"/>
-                          </a:solidFill>
-                          <a:latin typeface="Tahoma"/>
-                        </a:rPr>
-                        <a:t>Code 21 ทุกแผนก · Code 25 หมดอายุ (Dry Food/Perishable) · ไม่แน่ใจว่าบริโภคปลอดภัย → ห้าม RTC ให้ทิ้ง Code 21 + แจ้งจัดซื้อ</a:t>
-                      </a:r>
-                    </a:p>
-                    <a:p>
-                      <a:pPr algn="l"/>
-                      <a:r>
-                        <a:rPr sz="1050">
-                          <a:solidFill>
-                            <a:srgbClr val="263238"/>
-                          </a:solidFill>
-                          <a:latin typeface="Tahoma"/>
-                        </a:rPr>
-                        <a:t>LP ประจำจุด GR ตรวจก่อนทำลาย · ทำลาย ≥500 ฿/item แจ้ง M1 (Action plan #1)</a:t>
-                      </a:r>
-                    </a:p>
-                  </a:txBody>
-                  <a:tcPr marL="40000" marR="40000" marT="25000" marB="25000" anchor="t">
-                    <a:noFill/>
-                    <a:lnL>
-                      <a:noFill/>
-                    </a:lnL>
-                    <a:lnR>
-                      <a:noFill/>
-                    </a:lnR>
-                    <a:lnT>
-                      <a:noFill/>
-                    </a:lnT>
-                    <a:lnB w="6350">
-                      <a:solidFill>
-                        <a:srgbClr val="E3EAEE"/>
-                      </a:solidFill>
-                    </a:lnB>
-                  </a:tcPr>
-                </a:tc>
-                <a:tc>
-                  <a:txBody>
-                    <a:bodyPr wrap="square"/>
-                    <a:lstStyle/>
-                    <a:p>
-                      <a:pPr algn="l"/>
-                      <a:r>
-                        <a:rPr sz="1050">
-                          <a:solidFill>
-                            <a:srgbClr val="263238"/>
-                          </a:solidFill>
-                          <a:latin typeface="Tahoma"/>
-                        </a:rPr>
-                        <a:t>ก.ย.: สินค้าที่ตัด Code 21/25 สะสมเดือน ≥500 ฿ มี 99 รายการ (Dry Food 30 · FF 69) = 106,495 ฿ ≈ 53% ของ Damage 21/25 เดือนนี้</a:t>
-                      </a:r>
-                    </a:p>
-                  </a:txBody>
-                  <a:tcPr marL="40000" marR="40000" marT="25000" marB="25000" anchor="t">
-                    <a:noFill/>
-                    <a:lnL>
-                      <a:noFill/>
-                    </a:lnL>
-                    <a:lnR>
-                      <a:noFill/>
-                    </a:lnR>
-                    <a:lnT>
-                      <a:noFill/>
-                    </a:lnT>
-                    <a:lnB w="6350">
-                      <a:solidFill>
-                        <a:srgbClr val="E3EAEE"/>
-                      </a:solidFill>
-                    </a:lnB>
-                  </a:tcPr>
-                </a:tc>
-                <a:tc>
-                  <a:txBody>
-                    <a:bodyPr wrap="square"/>
-                    <a:lstStyle/>
-                    <a:p>
-                      <a:pPr algn="l"/>
-                      <a:r>
-                        <a:rPr sz="1050">
-                          <a:solidFill>
-                            <a:srgbClr val="263238"/>
-                          </a:solidFill>
-                          <a:latin typeface="Tahoma"/>
-                        </a:rPr>
-                        <a:t>ใช้เป็นรายการให้ M1 ตรวจอนุมัติรายสัปดาห์ · Dry Food YTD ≥500 ฿: 296 รายการ 537,797 ฿</a:t>
-                      </a:r>
-                    </a:p>
-                  </a:txBody>
-                  <a:tcPr marL="40000" marR="40000" marT="25000" marB="25000" anchor="t">
-                    <a:noFill/>
-                    <a:lnL>
-                      <a:noFill/>
-                    </a:lnL>
-                    <a:lnR>
-                      <a:noFill/>
-                    </a:lnR>
-                    <a:lnT>
-                      <a:noFill/>
-                    </a:lnT>
-                    <a:lnB w="6350">
-                      <a:solidFill>
-                        <a:srgbClr val="E3EAEE"/>
-                      </a:solidFill>
-                    </a:lnB>
-                  </a:tcPr>
-                </a:tc>
+                    <a:p>
+                      <a:r>
+                        <a:rPr lang="en-US" sz="1100" u="sng" kern="1200" dirty="0">
+                          <a:solidFill>
+                            <a:schemeClr val="dk1"/>
+                          </a:solidFill>
+                          <a:latin typeface="Tahoma" panose="020B0604030504040204" pitchFamily="34" charset="0"/>
+                          <a:ea typeface="Tahoma" panose="020B0604030504040204" pitchFamily="34" charset="0"/>
+                          <a:cs typeface="Tahoma" panose="020B0604030504040204" pitchFamily="34" charset="0"/>
+                        </a:rPr>
+                        <a:t>Shrinkage</a:t>
+                      </a:r>
+                    </a:p>
+                    <a:p>
+                      <a:r>
+                        <a:rPr lang="en-US" sz="1100" u="none" kern="1200" dirty="0">
+                          <a:solidFill>
+                            <a:schemeClr val="dk1"/>
+                          </a:solidFill>
+                          <a:latin typeface="Tahoma" panose="020B0604030504040204" pitchFamily="34" charset="0"/>
+                          <a:ea typeface="Tahoma" panose="020B0604030504040204" pitchFamily="34" charset="0"/>
+                          <a:cs typeface="Tahoma" panose="020B0604030504040204" pitchFamily="34" charset="0"/>
+                        </a:rPr>
+                        <a:t>-</a:t>
+                      </a:r>
+                      <a:r>
+                        <a:rPr lang="th-TH" sz="1100" u="none" kern="1200" dirty="0">
+                          <a:solidFill>
+                            <a:schemeClr val="dk1"/>
+                          </a:solidFill>
+                          <a:latin typeface="Tahoma" panose="020B0604030504040204" pitchFamily="34" charset="0"/>
+                          <a:ea typeface="Tahoma" panose="020B0604030504040204" pitchFamily="34" charset="0"/>
+                          <a:cs typeface="Tahoma" panose="020B0604030504040204" pitchFamily="34" charset="0"/>
+                        </a:rPr>
+                        <a:t>-มีการปรับปรุง</a:t>
+                      </a:r>
+                      <a:r>
+                        <a:rPr lang="en-US" sz="1100" u="none" kern="1200" dirty="0">
+                          <a:solidFill>
+                            <a:schemeClr val="dk1"/>
+                          </a:solidFill>
+                          <a:latin typeface="Tahoma" panose="020B0604030504040204" pitchFamily="34" charset="0"/>
+                          <a:ea typeface="Tahoma" panose="020B0604030504040204" pitchFamily="34" charset="0"/>
+                          <a:cs typeface="Tahoma" panose="020B0604030504040204" pitchFamily="34" charset="0"/>
+                        </a:rPr>
+                        <a:t>negative stock</a:t>
+                      </a:r>
+                    </a:p>
+                    <a:p>
+                      <a:endParaRPr lang="th-TH" sz="1100" u="none" kern="1200" dirty="0">
+                        <a:solidFill>
+                          <a:schemeClr val="dk1"/>
+                        </a:solidFill>
+                        <a:latin typeface="Tahoma" panose="020B0604030504040204" pitchFamily="34" charset="0"/>
+                        <a:ea typeface="Tahoma" panose="020B0604030504040204" pitchFamily="34" charset="0"/>
+                        <a:cs typeface="Tahoma" panose="020B0604030504040204" pitchFamily="34" charset="0"/>
+                      </a:endParaRPr>
+                    </a:p>
+                  </a:txBody>
+                  <a:tcPr/>
+                </a:tc>
+                <a:tc>
+                  <a:txBody>
+                    <a:bodyPr/>
+                    <a:lstStyle/>
+                    <a:p>
+                      <a:pPr marL="228600" indent="-228600">
+                        <a:buAutoNum type="arabicPeriod"/>
+                      </a:pPr>
+                      <a:r>
+                        <a:rPr lang="en-US" sz="1100" kern="1200" dirty="0">
+                          <a:solidFill>
+                            <a:schemeClr val="dk1"/>
+                          </a:solidFill>
+                          <a:latin typeface="Tahoma" panose="020B0604030504040204" pitchFamily="34" charset="0"/>
+                          <a:ea typeface="Tahoma" panose="020B0604030504040204" pitchFamily="34" charset="0"/>
+                          <a:cs typeface="Tahoma" panose="020B0604030504040204" pitchFamily="34" charset="0"/>
+                        </a:rPr>
+                        <a:t>LP,GR </a:t>
+                      </a:r>
+                      <a:r>
+                        <a:rPr lang="th-TH" sz="1100" kern="1200" dirty="0">
+                          <a:solidFill>
+                            <a:schemeClr val="dk1"/>
+                          </a:solidFill>
+                          <a:latin typeface="Tahoma" panose="020B0604030504040204" pitchFamily="34" charset="0"/>
+                          <a:ea typeface="Tahoma" panose="020B0604030504040204" pitchFamily="34" charset="0"/>
+                          <a:cs typeface="Tahoma" panose="020B0604030504040204" pitchFamily="34" charset="0"/>
+                        </a:rPr>
+                        <a:t>และแผนกทำการตรวจสอบสินค้าที่รับจากดีซีทุกครั้งและติดตามกรณีพบสินค้าขาดส่ง</a:t>
+                      </a:r>
+                    </a:p>
+                    <a:p>
+                      <a:pPr marL="228600" indent="-228600">
+                        <a:buAutoNum type="arabicPeriod"/>
+                      </a:pPr>
+                      <a:r>
+                        <a:rPr lang="en-US" sz="1100" kern="1200" dirty="0">
+                          <a:solidFill>
+                            <a:schemeClr val="dk1"/>
+                          </a:solidFill>
+                          <a:latin typeface="Tahoma" panose="020B0604030504040204" pitchFamily="34" charset="0"/>
+                          <a:ea typeface="Tahoma" panose="020B0604030504040204" pitchFamily="34" charset="0"/>
+                          <a:cs typeface="Tahoma" panose="020B0604030504040204" pitchFamily="34" charset="0"/>
+                        </a:rPr>
+                        <a:t>Stockroom </a:t>
+                      </a:r>
+                      <a:r>
+                        <a:rPr lang="th-TH" sz="1100" kern="1200" dirty="0">
+                          <a:solidFill>
+                            <a:schemeClr val="dk1"/>
+                          </a:solidFill>
+                          <a:latin typeface="Tahoma" panose="020B0604030504040204" pitchFamily="34" charset="0"/>
+                          <a:ea typeface="Tahoma" panose="020B0604030504040204" pitchFamily="34" charset="0"/>
+                          <a:cs typeface="Tahoma" panose="020B0604030504040204" pitchFamily="34" charset="0"/>
+                        </a:rPr>
+                        <a:t>ต้องได้ตาม </a:t>
+                      </a:r>
+                      <a:r>
+                        <a:rPr lang="en-US" sz="1100" kern="1200" dirty="0">
+                          <a:solidFill>
+                            <a:schemeClr val="dk1"/>
+                          </a:solidFill>
+                          <a:latin typeface="Tahoma" panose="020B0604030504040204" pitchFamily="34" charset="0"/>
+                          <a:ea typeface="Tahoma" panose="020B0604030504040204" pitchFamily="34" charset="0"/>
+                          <a:cs typeface="Tahoma" panose="020B0604030504040204" pitchFamily="34" charset="0"/>
+                        </a:rPr>
+                        <a:t>Standard </a:t>
+                      </a:r>
+                      <a:r>
+                        <a:rPr lang="th-TH" sz="1100" kern="1200" dirty="0">
+                          <a:solidFill>
+                            <a:schemeClr val="dk1"/>
+                          </a:solidFill>
+                          <a:latin typeface="Tahoma" panose="020B0604030504040204" pitchFamily="34" charset="0"/>
+                          <a:ea typeface="Tahoma" panose="020B0604030504040204" pitchFamily="34" charset="0"/>
+                          <a:cs typeface="Tahoma" panose="020B0604030504040204" pitchFamily="34" charset="0"/>
+                        </a:rPr>
+                        <a:t>ทุกวัน เพื่อตรวจสอบได้ง่าย</a:t>
+                      </a:r>
+                    </a:p>
+                  </a:txBody>
+                  <a:tcPr/>
+                </a:tc>
+                <a:tc>
+                  <a:txBody>
+                    <a:bodyPr/>
+                    <a:lstStyle/>
+                    <a:p>
+                      <a:pPr marL="0" marR="0" lvl="0" indent="0" algn="l" defTabSz="761970" rtl="0" eaLnBrk="1" fontAlgn="auto" latinLnBrk="0" hangingPunct="1">
+                        <a:lnSpc>
+                          <a:spcPct val="100000"/>
+                        </a:lnSpc>
+                        <a:spcBef>
+                          <a:spcPts val="0"/>
+                        </a:spcBef>
+                        <a:spcAft>
+                          <a:spcPts val="0"/>
+                        </a:spcAft>
+                        <a:buClrTx/>
+                        <a:buSzTx/>
+                        <a:buFontTx/>
+                        <a:buNone/>
+                        <a:tabLst/>
+                        <a:defRPr/>
+                      </a:pPr>
+                      <a:r>
+                        <a:rPr lang="en-US" sz="1100" kern="1200" dirty="0">
+                          <a:solidFill>
+                            <a:schemeClr val="tx1"/>
+                          </a:solidFill>
+                          <a:latin typeface="Tahoma" panose="020B0604030504040204" pitchFamily="34" charset="0"/>
+                          <a:ea typeface="Tahoma" panose="020B0604030504040204" pitchFamily="34" charset="0"/>
+                          <a:cs typeface="Tahoma" panose="020B0604030504040204" pitchFamily="34" charset="0"/>
+                        </a:rPr>
+                        <a:t>M1 ,M.Opt,C3,C9,LP</a:t>
+                      </a:r>
+                      <a:endParaRPr lang="th-TH" sz="1100" kern="1200" dirty="0">
+                        <a:solidFill>
+                          <a:schemeClr val="tx1"/>
+                        </a:solidFill>
+                        <a:latin typeface="Tahoma" panose="020B0604030504040204" pitchFamily="34" charset="0"/>
+                        <a:ea typeface="Tahoma" panose="020B0604030504040204" pitchFamily="34" charset="0"/>
+                        <a:cs typeface="Tahoma" panose="020B0604030504040204" pitchFamily="34" charset="0"/>
+                      </a:endParaRPr>
+                    </a:p>
+                  </a:txBody>
+                  <a:tcPr/>
+                </a:tc>
+                <a:tc>
+                  <a:txBody>
+                    <a:bodyPr/>
+                    <a:lstStyle/>
+                    <a:p>
+                      <a:r>
+                        <a:rPr lang="en-US" sz="1100" dirty="0">
+                          <a:latin typeface="Tahoma" panose="020B0604030504040204" pitchFamily="34" charset="0"/>
+                          <a:ea typeface="Tahoma" panose="020B0604030504040204" pitchFamily="34" charset="0"/>
+                          <a:cs typeface="Tahoma" panose="020B0604030504040204" pitchFamily="34" charset="0"/>
+                        </a:rPr>
+                        <a:t>Jan – Dec 2026</a:t>
+                      </a:r>
+                    </a:p>
+                  </a:txBody>
+                  <a:tcPr/>
+                </a:tc>
+                <a:tc>
+                  <a:txBody>
+                    <a:bodyPr/>
+                    <a:lstStyle/>
+                    <a:p>
+                      <a:r>
+                        <a:rPr lang="th-TH" sz="1100" kern="1200" dirty="0">
+                          <a:solidFill>
+                            <a:schemeClr val="dk1"/>
+                          </a:solidFill>
+                          <a:latin typeface="Tahoma" panose="020B0604030504040204" pitchFamily="34" charset="0"/>
+                          <a:ea typeface="Tahoma" panose="020B0604030504040204" pitchFamily="34" charset="0"/>
+                          <a:cs typeface="Tahoma" panose="020B0604030504040204" pitchFamily="34" charset="0"/>
+                        </a:rPr>
+                        <a:t>1.</a:t>
+                      </a:r>
+                      <a:r>
+                        <a:rPr lang="en-US" sz="1100" kern="1200" dirty="0">
+                          <a:solidFill>
+                            <a:schemeClr val="dk1"/>
+                          </a:solidFill>
+                          <a:latin typeface="Tahoma" panose="020B0604030504040204" pitchFamily="34" charset="0"/>
+                          <a:ea typeface="Tahoma" panose="020B0604030504040204" pitchFamily="34" charset="0"/>
+                          <a:cs typeface="Tahoma" panose="020B0604030504040204" pitchFamily="34" charset="0"/>
+                        </a:rPr>
+                        <a:t>LP </a:t>
+                      </a:r>
+                      <a:r>
+                        <a:rPr lang="th-TH" sz="1100" kern="1200" dirty="0">
+                          <a:solidFill>
+                            <a:schemeClr val="dk1"/>
+                          </a:solidFill>
+                          <a:latin typeface="Tahoma" panose="020B0604030504040204" pitchFamily="34" charset="0"/>
+                          <a:ea typeface="Tahoma" panose="020B0604030504040204" pitchFamily="34" charset="0"/>
+                          <a:cs typeface="Tahoma" panose="020B0604030504040204" pitchFamily="34" charset="0"/>
+                        </a:rPr>
+                        <a:t>สุ่มตรวจสอบสินค้าที่มาจากดีซีว่าเข้าครบหรือไม่</a:t>
+                      </a:r>
+                    </a:p>
+                  </a:txBody>
+                  <a:tcPr/>
+                </a:tc>
+                <a:extLst>
+                  <a:ext uri="{0D108BD9-81ED-4DB2-BD59-A6C34878D82A}">
+                    <a16:rowId xmlns:a16="http://schemas.microsoft.com/office/drawing/2014/main" val="835018440"/>
+                  </a:ext>
+                </a:extLst>
               </a:tr>
             </a:tbl>
           </a:graphicData>
         </a:graphic>
       </p:graphicFrame>
-      <p:sp>
-        <p:nvSpPr>
-          <p:cNvPr id="5" name="TextBox 4"/>
-          <p:cNvSpPr txBox="1"/>
-          <p:nvPr/>
-        </p:nvSpPr>
-        <p:spPr>
-          <a:xfrm>
-            <a:off x="330000" y="6500000"/>
-            <a:ext cx="11500000" cy="300000"/>
-          </a:xfrm>
-          <a:prstGeom prst="rect">
-            <a:avLst/>
-          </a:prstGeom>
-          <a:noFill/>
-        </p:spPr>
-        <p:txBody>
-          <a:bodyPr wrap="square">
-            <a:spAutoFit/>
-          </a:bodyPr>
-          <a:lstStyle/>
-          <a:p>
-            <a:r>
-              <a:rPr sz="800" b="0">
-                <a:solidFill>
-                  <a:srgbClr val="90A4AE"/>
-                </a:solidFill>
-                <a:latin typeface="Tahoma"/>
-              </a:rPr>
-              <a:t>ที่มา: คลังความรู้ SOP งาน LP Big C Hyper ไทรน้อย (RTC/Speed change 2026, Adjust Code, ประกาศบริษัท) + Action plan ในไฟล์นี้ · ใช้ภายในบริษัท</a:t>
-            </a:r>
-          </a:p>
-        </p:txBody>
-      </p:sp>
     </p:spTree>
+    <p:extLst>
+      <p:ext uri="{BB962C8B-B14F-4D97-AF65-F5344CB8AC3E}">
+        <p14:creationId xmlns:p14="http://schemas.microsoft.com/office/powerpoint/2010/main" val="3629752081"/>
+      </p:ext>
+    </p:extLst>
   </p:cSld>
   <p:clrMapOvr>
     <a:masterClrMapping/>
@@ -31953,51 +30138,34 @@
 </file>
 
 <file path=ppt/slides/slide9.xml><?xml version="1.0" encoding="utf-8"?>
-<p:sld xmlns:a="http://schemas.openxmlformats.org/drawingml/2006/main" xmlns:p="http://schemas.openxmlformats.org/presentationml/2006/main" xmlns:r="http://schemas.openxmlformats.org/officeDocument/2006/relationships">
+<p:sld xmlns:a="http://schemas.openxmlformats.org/drawingml/2006/main" xmlns:r="http://schemas.openxmlformats.org/officeDocument/2006/relationships" xmlns:p="http://schemas.openxmlformats.org/presentationml/2006/main">
   <p:cSld>
     <p:spTree>
       <p:nvGrpSpPr>
-        <p:cNvPr id="1" name=""/>
+        <p:cNvPr id="1" name="">
+          <a:extLst>
+            <a:ext uri="{FF2B5EF4-FFF2-40B4-BE49-F238E27FC236}">
+              <a16:creationId xmlns:a16="http://schemas.microsoft.com/office/drawing/2014/main" id="{B36229DE-A439-D108-AB05-F58B1EDE7F9A}"/>
+            </a:ext>
+          </a:extLst>
+        </p:cNvPr>
         <p:cNvGrpSpPr/>
         <p:nvPr/>
       </p:nvGrpSpPr>
-      <p:grpSpPr/>
-      <p:pic>
-        <p:nvPicPr>
-          <p:cNvPr id="3" name="Picture 2">
-            <a:extLst>
-              <a:ext uri="{FF2B5EF4-FFF2-40B4-BE49-F238E27FC236}">
-                <a16:creationId xmlns:a16="http://schemas.microsoft.com/office/drawing/2014/main" id="{573C4005-4311-47D1-B6B5-4EEE5D4D8A65}"/>
-              </a:ext>
-            </a:extLst>
-          </p:cNvPr>
-          <p:cNvPicPr>
-            <a:picLocks noChangeAspect="1"/>
-          </p:cNvPicPr>
-          <p:nvPr/>
-        </p:nvPicPr>
-        <p:blipFill>
-          <a:blip r:embed="rId2"/>
-          <a:stretch>
-            <a:fillRect/>
-          </a:stretch>
-        </p:blipFill>
-        <p:spPr>
-          <a:xfrm>
-            <a:off x="3596610" y="-68061"/>
-            <a:ext cx="8595390" cy="938759"/>
-          </a:xfrm>
-          <a:prstGeom prst="rect">
-            <a:avLst/>
-          </a:prstGeom>
-        </p:spPr>
-      </p:pic>
+      <p:grpSpPr>
+        <a:xfrm>
+          <a:off x="0" y="0"/>
+          <a:ext cx="0" cy="0"/>
+          <a:chOff x="0" y="0"/>
+          <a:chExt cx="0" cy="0"/>
+        </a:xfrm>
+      </p:grpSpPr>
       <p:sp>
         <p:nvSpPr>
           <p:cNvPr id="2" name="Text Placeholder 1">
             <a:extLst>
               <a:ext uri="{FF2B5EF4-FFF2-40B4-BE49-F238E27FC236}">
-                <a16:creationId xmlns:a16="http://schemas.microsoft.com/office/drawing/2014/main" id="{D11CEF0C-15B0-38F8-0EDE-2CF3585B45B5}"/>
+                <a16:creationId xmlns:a16="http://schemas.microsoft.com/office/drawing/2014/main" id="{D279D278-012B-152D-3870-B77B33997103}"/>
               </a:ext>
             </a:extLst>
           </p:cNvPr>
@@ -32008,994 +30176,840 @@
             <p:ph type="body" sz="quarter" idx="13"/>
           </p:nvPr>
         </p:nvSpPr>
-        <p:spPr>
-          <a:xfrm>
-            <a:off x="6363927" y="-36818"/>
-            <a:ext cx="4129549" cy="814486"/>
-          </a:xfrm>
-        </p:spPr>
+        <p:spPr/>
         <p:txBody>
           <a:bodyPr>
-            <a:normAutofit fontScale="92500" lnSpcReduction="10000"/>
+            <a:normAutofit/>
           </a:bodyPr>
           <a:lstStyle/>
           <a:p>
             <a:r>
-              <a:rPr lang="en-US" sz="5400" dirty="0">
-                <a:solidFill>
-                  <a:schemeClr val="bg1"/>
-                </a:solidFill>
-                <a:latin typeface="BrowalliaUPC" panose="020B0604020202020204" pitchFamily="34" charset="-34"/>
-                <a:cs typeface="BrowalliaUPC" panose="020B0604020202020204" pitchFamily="34" charset="-34"/>
+              <a:rPr lang="en-US" sz="2400" dirty="0">
+                <a:latin typeface="Tahoma" panose="020B0604030504040204" pitchFamily="34" charset="0"/>
+                <a:ea typeface="Tahoma" panose="020B0604030504040204" pitchFamily="34" charset="0"/>
+                <a:cs typeface="Tahoma" panose="020B0604030504040204" pitchFamily="34" charset="0"/>
               </a:rPr>
-              <a:t>Target SOP (2/2) Shrinkage</a:t>
+              <a:t>Action plan  </a:t>
             </a:r>
+          </a:p>
+          <a:p>
+            <a:endParaRPr lang="en-US" sz="2400" dirty="0">
+              <a:latin typeface="Tahoma" panose="020B0604030504040204" pitchFamily="34" charset="0"/>
+              <a:ea typeface="Tahoma" panose="020B0604030504040204" pitchFamily="34" charset="0"/>
+              <a:cs typeface="Tahoma" panose="020B0604030504040204" pitchFamily="34" charset="0"/>
+            </a:endParaRPr>
+          </a:p>
+          <a:p>
+            <a:endParaRPr lang="en-US" dirty="0"/>
           </a:p>
         </p:txBody>
       </p:sp>
       <p:graphicFrame>
         <p:nvGraphicFramePr>
-          <p:cNvPr id="4" name="Table 3"/>
+          <p:cNvPr id="3" name="Table 5">
+            <a:extLst>
+              <a:ext uri="{FF2B5EF4-FFF2-40B4-BE49-F238E27FC236}">
+                <a16:creationId xmlns:a16="http://schemas.microsoft.com/office/drawing/2014/main" id="{9F2D99E8-4FBF-E4C6-111F-F2DEAAEDC37F}"/>
+              </a:ext>
+            </a:extLst>
+          </p:cNvPr>
           <p:cNvGraphicFramePr>
             <a:graphicFrameLocks noGrp="1"/>
           </p:cNvGraphicFramePr>
-          <p:nvPr/>
+          <p:nvPr>
+            <p:extLst>
+              <p:ext uri="{D42A27DB-BD31-4B8C-83A1-F6EECF244321}">
+                <p14:modId xmlns:p14="http://schemas.microsoft.com/office/powerpoint/2010/main" val="1923572504"/>
+              </p:ext>
+            </p:extLst>
+          </p:nvPr>
         </p:nvGraphicFramePr>
         <p:xfrm>
-          <a:off x="330000" y="1000000"/>
-          <a:ext cx="11500000" cy="3800000"/>
+          <a:off x="394252" y="837330"/>
+          <a:ext cx="11424497" cy="2453219"/>
         </p:xfrm>
         <a:graphic>
           <a:graphicData uri="http://schemas.openxmlformats.org/drawingml/2006/table">
             <a:tbl>
-              <a:tblPr>
-                <a:tableStyleId>{2D5ABB26-0587-4C30-8999-92F81FD0307C}</a:tableStyleId>
+              <a:tblPr firstRow="1" bandRow="1">
+                <a:tableStyleId>{F5AB1C69-6EDB-4FF4-983F-18BD219EF322}</a:tableStyleId>
               </a:tblPr>
               <a:tblGrid>
-                <a:gridCol w="1550000"/>
-                <a:gridCol w="3900000"/>
-                <a:gridCol w="3250000"/>
-                <a:gridCol w="2800000"/>
+                <a:gridCol w="580906">
+                  <a:extLst>
+                    <a:ext uri="{9D8B030D-6E8A-4147-A177-3AD203B41FA5}">
+                      <a16:colId xmlns:a16="http://schemas.microsoft.com/office/drawing/2014/main" val="50567754"/>
+                    </a:ext>
+                  </a:extLst>
+                </a:gridCol>
+                <a:gridCol w="2647936">
+                  <a:extLst>
+                    <a:ext uri="{9D8B030D-6E8A-4147-A177-3AD203B41FA5}">
+                      <a16:colId xmlns:a16="http://schemas.microsoft.com/office/drawing/2014/main" val="2465639924"/>
+                    </a:ext>
+                  </a:extLst>
+                </a:gridCol>
+                <a:gridCol w="3519578">
+                  <a:extLst>
+                    <a:ext uri="{9D8B030D-6E8A-4147-A177-3AD203B41FA5}">
+                      <a16:colId xmlns:a16="http://schemas.microsoft.com/office/drawing/2014/main" val="1011173274"/>
+                    </a:ext>
+                  </a:extLst>
+                </a:gridCol>
+                <a:gridCol w="1992702">
+                  <a:extLst>
+                    <a:ext uri="{9D8B030D-6E8A-4147-A177-3AD203B41FA5}">
+                      <a16:colId xmlns:a16="http://schemas.microsoft.com/office/drawing/2014/main" val="3843171633"/>
+                    </a:ext>
+                  </a:extLst>
+                </a:gridCol>
+                <a:gridCol w="1212275">
+                  <a:extLst>
+                    <a:ext uri="{9D8B030D-6E8A-4147-A177-3AD203B41FA5}">
+                      <a16:colId xmlns:a16="http://schemas.microsoft.com/office/drawing/2014/main" val="1439720936"/>
+                    </a:ext>
+                  </a:extLst>
+                </a:gridCol>
+                <a:gridCol w="1471100">
+                  <a:extLst>
+                    <a:ext uri="{9D8B030D-6E8A-4147-A177-3AD203B41FA5}">
+                      <a16:colId xmlns:a16="http://schemas.microsoft.com/office/drawing/2014/main" val="3308817400"/>
+                    </a:ext>
+                  </a:extLst>
+                </a:gridCol>
               </a:tblGrid>
-              <a:tr h="300000">
-                <a:tc>
-                  <a:txBody>
-                    <a:bodyPr wrap="square"/>
-                    <a:lstStyle/>
-                    <a:p>
-                      <a:pPr algn="l"/>
-                      <a:r>
-                        <a:rPr sz="1000" b="1">
-                          <a:solidFill>
-                            <a:srgbClr val="90A4AE"/>
-                          </a:solidFill>
-                          <a:latin typeface="Tahoma"/>
-                        </a:rPr>
-                        <a:t>หัวข้อ</a:t>
-                      </a:r>
-                    </a:p>
-                  </a:txBody>
-                  <a:tcPr marL="40000" marR="40000" marT="25000" marB="25000" anchor="t">
-                    <a:noFill/>
-                    <a:lnL>
-                      <a:noFill/>
-                    </a:lnL>
-                    <a:lnR>
-                      <a:noFill/>
-                    </a:lnR>
-                    <a:lnT>
-                      <a:noFill/>
-                    </a:lnT>
-                    <a:lnB w="6350">
-                      <a:solidFill>
-                        <a:srgbClr val="E3EAEE"/>
-                      </a:solidFill>
-                    </a:lnB>
-                  </a:tcPr>
-                </a:tc>
-                <a:tc>
-                  <a:txBody>
-                    <a:bodyPr wrap="square"/>
-                    <a:lstStyle/>
-                    <a:p>
-                      <a:pPr algn="l"/>
-                      <a:r>
-                        <a:rPr sz="1000" b="1">
-                          <a:solidFill>
-                            <a:srgbClr val="90A4AE"/>
-                          </a:solidFill>
-                          <a:latin typeface="Tahoma"/>
-                        </a:rPr>
-                        <a:t>เกณฑ์ / Target ตาม SOP (LP)</a:t>
-                      </a:r>
-                    </a:p>
-                  </a:txBody>
-                  <a:tcPr marL="40000" marR="40000" marT="25000" marB="25000" anchor="t">
-                    <a:noFill/>
-                    <a:lnL>
-                      <a:noFill/>
-                    </a:lnL>
-                    <a:lnR>
-                      <a:noFill/>
-                    </a:lnR>
-                    <a:lnT>
-                      <a:noFill/>
-                    </a:lnT>
-                    <a:lnB w="6350">
-                      <a:solidFill>
-                        <a:srgbClr val="E3EAEE"/>
-                      </a:solidFill>
-                    </a:lnB>
-                  </a:tcPr>
-                </a:tc>
-                <a:tc>
-                  <a:txBody>
-                    <a:bodyPr wrap="square"/>
-                    <a:lstStyle/>
-                    <a:p>
-                      <a:pPr algn="l"/>
-                      <a:r>
-                        <a:rPr sz="1000" b="1">
-                          <a:solidFill>
-                            <a:srgbClr val="90A4AE"/>
-                          </a:solidFill>
-                          <a:latin typeface="Tahoma"/>
-                        </a:rPr>
-                        <a:t>ผลจริงจากข้อมูล Loss (ม.ค.–ก.ย. 2026)</a:t>
-                      </a:r>
-                    </a:p>
-                  </a:txBody>
-                  <a:tcPr marL="40000" marR="40000" marT="25000" marB="25000" anchor="t">
-                    <a:noFill/>
-                    <a:lnL>
-                      <a:noFill/>
-                    </a:lnL>
-                    <a:lnR>
-                      <a:noFill/>
-                    </a:lnR>
-                    <a:lnT>
-                      <a:noFill/>
-                    </a:lnT>
-                    <a:lnB w="6350">
-                      <a:solidFill>
-                        <a:srgbClr val="E3EAEE"/>
-                      </a:solidFill>
-                    </a:lnB>
-                  </a:tcPr>
-                </a:tc>
-                <a:tc>
-                  <a:txBody>
-                    <a:bodyPr wrap="square"/>
-                    <a:lstStyle/>
-                    <a:p>
-                      <a:pPr algn="l"/>
-                      <a:r>
-                        <a:rPr sz="1000" b="1">
-                          <a:solidFill>
-                            <a:srgbClr val="90A4AE"/>
-                          </a:solidFill>
-                          <a:latin typeface="Tahoma"/>
-                        </a:rPr>
-                        <a:t>ข้อสังเกต / สิ่งที่ต้องทำ</a:t>
-                      </a:r>
-                    </a:p>
-                  </a:txBody>
-                  <a:tcPr marL="40000" marR="40000" marT="25000" marB="25000" anchor="t">
-                    <a:noFill/>
-                    <a:lnL>
-                      <a:noFill/>
-                    </a:lnL>
-                    <a:lnR>
-                      <a:noFill/>
-                    </a:lnR>
-                    <a:lnT>
-                      <a:noFill/>
-                    </a:lnT>
-                    <a:lnB w="6350">
-                      <a:solidFill>
-                        <a:srgbClr val="E3EAEE"/>
-                      </a:solidFill>
-                    </a:lnB>
-                  </a:tcPr>
-                </a:tc>
+              <a:tr h="455744">
+                <a:tc>
+                  <a:txBody>
+                    <a:bodyPr/>
+                    <a:lstStyle/>
+                    <a:p>
+                      <a:pPr algn="ctr"/>
+                      <a:r>
+                        <a:rPr lang="en-US" sz="1400" dirty="0">
+                          <a:solidFill>
+                            <a:schemeClr val="tx1"/>
+                          </a:solidFill>
+                          <a:latin typeface="Tahoma" panose="020B0604030504040204" pitchFamily="34" charset="0"/>
+                          <a:ea typeface="Tahoma" panose="020B0604030504040204" pitchFamily="34" charset="0"/>
+                          <a:cs typeface="Tahoma" panose="020B0604030504040204" pitchFamily="34" charset="0"/>
+                        </a:rPr>
+                        <a:t>No.</a:t>
+                      </a:r>
+                    </a:p>
+                  </a:txBody>
+                  <a:tcPr anchor="ctr"/>
+                </a:tc>
+                <a:tc>
+                  <a:txBody>
+                    <a:bodyPr/>
+                    <a:lstStyle/>
+                    <a:p>
+                      <a:pPr algn="ctr"/>
+                      <a:r>
+                        <a:rPr lang="en-US" sz="1400" dirty="0">
+                          <a:solidFill>
+                            <a:schemeClr val="tx1"/>
+                          </a:solidFill>
+                          <a:latin typeface="Tahoma" panose="020B0604030504040204" pitchFamily="34" charset="0"/>
+                          <a:ea typeface="Tahoma" panose="020B0604030504040204" pitchFamily="34" charset="0"/>
+                          <a:cs typeface="Tahoma" panose="020B0604030504040204" pitchFamily="34" charset="0"/>
+                        </a:rPr>
+                        <a:t>Root cause</a:t>
+                      </a:r>
+                    </a:p>
+                  </a:txBody>
+                  <a:tcPr anchor="ctr"/>
+                </a:tc>
+                <a:tc>
+                  <a:txBody>
+                    <a:bodyPr/>
+                    <a:lstStyle/>
+                    <a:p>
+                      <a:pPr algn="ctr"/>
+                      <a:r>
+                        <a:rPr lang="en-US" sz="1400" dirty="0">
+                          <a:solidFill>
+                            <a:schemeClr val="tx1"/>
+                          </a:solidFill>
+                          <a:latin typeface="Tahoma" panose="020B0604030504040204" pitchFamily="34" charset="0"/>
+                          <a:ea typeface="Tahoma" panose="020B0604030504040204" pitchFamily="34" charset="0"/>
+                          <a:cs typeface="Tahoma" panose="020B0604030504040204" pitchFamily="34" charset="0"/>
+                        </a:rPr>
+                        <a:t>Action</a:t>
+                      </a:r>
+                    </a:p>
+                  </a:txBody>
+                  <a:tcPr anchor="ctr"/>
+                </a:tc>
+                <a:tc>
+                  <a:txBody>
+                    <a:bodyPr/>
+                    <a:lstStyle/>
+                    <a:p>
+                      <a:pPr algn="ctr"/>
+                      <a:r>
+                        <a:rPr lang="en-US" sz="1400" dirty="0">
+                          <a:solidFill>
+                            <a:schemeClr val="tx1"/>
+                          </a:solidFill>
+                          <a:latin typeface="Tahoma" panose="020B0604030504040204" pitchFamily="34" charset="0"/>
+                          <a:ea typeface="Tahoma" panose="020B0604030504040204" pitchFamily="34" charset="0"/>
+                          <a:cs typeface="Tahoma" panose="020B0604030504040204" pitchFamily="34" charset="0"/>
+                        </a:rPr>
+                        <a:t>Who</a:t>
+                      </a:r>
+                    </a:p>
+                  </a:txBody>
+                  <a:tcPr anchor="ctr"/>
+                </a:tc>
+                <a:tc>
+                  <a:txBody>
+                    <a:bodyPr/>
+                    <a:lstStyle/>
+                    <a:p>
+                      <a:pPr algn="ctr"/>
+                      <a:r>
+                        <a:rPr lang="en-US" sz="1400" dirty="0">
+                          <a:solidFill>
+                            <a:schemeClr val="tx1"/>
+                          </a:solidFill>
+                          <a:latin typeface="Tahoma" panose="020B0604030504040204" pitchFamily="34" charset="0"/>
+                          <a:ea typeface="Tahoma" panose="020B0604030504040204" pitchFamily="34" charset="0"/>
+                          <a:cs typeface="Tahoma" panose="020B0604030504040204" pitchFamily="34" charset="0"/>
+                        </a:rPr>
+                        <a:t>When</a:t>
+                      </a:r>
+                    </a:p>
+                  </a:txBody>
+                  <a:tcPr anchor="ctr"/>
+                </a:tc>
+                <a:tc>
+                  <a:txBody>
+                    <a:bodyPr/>
+                    <a:lstStyle/>
+                    <a:p>
+                      <a:pPr algn="ctr"/>
+                      <a:r>
+                        <a:rPr lang="en-US" sz="1400" dirty="0">
+                          <a:solidFill>
+                            <a:schemeClr val="tx1"/>
+                          </a:solidFill>
+                          <a:latin typeface="Tahoma" panose="020B0604030504040204" pitchFamily="34" charset="0"/>
+                          <a:ea typeface="Tahoma" panose="020B0604030504040204" pitchFamily="34" charset="0"/>
+                          <a:cs typeface="Tahoma" panose="020B0604030504040204" pitchFamily="34" charset="0"/>
+                        </a:rPr>
+                        <a:t>Monitoring</a:t>
+                      </a:r>
+                    </a:p>
+                  </a:txBody>
+                  <a:tcPr anchor="ctr"/>
+                </a:tc>
+                <a:extLst>
+                  <a:ext uri="{0D108BD9-81ED-4DB2-BD59-A6C34878D82A}">
+                    <a16:rowId xmlns:a16="http://schemas.microsoft.com/office/drawing/2014/main" val="2309402925"/>
+                  </a:ext>
+                </a:extLst>
               </a:tr>
-              <a:tr h="700000">
-                <a:tc>
-                  <a:txBody>
-                    <a:bodyPr wrap="square"/>
-                    <a:lstStyle/>
-                    <a:p>
-                      <a:pPr algn="l"/>
-                      <a:r>
-                        <a:rPr sz="1050" b="1">
-                          <a:solidFill>
-                            <a:srgbClr val="263238"/>
-                          </a:solidFill>
-                          <a:latin typeface="Tahoma"/>
-                        </a:rPr>
-                        <a:t>Cycle count</a:t>
-                      </a:r>
-                    </a:p>
-                  </a:txBody>
-                  <a:tcPr marL="40000" marR="40000" marT="25000" marB="25000" anchor="t">
-                    <a:noFill/>
-                    <a:lnL>
-                      <a:noFill/>
-                    </a:lnL>
-                    <a:lnR>
-                      <a:noFill/>
-                    </a:lnR>
-                    <a:lnT>
-                      <a:noFill/>
-                    </a:lnT>
-                    <a:lnB w="6350">
-                      <a:solidFill>
-                        <a:srgbClr val="E3EAEE"/>
-                      </a:solidFill>
-                    </a:lnB>
-                  </a:tcPr>
-                </a:tc>
-                <a:tc>
-                  <a:txBody>
-                    <a:bodyPr wrap="square"/>
-                    <a:lstStyle/>
-                    <a:p>
-                      <a:pPr algn="l"/>
-                      <a:r>
-                        <a:rPr sz="1050">
-                          <a:solidFill>
-                            <a:srgbClr val="263238"/>
-                          </a:solidFill>
-                          <a:latin typeface="Tahoma"/>
-                        </a:rPr>
-                        <a:t>Diff ±1,000 ฿/article</a:t>
-                      </a:r>
-                    </a:p>
-                  </a:txBody>
-                  <a:tcPr marL="40000" marR="40000" marT="25000" marB="25000" anchor="t">
-                    <a:noFill/>
-                    <a:lnL>
-                      <a:noFill/>
-                    </a:lnL>
-                    <a:lnR>
-                      <a:noFill/>
-                    </a:lnR>
-                    <a:lnT>
-                      <a:noFill/>
-                    </a:lnT>
-                    <a:lnB w="6350">
-                      <a:solidFill>
-                        <a:srgbClr val="E3EAEE"/>
-                      </a:solidFill>
-                    </a:lnB>
-                  </a:tcPr>
-                </a:tc>
-                <a:tc>
-                  <a:txBody>
-                    <a:bodyPr wrap="square"/>
-                    <a:lstStyle/>
-                    <a:p>
-                      <a:pPr algn="l"/>
-                      <a:r>
-                        <a:rPr sz="1050">
-                          <a:solidFill>
-                            <a:srgbClr val="263238"/>
-                          </a:solidFill>
-                          <a:latin typeface="Tahoma"/>
-                        </a:rPr>
-                        <a:t>Code 23 สุทธิ YTD -211,400 ฿ (ก.ย. -9,141) · มี 231 รายการสินค้า-เดือนที่ |Diff| ≥1,000 ฿ (ก.ย. 4)</a:t>
-                      </a:r>
-                    </a:p>
-                  </a:txBody>
-                  <a:tcPr marL="40000" marR="40000" marT="25000" marB="25000" anchor="t">
-                    <a:noFill/>
-                    <a:lnL>
-                      <a:noFill/>
-                    </a:lnL>
-                    <a:lnR>
-                      <a:noFill/>
-                    </a:lnR>
-                    <a:lnT>
-                      <a:noFill/>
-                    </a:lnT>
-                    <a:lnB w="6350">
-                      <a:solidFill>
-                        <a:srgbClr val="E3EAEE"/>
-                      </a:solidFill>
-                    </a:lnB>
-                  </a:tcPr>
-                </a:tc>
-                <a:tc>
-                  <a:txBody>
-                    <a:bodyPr wrap="square"/>
-                    <a:lstStyle/>
-                    <a:p>
-                      <a:pPr algn="l"/>
-                      <a:r>
-                        <a:rPr sz="1050">
-                          <a:solidFill>
-                            <a:srgbClr val="263238"/>
-                          </a:solidFill>
-                          <a:latin typeface="Tahoma"/>
-                        </a:rPr>
-                        <a:t>LP/แผนกตรวจของจริงก่อนปรับ — ห้ามปรับโดยไม่มีสินค้าจริง (ประกาศบริษัทข้อ 2, 7)</a:t>
-                      </a:r>
-                    </a:p>
-                  </a:txBody>
-                  <a:tcPr marL="40000" marR="40000" marT="25000" marB="25000" anchor="t">
-                    <a:noFill/>
-                    <a:lnL>
-                      <a:noFill/>
-                    </a:lnL>
-                    <a:lnR>
-                      <a:noFill/>
-                    </a:lnR>
-                    <a:lnT>
-                      <a:noFill/>
-                    </a:lnT>
-                    <a:lnB w="6350">
-                      <a:solidFill>
-                        <a:srgbClr val="E3EAEE"/>
-                      </a:solidFill>
-                    </a:lnB>
-                  </a:tcPr>
-                </a:tc>
+              <a:tr h="1027257">
+                <a:tc>
+                  <a:txBody>
+                    <a:bodyPr/>
+                    <a:lstStyle/>
+                    <a:p>
+                      <a:pPr algn="ctr"/>
+                      <a:r>
+                        <a:rPr lang="th-TH" sz="1100" dirty="0">
+                          <a:latin typeface="Tahoma" panose="020B0604030504040204" pitchFamily="34" charset="0"/>
+                          <a:ea typeface="Tahoma" panose="020B0604030504040204" pitchFamily="34" charset="0"/>
+                          <a:cs typeface="Tahoma" panose="020B0604030504040204" pitchFamily="34" charset="0"/>
+                        </a:rPr>
+                        <a:t>4.</a:t>
+                      </a:r>
+                      <a:endParaRPr lang="en-US" sz="1100" dirty="0">
+                        <a:latin typeface="Tahoma" panose="020B0604030504040204" pitchFamily="34" charset="0"/>
+                        <a:ea typeface="Tahoma" panose="020B0604030504040204" pitchFamily="34" charset="0"/>
+                        <a:cs typeface="Tahoma" panose="020B0604030504040204" pitchFamily="34" charset="0"/>
+                      </a:endParaRPr>
+                    </a:p>
+                  </a:txBody>
+                  <a:tcPr/>
+                </a:tc>
+                <a:tc>
+                  <a:txBody>
+                    <a:bodyPr/>
+                    <a:lstStyle/>
+                    <a:p>
+                      <a:r>
+                        <a:rPr lang="en-US" sz="1100" u="sng" dirty="0" err="1">
+                          <a:latin typeface="Tahoma" panose="020B0604030504040204" pitchFamily="34" charset="0"/>
+                          <a:ea typeface="Tahoma" panose="020B0604030504040204" pitchFamily="34" charset="0"/>
+                          <a:cs typeface="Tahoma" panose="020B0604030504040204" pitchFamily="34" charset="0"/>
+                        </a:rPr>
+                        <a:t>Freshfood</a:t>
+                      </a:r>
+                      <a:br>
+                        <a:rPr lang="en-US" sz="1100" u="sng" dirty="0">
+                          <a:latin typeface="Tahoma" panose="020B0604030504040204" pitchFamily="34" charset="0"/>
+                          <a:ea typeface="Tahoma" panose="020B0604030504040204" pitchFamily="34" charset="0"/>
+                          <a:cs typeface="Tahoma" panose="020B0604030504040204" pitchFamily="34" charset="0"/>
+                        </a:rPr>
+                      </a:br>
+                      <a:r>
+                        <a:rPr lang="th-TH" sz="1100" u="none" dirty="0">
+                          <a:latin typeface="Tahoma" panose="020B0604030504040204" pitchFamily="34" charset="0"/>
+                          <a:ea typeface="Tahoma" panose="020B0604030504040204" pitchFamily="34" charset="0"/>
+                          <a:cs typeface="Tahoma" panose="020B0604030504040204" pitchFamily="34" charset="0"/>
+                        </a:rPr>
+                        <a:t>ขายเกิน</a:t>
+                      </a:r>
+                      <a:r>
+                        <a:rPr lang="en-US" sz="1100" u="none" dirty="0">
+                          <a:latin typeface="Tahoma" panose="020B0604030504040204" pitchFamily="34" charset="0"/>
+                          <a:ea typeface="Tahoma" panose="020B0604030504040204" pitchFamily="34" charset="0"/>
+                          <a:cs typeface="Tahoma" panose="020B0604030504040204" pitchFamily="34" charset="0"/>
+                        </a:rPr>
+                        <a:t>recipe </a:t>
+                      </a:r>
+                      <a:r>
+                        <a:rPr lang="th-TH" sz="1100" u="none" dirty="0">
+                          <a:latin typeface="Tahoma" panose="020B0604030504040204" pitchFamily="34" charset="0"/>
+                          <a:ea typeface="Tahoma" panose="020B0604030504040204" pitchFamily="34" charset="0"/>
+                          <a:cs typeface="Tahoma" panose="020B0604030504040204" pitchFamily="34" charset="0"/>
+                        </a:rPr>
+                        <a:t>ที่กำหนดจึงทำให้สินค้าสูญหาย เช่น ซอฟต์เสิร์ฟโกโก้แช่แข็ง</a:t>
+                      </a:r>
+                      <a:r>
+                        <a:rPr lang="en-US" sz="1100" u="none" dirty="0">
+                          <a:latin typeface="Tahoma" panose="020B0604030504040204" pitchFamily="34" charset="0"/>
+                          <a:ea typeface="Tahoma" panose="020B0604030504040204" pitchFamily="34" charset="0"/>
+                          <a:cs typeface="Tahoma" panose="020B0604030504040204" pitchFamily="34" charset="0"/>
+                        </a:rPr>
+                        <a:t>3</a:t>
+                      </a:r>
+                      <a:r>
+                        <a:rPr lang="th-TH" sz="1100" u="none" dirty="0">
+                          <a:latin typeface="Tahoma" panose="020B0604030504040204" pitchFamily="34" charset="0"/>
+                          <a:ea typeface="Tahoma" panose="020B0604030504040204" pitchFamily="34" charset="0"/>
+                          <a:cs typeface="Tahoma" panose="020B0604030504040204" pitchFamily="34" charset="0"/>
+                        </a:rPr>
+                        <a:t>กก</a:t>
+                      </a:r>
+                    </a:p>
+                    <a:p>
+                      <a:r>
+                        <a:rPr lang="th-TH" sz="1100" u="none" dirty="0">
+                          <a:latin typeface="Tahoma" panose="020B0604030504040204" pitchFamily="34" charset="0"/>
+                          <a:ea typeface="Tahoma" panose="020B0604030504040204" pitchFamily="34" charset="0"/>
+                          <a:cs typeface="Tahoma" panose="020B0604030504040204" pitchFamily="34" charset="0"/>
+                        </a:rPr>
+                        <a:t>ซอฟต์เสิร์ฟวานิลลาแช่แข็ง</a:t>
+                      </a:r>
+                      <a:r>
+                        <a:rPr lang="en-US" sz="1100" u="none" dirty="0">
+                          <a:latin typeface="Tahoma" panose="020B0604030504040204" pitchFamily="34" charset="0"/>
+                          <a:ea typeface="Tahoma" panose="020B0604030504040204" pitchFamily="34" charset="0"/>
+                          <a:cs typeface="Tahoma" panose="020B0604030504040204" pitchFamily="34" charset="0"/>
+                        </a:rPr>
+                        <a:t>3</a:t>
+                      </a:r>
+                      <a:r>
+                        <a:rPr lang="th-TH" sz="1100" u="none" dirty="0">
+                          <a:latin typeface="Tahoma" panose="020B0604030504040204" pitchFamily="34" charset="0"/>
+                          <a:ea typeface="Tahoma" panose="020B0604030504040204" pitchFamily="34" charset="0"/>
+                          <a:cs typeface="Tahoma" panose="020B0604030504040204" pitchFamily="34" charset="0"/>
+                        </a:rPr>
+                        <a:t>กก.</a:t>
+                      </a:r>
+                      <a:r>
+                        <a:rPr lang="en-US" sz="1100" u="none" dirty="0">
+                          <a:latin typeface="Tahoma" panose="020B0604030504040204" pitchFamily="34" charset="0"/>
+                          <a:ea typeface="Tahoma" panose="020B0604030504040204" pitchFamily="34" charset="0"/>
+                          <a:cs typeface="Tahoma" panose="020B0604030504040204" pitchFamily="34" charset="0"/>
+                        </a:rPr>
+                        <a:t>,</a:t>
+                      </a:r>
+                      <a:r>
+                        <a:rPr lang="th-TH" sz="1100" u="none" dirty="0">
+                          <a:latin typeface="Tahoma" panose="020B0604030504040204" pitchFamily="34" charset="0"/>
+                          <a:ea typeface="Tahoma" panose="020B0604030504040204" pitchFamily="34" charset="0"/>
+                          <a:cs typeface="Tahoma" panose="020B0604030504040204" pitchFamily="34" charset="0"/>
+                        </a:rPr>
+                        <a:t>น้ำทาร์ตไข่สำเร็จรูปแช่แข็ง</a:t>
+                      </a:r>
+                    </a:p>
+                    <a:p>
+                      <a:endParaRPr lang="th-TH" sz="1100" u="none" dirty="0">
+                        <a:latin typeface="Tahoma" panose="020B0604030504040204" pitchFamily="34" charset="0"/>
+                        <a:ea typeface="Tahoma" panose="020B0604030504040204" pitchFamily="34" charset="0"/>
+                        <a:cs typeface="Tahoma" panose="020B0604030504040204" pitchFamily="34" charset="0"/>
+                      </a:endParaRPr>
+                    </a:p>
+                  </a:txBody>
+                  <a:tcPr/>
+                </a:tc>
+                <a:tc>
+                  <a:txBody>
+                    <a:bodyPr/>
+                    <a:lstStyle/>
+                    <a:p>
+                      <a:pPr marL="228600" indent="-228600">
+                        <a:buAutoNum type="arabicPeriod"/>
+                      </a:pPr>
+                      <a:r>
+                        <a:rPr lang="en-US" sz="1100" kern="1200" dirty="0">
+                          <a:solidFill>
+                            <a:schemeClr val="dk1"/>
+                          </a:solidFill>
+                          <a:latin typeface="Tahoma" panose="020B0604030504040204" pitchFamily="34" charset="0"/>
+                          <a:ea typeface="Tahoma" panose="020B0604030504040204" pitchFamily="34" charset="0"/>
+                          <a:cs typeface="Tahoma" panose="020B0604030504040204" pitchFamily="34" charset="0"/>
+                        </a:rPr>
+                        <a:t>LP,GR </a:t>
+                      </a:r>
+                      <a:r>
+                        <a:rPr lang="th-TH" sz="1100" kern="1200" dirty="0">
+                          <a:solidFill>
+                            <a:schemeClr val="dk1"/>
+                          </a:solidFill>
+                          <a:latin typeface="Tahoma" panose="020B0604030504040204" pitchFamily="34" charset="0"/>
+                          <a:ea typeface="Tahoma" panose="020B0604030504040204" pitchFamily="34" charset="0"/>
+                          <a:cs typeface="Tahoma" panose="020B0604030504040204" pitchFamily="34" charset="0"/>
+                        </a:rPr>
+                        <a:t>และแผนกทำการตรวจสอบสินค้าที่รับจากดีซีทุกครั้งโดยเฉพาะกลุ่มชีส เนย ที่มีราคาแพงและติดตามกรณีพบสินค้าขาดส่ง</a:t>
+                      </a:r>
+                    </a:p>
+                    <a:p>
+                      <a:pPr marL="0" indent="0">
+                        <a:buNone/>
+                      </a:pPr>
+                      <a:r>
+                        <a:rPr lang="th-TH" sz="1100" kern="1200" dirty="0">
+                          <a:solidFill>
+                            <a:schemeClr val="dk1"/>
+                          </a:solidFill>
+                          <a:latin typeface="Tahoma" panose="020B0604030504040204" pitchFamily="34" charset="0"/>
+                          <a:ea typeface="Tahoma" panose="020B0604030504040204" pitchFamily="34" charset="0"/>
+                          <a:cs typeface="Tahoma" panose="020B0604030504040204" pitchFamily="34" charset="0"/>
+                        </a:rPr>
+                        <a:t>2. </a:t>
+                      </a:r>
+                      <a:r>
+                        <a:rPr lang="en-US" sz="1100" kern="1200" dirty="0">
+                          <a:solidFill>
+                            <a:schemeClr val="dk1"/>
+                          </a:solidFill>
+                          <a:latin typeface="Tahoma" panose="020B0604030504040204" pitchFamily="34" charset="0"/>
+                          <a:ea typeface="Tahoma" panose="020B0604030504040204" pitchFamily="34" charset="0"/>
+                          <a:cs typeface="Tahoma" panose="020B0604030504040204" pitchFamily="34" charset="0"/>
+                        </a:rPr>
+                        <a:t>C2,M Com </a:t>
+                      </a:r>
+                      <a:r>
+                        <a:rPr lang="th-TH" sz="1100" kern="1200" dirty="0">
+                          <a:solidFill>
+                            <a:schemeClr val="dk1"/>
+                          </a:solidFill>
+                          <a:latin typeface="Tahoma" panose="020B0604030504040204" pitchFamily="34" charset="0"/>
+                          <a:ea typeface="Tahoma" panose="020B0604030504040204" pitchFamily="34" charset="0"/>
+                          <a:cs typeface="Tahoma" panose="020B0604030504040204" pitchFamily="34" charset="0"/>
+                        </a:rPr>
+                        <a:t>กำชับพนักงานเรื่องการขายสินค้าให้เป็นไปตามสำนักงานใหญ่กำหนด โดยเฉพาะสินค้าไอศครีม</a:t>
+                      </a:r>
+                      <a:r>
+                        <a:rPr lang="th-TH" sz="1100" u="none" dirty="0">
+                          <a:latin typeface="Tahoma" panose="020B0604030504040204" pitchFamily="34" charset="0"/>
+                          <a:ea typeface="Tahoma" panose="020B0604030504040204" pitchFamily="34" charset="0"/>
+                          <a:cs typeface="Tahoma" panose="020B0604030504040204" pitchFamily="34" charset="0"/>
+                        </a:rPr>
+                        <a:t>ซอฟต์เสิร์ฟ</a:t>
+                      </a:r>
+                      <a:endParaRPr lang="th-TH" sz="1100" kern="1200" dirty="0">
+                        <a:solidFill>
+                          <a:schemeClr val="dk1"/>
+                        </a:solidFill>
+                        <a:latin typeface="Tahoma" panose="020B0604030504040204" pitchFamily="34" charset="0"/>
+                        <a:ea typeface="Tahoma" panose="020B0604030504040204" pitchFamily="34" charset="0"/>
+                        <a:cs typeface="Tahoma" panose="020B0604030504040204" pitchFamily="34" charset="0"/>
+                      </a:endParaRPr>
+                    </a:p>
+                  </a:txBody>
+                  <a:tcPr/>
+                </a:tc>
+                <a:tc>
+                  <a:txBody>
+                    <a:bodyPr/>
+                    <a:lstStyle/>
+                    <a:p>
+                      <a:pPr marL="0" marR="0" lvl="0" indent="0" algn="l" defTabSz="761970" rtl="0" eaLnBrk="1" fontAlgn="auto" latinLnBrk="0" hangingPunct="1">
+                        <a:lnSpc>
+                          <a:spcPct val="100000"/>
+                        </a:lnSpc>
+                        <a:spcBef>
+                          <a:spcPts val="0"/>
+                        </a:spcBef>
+                        <a:spcAft>
+                          <a:spcPts val="0"/>
+                        </a:spcAft>
+                        <a:buClrTx/>
+                        <a:buSzTx/>
+                        <a:buFontTx/>
+                        <a:buNone/>
+                        <a:tabLst/>
+                        <a:defRPr/>
+                      </a:pPr>
+                      <a:r>
+                        <a:rPr lang="en-US" sz="1100" kern="1200" dirty="0">
+                          <a:solidFill>
+                            <a:schemeClr val="tx1"/>
+                          </a:solidFill>
+                          <a:latin typeface="Tahoma" panose="020B0604030504040204" pitchFamily="34" charset="0"/>
+                          <a:ea typeface="Tahoma" panose="020B0604030504040204" pitchFamily="34" charset="0"/>
+                          <a:cs typeface="Tahoma" panose="020B0604030504040204" pitchFamily="34" charset="0"/>
+                        </a:rPr>
+                        <a:t>M1 ,</a:t>
+                      </a:r>
+                      <a:r>
+                        <a:rPr lang="en-US" sz="1100" kern="1200" dirty="0" err="1">
+                          <a:solidFill>
+                            <a:schemeClr val="tx1"/>
+                          </a:solidFill>
+                          <a:latin typeface="Tahoma" panose="020B0604030504040204" pitchFamily="34" charset="0"/>
+                          <a:ea typeface="Tahoma" panose="020B0604030504040204" pitchFamily="34" charset="0"/>
+                          <a:cs typeface="Tahoma" panose="020B0604030504040204" pitchFamily="34" charset="0"/>
+                        </a:rPr>
+                        <a:t>M.Opt,C</a:t>
+                      </a:r>
+                      <a:r>
+                        <a:rPr lang="th-TH" sz="1100" kern="1200" dirty="0">
+                          <a:solidFill>
+                            <a:schemeClr val="tx1"/>
+                          </a:solidFill>
+                          <a:latin typeface="Tahoma" panose="020B0604030504040204" pitchFamily="34" charset="0"/>
+                          <a:ea typeface="Tahoma" panose="020B0604030504040204" pitchFamily="34" charset="0"/>
+                          <a:cs typeface="Tahoma" panose="020B0604030504040204" pitchFamily="34" charset="0"/>
+                        </a:rPr>
+                        <a:t>2</a:t>
+                      </a:r>
+                      <a:r>
+                        <a:rPr lang="en-US" sz="1100" kern="1200" dirty="0">
+                          <a:solidFill>
+                            <a:schemeClr val="tx1"/>
+                          </a:solidFill>
+                          <a:latin typeface="Tahoma" panose="020B0604030504040204" pitchFamily="34" charset="0"/>
+                          <a:ea typeface="Tahoma" panose="020B0604030504040204" pitchFamily="34" charset="0"/>
+                          <a:cs typeface="Tahoma" panose="020B0604030504040204" pitchFamily="34" charset="0"/>
+                        </a:rPr>
+                        <a:t>,C9,LP</a:t>
+                      </a:r>
+                      <a:endParaRPr lang="th-TH" sz="1100" kern="1200" dirty="0">
+                        <a:solidFill>
+                          <a:schemeClr val="tx1"/>
+                        </a:solidFill>
+                        <a:latin typeface="Tahoma" panose="020B0604030504040204" pitchFamily="34" charset="0"/>
+                        <a:ea typeface="Tahoma" panose="020B0604030504040204" pitchFamily="34" charset="0"/>
+                        <a:cs typeface="Tahoma" panose="020B0604030504040204" pitchFamily="34" charset="0"/>
+                      </a:endParaRPr>
+                    </a:p>
+                  </a:txBody>
+                  <a:tcPr/>
+                </a:tc>
+                <a:tc>
+                  <a:txBody>
+                    <a:bodyPr/>
+                    <a:lstStyle/>
+                    <a:p>
+                      <a:r>
+                        <a:rPr lang="en-US" sz="1100" dirty="0">
+                          <a:latin typeface="Tahoma" panose="020B0604030504040204" pitchFamily="34" charset="0"/>
+                          <a:ea typeface="Tahoma" panose="020B0604030504040204" pitchFamily="34" charset="0"/>
+                          <a:cs typeface="Tahoma" panose="020B0604030504040204" pitchFamily="34" charset="0"/>
+                        </a:rPr>
+                        <a:t>Jan – Dec 2026</a:t>
+                      </a:r>
+                    </a:p>
+                  </a:txBody>
+                  <a:tcPr/>
+                </a:tc>
+                <a:tc>
+                  <a:txBody>
+                    <a:bodyPr/>
+                    <a:lstStyle/>
+                    <a:p>
+                      <a:pPr marL="0" marR="0" lvl="0" indent="0" algn="l" defTabSz="457200" rtl="0" eaLnBrk="1" fontAlgn="auto" latinLnBrk="0" hangingPunct="1">
+                        <a:lnSpc>
+                          <a:spcPct val="100000"/>
+                        </a:lnSpc>
+                        <a:spcBef>
+                          <a:spcPts val="0"/>
+                        </a:spcBef>
+                        <a:spcAft>
+                          <a:spcPts val="0"/>
+                        </a:spcAft>
+                        <a:buClrTx/>
+                        <a:buSzTx/>
+                        <a:buFontTx/>
+                        <a:buNone/>
+                        <a:tabLst/>
+                        <a:defRPr/>
+                      </a:pPr>
+                      <a:r>
+                        <a:rPr lang="th-TH" sz="1100" kern="1200" dirty="0">
+                          <a:solidFill>
+                            <a:schemeClr val="dk1"/>
+                          </a:solidFill>
+                          <a:latin typeface="Tahoma" panose="020B0604030504040204" pitchFamily="34" charset="0"/>
+                          <a:ea typeface="Tahoma" panose="020B0604030504040204" pitchFamily="34" charset="0"/>
+                          <a:cs typeface="Tahoma" panose="020B0604030504040204" pitchFamily="34" charset="0"/>
+                        </a:rPr>
+                        <a:t>1.</a:t>
+                      </a:r>
+                      <a:r>
+                        <a:rPr lang="en-US" sz="1100" kern="1200" dirty="0">
+                          <a:solidFill>
+                            <a:schemeClr val="dk1"/>
+                          </a:solidFill>
+                          <a:latin typeface="Tahoma" panose="020B0604030504040204" pitchFamily="34" charset="0"/>
+                          <a:ea typeface="Tahoma" panose="020B0604030504040204" pitchFamily="34" charset="0"/>
+                          <a:cs typeface="Tahoma" panose="020B0604030504040204" pitchFamily="34" charset="0"/>
+                        </a:rPr>
+                        <a:t>LP </a:t>
+                      </a:r>
+                      <a:r>
+                        <a:rPr lang="th-TH" sz="1100" kern="1200" dirty="0">
+                          <a:solidFill>
+                            <a:schemeClr val="dk1"/>
+                          </a:solidFill>
+                          <a:latin typeface="Tahoma" panose="020B0604030504040204" pitchFamily="34" charset="0"/>
+                          <a:ea typeface="Tahoma" panose="020B0604030504040204" pitchFamily="34" charset="0"/>
+                          <a:cs typeface="Tahoma" panose="020B0604030504040204" pitchFamily="34" charset="0"/>
+                        </a:rPr>
+                        <a:t>สุ่มตรวจสอบสินค้าที่มาจากดีซีว่าเข้าครบไหม</a:t>
+                      </a:r>
+                    </a:p>
+                    <a:p>
+                      <a:endParaRPr lang="en-US" sz="1100" dirty="0">
+                        <a:latin typeface="Tahoma" panose="020B0604030504040204" pitchFamily="34" charset="0"/>
+                        <a:ea typeface="Tahoma" panose="020B0604030504040204" pitchFamily="34" charset="0"/>
+                        <a:cs typeface="Tahoma" panose="020B0604030504040204" pitchFamily="34" charset="0"/>
+                      </a:endParaRPr>
+                    </a:p>
+                  </a:txBody>
+                  <a:tcPr/>
+                </a:tc>
+                <a:extLst>
+                  <a:ext uri="{0D108BD9-81ED-4DB2-BD59-A6C34878D82A}">
+                    <a16:rowId xmlns:a16="http://schemas.microsoft.com/office/drawing/2014/main" val="833854746"/>
+                  </a:ext>
+                </a:extLst>
               </a:tr>
-              <a:tr h="700000">
-                <a:tc>
-                  <a:txBody>
-                    <a:bodyPr wrap="square"/>
-                    <a:lstStyle/>
-                    <a:p>
-                      <a:pPr algn="l"/>
-                      <a:r>
-                        <a:rPr sz="1050" b="1">
-                          <a:solidFill>
-                            <a:srgbClr val="263238"/>
-                          </a:solidFill>
-                          <a:latin typeface="Tahoma"/>
-                        </a:rPr>
-                        <a:t>ตรวจนับประจำปี</a:t>
-                      </a:r>
-                    </a:p>
-                    <a:p>
-                      <a:pPr algn="l"/>
-                      <a:r>
-                        <a:rPr sz="1050" b="1">
-                          <a:solidFill>
-                            <a:srgbClr val="263238"/>
-                          </a:solidFill>
-                          <a:latin typeface="Tahoma"/>
-                        </a:rPr>
-                        <a:t>(Hyper)</a:t>
-                      </a:r>
-                    </a:p>
-                  </a:txBody>
-                  <a:tcPr marL="40000" marR="40000" marT="25000" marB="25000" anchor="t">
-                    <a:noFill/>
-                    <a:lnL>
-                      <a:noFill/>
-                    </a:lnL>
-                    <a:lnR>
-                      <a:noFill/>
-                    </a:lnR>
-                    <a:lnT>
-                      <a:noFill/>
-                    </a:lnT>
-                    <a:lnB w="6350">
-                      <a:solidFill>
-                        <a:srgbClr val="E3EAEE"/>
-                      </a:solidFill>
-                    </a:lnB>
-                  </a:tcPr>
-                </a:tc>
-                <a:tc>
-                  <a:txBody>
-                    <a:bodyPr wrap="square"/>
-                    <a:lstStyle/>
-                    <a:p>
-                      <a:pPr algn="l"/>
-                      <a:r>
-                        <a:rPr sz="1050">
-                          <a:solidFill>
-                            <a:srgbClr val="263238"/>
-                          </a:solidFill>
-                          <a:latin typeface="Tahoma"/>
-                        </a:rPr>
-                        <a:t>Diff ±10,000 ฿/article · Reconcile ก่อนปิด ±5,000 · ก่อน Apply ±30,000</a:t>
-                      </a:r>
-                    </a:p>
-                    <a:p>
-                      <a:pPr algn="l"/>
-                      <a:r>
-                        <a:rPr sz="1050">
-                          <a:solidFill>
-                            <a:srgbClr val="263238"/>
-                          </a:solidFill>
-                          <a:latin typeface="Tahoma"/>
-                        </a:rPr>
-                        <a:t>เพดานอนุมัติ ≤20k SGM · ≤50k VP · ≤300k SVP · &gt;300k EVP · ห้ามใช้ Code 22/23 วัน Apply</a:t>
-                      </a:r>
-                    </a:p>
-                  </a:txBody>
-                  <a:tcPr marL="40000" marR="40000" marT="25000" marB="25000" anchor="t">
-                    <a:noFill/>
-                    <a:lnL>
-                      <a:noFill/>
-                    </a:lnL>
-                    <a:lnR>
-                      <a:noFill/>
-                    </a:lnR>
-                    <a:lnT>
-                      <a:noFill/>
-                    </a:lnT>
-                    <a:lnB w="6350">
-                      <a:solidFill>
-                        <a:srgbClr val="E3EAEE"/>
-                      </a:solidFill>
-                    </a:lnB>
-                  </a:tcPr>
-                </a:tc>
-                <a:tc>
-                  <a:txBody>
-                    <a:bodyPr wrap="square"/>
-                    <a:lstStyle/>
-                    <a:p>
-                      <a:pPr algn="l"/>
-                      <a:r>
-                        <a:rPr sz="1050">
-                          <a:solidFill>
-                            <a:srgbClr val="263238"/>
-                          </a:solidFill>
-                          <a:latin typeface="Tahoma"/>
-                        </a:rPr>
-                        <a:t>923/924 สุทธิรายสินค้า: ส.ค. 7 รายการ ≥5,000 ฿ (2 ≥10,000) · ก.ย. 11 รายการ ≥5,000 ฿ (2 ≥10,000: ปลาซาบะนอร์เวย์แล่ +23,904 · ทุเรียนหมอนทอง -19,656)</a:t>
-                      </a:r>
-                    </a:p>
-                  </a:txBody>
-                  <a:tcPr marL="40000" marR="40000" marT="25000" marB="25000" anchor="t">
-                    <a:noFill/>
-                    <a:lnL>
-                      <a:noFill/>
-                    </a:lnL>
-                    <a:lnR>
-                      <a:noFill/>
-                    </a:lnR>
-                    <a:lnT>
-                      <a:noFill/>
-                    </a:lnT>
-                    <a:lnB w="6350">
-                      <a:solidFill>
-                        <a:srgbClr val="E3EAEE"/>
-                      </a:solidFill>
-                    </a:lnB>
-                  </a:tcPr>
-                </a:tc>
-                <a:tc>
-                  <a:txBody>
-                    <a:bodyPr wrap="square"/>
-                    <a:lstStyle/>
-                    <a:p>
-                      <a:pPr algn="l"/>
-                      <a:r>
-                        <a:rPr sz="1050">
-                          <a:solidFill>
-                            <a:srgbClr val="263238"/>
-                          </a:solidFill>
-                          <a:latin typeface="Tahoma"/>
-                        </a:rPr>
-                        <a:t>เป็นตัวชี้ให้ตรวจ ไม่ใช่ผลเทียบเกณฑ์ Report วันปิดงาน (รวมเอกสารทั้งเดือน) · LP สุ่มตรวจของจริงเมื่อ Corrected ยอดสูง</a:t>
-                      </a:r>
-                    </a:p>
-                  </a:txBody>
-                  <a:tcPr marL="40000" marR="40000" marT="25000" marB="25000" anchor="t">
-                    <a:noFill/>
-                    <a:lnL>
-                      <a:noFill/>
-                    </a:lnL>
-                    <a:lnR>
-                      <a:noFill/>
-                    </a:lnR>
-                    <a:lnT>
-                      <a:noFill/>
-                    </a:lnT>
-                    <a:lnB w="6350">
-                      <a:solidFill>
-                        <a:srgbClr val="E3EAEE"/>
-                      </a:solidFill>
-                    </a:lnB>
-                  </a:tcPr>
-                </a:tc>
-              </a:tr>
-              <a:tr h="700000">
-                <a:tc>
-                  <a:txBody>
-                    <a:bodyPr wrap="square"/>
-                    <a:lstStyle/>
-                    <a:p>
-                      <a:pPr algn="l"/>
-                      <a:r>
-                        <a:rPr sz="1050" b="1">
-                          <a:solidFill>
-                            <a:srgbClr val="263238"/>
-                          </a:solidFill>
-                          <a:latin typeface="Tahoma"/>
-                        </a:rPr>
-                        <a:t>สลับ Barcode / Negative</a:t>
-                      </a:r>
-                    </a:p>
-                  </a:txBody>
-                  <a:tcPr marL="40000" marR="40000" marT="25000" marB="25000" anchor="t">
-                    <a:noFill/>
-                    <a:lnL>
-                      <a:noFill/>
-                    </a:lnL>
-                    <a:lnR>
-                      <a:noFill/>
-                    </a:lnR>
-                    <a:lnT>
-                      <a:noFill/>
-                    </a:lnT>
-                    <a:lnB w="6350">
-                      <a:solidFill>
-                        <a:srgbClr val="E3EAEE"/>
-                      </a:solidFill>
-                    </a:lnB>
-                  </a:tcPr>
-                </a:tc>
-                <a:tc>
-                  <a:txBody>
-                    <a:bodyPr wrap="square"/>
-                    <a:lstStyle/>
-                    <a:p>
-                      <a:pPr algn="l"/>
-                      <a:r>
-                        <a:rPr sz="1050">
-                          <a:solidFill>
-                            <a:srgbClr val="263238"/>
-                          </a:solidFill>
-                          <a:latin typeface="Tahoma"/>
-                        </a:rPr>
-                        <a:t>นับสลับบาร์โค้ด ต้องแก้คู่กันเสมอ · Negative stock ตรวจ 7 ขั้นตอน · Code 8 ขายผิด Barcode · Code 9 de-pack/re-pack</a:t>
-                      </a:r>
-                    </a:p>
-                  </a:txBody>
-                  <a:tcPr marL="40000" marR="40000" marT="25000" marB="25000" anchor="t">
-                    <a:noFill/>
-                    <a:lnL>
-                      <a:noFill/>
-                    </a:lnL>
-                    <a:lnR>
-                      <a:noFill/>
-                    </a:lnR>
-                    <a:lnT>
-                      <a:noFill/>
-                    </a:lnT>
-                    <a:lnB w="6350">
-                      <a:solidFill>
-                        <a:srgbClr val="E3EAEE"/>
-                      </a:solidFill>
-                    </a:lnB>
-                  </a:tcPr>
-                </a:tc>
-                <a:tc>
-                  <a:txBody>
-                    <a:bodyPr wrap="square"/>
-                    <a:lstStyle/>
-                    <a:p>
-                      <a:pPr algn="l"/>
-                      <a:r>
-                        <a:rPr sz="1050">
-                          <a:solidFill>
-                            <a:srgbClr val="263238"/>
-                          </a:solidFill>
-                          <a:latin typeface="Tahoma"/>
-                        </a:rPr>
-                        <a:t>Dry Food ก.ย.: 923 นับเกิน +1,054,781 ฿ / 924 นับขาด -1,009,465 ฿ หักล้างกัน Shrinkage สุทธิ +35,691 ฿ (นับเกิน, รวม Code 23) หลังนับ G3-2 21–22 ก.ย.</a:t>
-                      </a:r>
-                    </a:p>
-                  </a:txBody>
-                  <a:tcPr marL="40000" marR="40000" marT="25000" marB="25000" anchor="t">
-                    <a:noFill/>
-                    <a:lnL>
-                      <a:noFill/>
-                    </a:lnL>
-                    <a:lnR>
-                      <a:noFill/>
-                    </a:lnR>
-                    <a:lnT>
-                      <a:noFill/>
-                    </a:lnT>
-                    <a:lnB w="6350">
-                      <a:solidFill>
-                        <a:srgbClr val="E3EAEE"/>
-                      </a:solidFill>
-                    </a:lnB>
-                  </a:tcPr>
-                </a:tc>
-                <a:tc>
-                  <a:txBody>
-                    <a:bodyPr wrap="square"/>
-                    <a:lstStyle/>
-                    <a:p>
-                      <a:pPr algn="l"/>
-                      <a:r>
-                        <a:rPr sz="1050">
-                          <a:solidFill>
-                            <a:srgbClr val="263238"/>
-                          </a:solidFill>
-                          <a:latin typeface="Tahoma"/>
-                        </a:rPr>
-                        <a:t>ตรวจคู่ 923/924 ที่หักล้างกันสูงว่าเป็นสินค้าสลับ Barcode หรือไม่ (Action plan #3)</a:t>
-                      </a:r>
-                    </a:p>
-                  </a:txBody>
-                  <a:tcPr marL="40000" marR="40000" marT="25000" marB="25000" anchor="t">
-                    <a:noFill/>
-                    <a:lnL>
-                      <a:noFill/>
-                    </a:lnL>
-                    <a:lnR>
-                      <a:noFill/>
-                    </a:lnR>
-                    <a:lnT>
-                      <a:noFill/>
-                    </a:lnT>
-                    <a:lnB w="6350">
-                      <a:solidFill>
-                        <a:srgbClr val="E3EAEE"/>
-                      </a:solidFill>
-                    </a:lnB>
-                  </a:tcPr>
-                </a:tc>
-              </a:tr>
-              <a:tr h="700000">
-                <a:tc>
-                  <a:txBody>
-                    <a:bodyPr wrap="square"/>
-                    <a:lstStyle/>
-                    <a:p>
-                      <a:pPr algn="l"/>
-                      <a:r>
-                        <a:rPr sz="1050" b="1">
-                          <a:solidFill>
-                            <a:srgbClr val="263238"/>
-                          </a:solidFill>
-                          <a:latin typeface="Tahoma"/>
-                        </a:rPr>
-                        <a:t>ขาดส่งจาก DC</a:t>
-                      </a:r>
-                    </a:p>
-                    <a:p>
-                      <a:pPr algn="l"/>
-                      <a:r>
-                        <a:rPr sz="1050" b="1">
-                          <a:solidFill>
-                            <a:srgbClr val="263238"/>
-                          </a:solidFill>
-                          <a:latin typeface="Tahoma"/>
-                        </a:rPr>
-                        <a:t>(Code 22)</a:t>
-                      </a:r>
-                    </a:p>
-                  </a:txBody>
-                  <a:tcPr marL="40000" marR="40000" marT="25000" marB="25000" anchor="t">
-                    <a:noFill/>
-                    <a:lnL>
-                      <a:noFill/>
-                    </a:lnL>
-                    <a:lnR>
-                      <a:noFill/>
-                    </a:lnR>
-                    <a:lnT>
-                      <a:noFill/>
-                    </a:lnT>
-                    <a:lnB w="6350">
-                      <a:solidFill>
-                        <a:srgbClr val="E3EAEE"/>
-                      </a:solidFill>
-                    </a:lnB>
-                  </a:tcPr>
-                </a:tc>
-                <a:tc>
-                  <a:txBody>
-                    <a:bodyPr wrap="square"/>
-                    <a:lstStyle/>
-                    <a:p>
-                      <a:pPr algn="l"/>
-                      <a:r>
-                        <a:rPr sz="1050">
-                          <a:solidFill>
-                            <a:srgbClr val="263238"/>
-                          </a:solidFill>
-                          <a:latin typeface="Tahoma"/>
-                        </a:rPr>
-                        <a:t>แจ้งเคลมอีเมล ≤24 ชม. · Ambient ≥5,000 ฿/รอบ (&lt;5,000 ต้องเคลมทั้งพาเลท) · Fresh Food ≥2,000 ฿/Transport note (ส่งตั้งแต่ 10 ส.ค. 2569) · DC ตอบ ≤7 วัน · หลักฐาน 6 รูป</a:t>
-                      </a:r>
-                    </a:p>
-                  </a:txBody>
-                  <a:tcPr marL="40000" marR="40000" marT="25000" marB="25000" anchor="t">
-                    <a:noFill/>
-                    <a:lnL>
-                      <a:noFill/>
-                    </a:lnL>
-                    <a:lnR>
-                      <a:noFill/>
-                    </a:lnR>
-                    <a:lnT>
-                      <a:noFill/>
-                    </a:lnT>
-                    <a:lnB w="6350">
-                      <a:solidFill>
-                        <a:srgbClr val="E3EAEE"/>
-                      </a:solidFill>
-                    </a:lnB>
-                  </a:tcPr>
-                </a:tc>
-                <a:tc>
-                  <a:txBody>
-                    <a:bodyPr wrap="square"/>
-                    <a:lstStyle/>
-                    <a:p>
-                      <a:pPr algn="l"/>
-                      <a:r>
-                        <a:rPr sz="1050">
-                          <a:solidFill>
-                            <a:srgbClr val="263238"/>
-                          </a:solidFill>
-                          <a:latin typeface="Tahoma"/>
-                        </a:rPr>
-                        <a:t>Code 22 YTD -12,384 ฿ (ก.ย. -963) — มูลค่าน้อย</a:t>
-                      </a:r>
-                    </a:p>
-                  </a:txBody>
-                  <a:tcPr marL="40000" marR="40000" marT="25000" marB="25000" anchor="t">
-                    <a:noFill/>
-                    <a:lnL>
-                      <a:noFill/>
-                    </a:lnL>
-                    <a:lnR>
-                      <a:noFill/>
-                    </a:lnR>
-                    <a:lnT>
-                      <a:noFill/>
-                    </a:lnT>
-                    <a:lnB w="6350">
-                      <a:solidFill>
-                        <a:srgbClr val="E3EAEE"/>
-                      </a:solidFill>
-                    </a:lnB>
-                  </a:tcPr>
-                </a:tc>
-                <a:tc>
-                  <a:txBody>
-                    <a:bodyPr wrap="square"/>
-                    <a:lstStyle/>
-                    <a:p>
-                      <a:pPr algn="l"/>
-                      <a:r>
-                        <a:rPr sz="1050">
-                          <a:solidFill>
-                            <a:srgbClr val="263238"/>
-                          </a:solidFill>
-                          <a:latin typeface="Tahoma"/>
-                        </a:rPr>
-                        <a:t>เคลมไม่ทันเวลา/หลักฐานไม่ครบ DC ปฏิเสธ · รอบที่ผ่าน LPS Audit 100% DC ไม่รับเคลม</a:t>
-                      </a:r>
-                    </a:p>
-                  </a:txBody>
-                  <a:tcPr marL="40000" marR="40000" marT="25000" marB="25000" anchor="t">
-                    <a:noFill/>
-                    <a:lnL>
-                      <a:noFill/>
-                    </a:lnL>
-                    <a:lnR>
-                      <a:noFill/>
-                    </a:lnR>
-                    <a:lnT>
-                      <a:noFill/>
-                    </a:lnT>
-                    <a:lnB w="6350">
-                      <a:solidFill>
-                        <a:srgbClr val="E3EAEE"/>
-                      </a:solidFill>
-                    </a:lnB>
-                  </a:tcPr>
-                </a:tc>
-              </a:tr>
-              <a:tr h="700000">
-                <a:tc>
-                  <a:txBody>
-                    <a:bodyPr wrap="square"/>
-                    <a:lstStyle/>
-                    <a:p>
-                      <a:pPr algn="l"/>
-                      <a:r>
-                        <a:rPr sz="1050" b="1">
-                          <a:solidFill>
-                            <a:srgbClr val="263238"/>
-                          </a:solidFill>
-                          <a:latin typeface="Tahoma"/>
-                        </a:rPr>
-                        <a:t>กำหนดการนับ 2026 / Audit</a:t>
-                      </a:r>
-                    </a:p>
-                  </a:txBody>
-                  <a:tcPr marL="40000" marR="40000" marT="25000" marB="25000" anchor="t">
-                    <a:noFill/>
-                    <a:lnL>
-                      <a:noFill/>
-                    </a:lnL>
-                    <a:lnR>
-                      <a:noFill/>
-                    </a:lnR>
-                    <a:lnT>
-                      <a:noFill/>
-                    </a:lnT>
-                    <a:lnB w="6350">
-                      <a:solidFill>
-                        <a:srgbClr val="E3EAEE"/>
-                      </a:solidFill>
-                    </a:lnB>
-                  </a:tcPr>
-                </a:tc>
-                <a:tc>
-                  <a:txBody>
-                    <a:bodyPr wrap="square"/>
-                    <a:lstStyle/>
-                    <a:p>
-                      <a:pPr algn="l"/>
-                      <a:r>
-                        <a:rPr sz="1050">
-                          <a:solidFill>
-                            <a:srgbClr val="263238"/>
-                          </a:solidFill>
-                          <a:latin typeface="Tahoma"/>
-                        </a:rPr>
-                        <a:t>นับ Hyper: G1 5–6 ส.ค. · G2 19–20 ส.ค. · G3-2 21–22 ก.ย. · LP ส่ง pre-count checklist ก่อน 09:00 ของ Pre-count Day 5 ผ่านเกณฑ์ 95%</a:t>
-                      </a:r>
-                    </a:p>
-                    <a:p>
-                      <a:pPr algn="l"/>
-                      <a:r>
-                        <a:rPr sz="1050">
-                          <a:solidFill>
-                            <a:srgbClr val="263238"/>
-                          </a:solidFill>
-                          <a:latin typeface="Tahoma"/>
-                        </a:rPr>
-                        <a:t>Audit 2025: ADJUSTMENT ทุก Reason Code = 3 คะแนน · แก้ Adjust ผิดภายใน 7 วัน</a:t>
-                      </a:r>
-                    </a:p>
-                  </a:txBody>
-                  <a:tcPr marL="40000" marR="40000" marT="25000" marB="25000" anchor="t">
-                    <a:noFill/>
-                    <a:lnL>
-                      <a:noFill/>
-                    </a:lnL>
-                    <a:lnR>
-                      <a:noFill/>
-                    </a:lnR>
-                    <a:lnT>
-                      <a:noFill/>
-                    </a:lnT>
-                    <a:lnB w="6350">
-                      <a:solidFill>
-                        <a:srgbClr val="E3EAEE"/>
-                      </a:solidFill>
-                    </a:lnB>
-                  </a:tcPr>
-                </a:tc>
-                <a:tc>
-                  <a:txBody>
-                    <a:bodyPr wrap="square"/>
-                    <a:lstStyle/>
-                    <a:p>
-                      <a:pPr algn="l"/>
-                      <a:r>
-                        <a:rPr sz="1050">
-                          <a:solidFill>
-                            <a:srgbClr val="263238"/>
-                          </a:solidFill>
-                          <a:latin typeface="Tahoma"/>
-                        </a:rPr>
-                        <a:t>Shrinkage Home Line ส.ค. -87,140 ฿ · Soft Line ส.ค. -51,858 ฿ (หลังรอบนับ G1/G2) · ก.ย. เกือบ 0</a:t>
-                      </a:r>
-                    </a:p>
-                  </a:txBody>
-                  <a:tcPr marL="40000" marR="40000" marT="25000" marB="25000" anchor="t">
-                    <a:noFill/>
-                    <a:lnL>
-                      <a:noFill/>
-                    </a:lnL>
-                    <a:lnR>
-                      <a:noFill/>
-                    </a:lnR>
-                    <a:lnT>
-                      <a:noFill/>
-                    </a:lnT>
-                    <a:lnB w="6350">
-                      <a:solidFill>
-                        <a:srgbClr val="E3EAEE"/>
-                      </a:solidFill>
-                    </a:lnB>
-                  </a:tcPr>
-                </a:tc>
-                <a:tc>
-                  <a:txBody>
-                    <a:bodyPr wrap="square"/>
-                    <a:lstStyle/>
-                    <a:p>
-                      <a:pPr algn="l"/>
-                      <a:r>
-                        <a:rPr sz="1050">
-                          <a:solidFill>
-                            <a:srgbClr val="263238"/>
-                          </a:solidFill>
-                          <a:latin typeface="Tahoma"/>
-                        </a:rPr>
-                        <a:t>อ่านแนวโน้ม Shrinkage ต้องแยกเดือนที่ Apply นับประจำปี ออกจากเดือนปกติ</a:t>
-                      </a:r>
-                    </a:p>
-                  </a:txBody>
-                  <a:tcPr marL="40000" marR="40000" marT="25000" marB="25000" anchor="t">
-                    <a:noFill/>
-                    <a:lnL>
-                      <a:noFill/>
-                    </a:lnL>
-                    <a:lnR>
-                      <a:noFill/>
-                    </a:lnR>
-                    <a:lnT>
-                      <a:noFill/>
-                    </a:lnT>
-                    <a:lnB w="6350">
-                      <a:solidFill>
-                        <a:srgbClr val="E3EAEE"/>
-                      </a:solidFill>
-                    </a:lnB>
-                  </a:tcPr>
-                </a:tc>
+              <a:tr h="970218">
+                <a:tc>
+                  <a:txBody>
+                    <a:bodyPr/>
+                    <a:lstStyle/>
+                    <a:p>
+                      <a:pPr algn="ctr"/>
+                      <a:r>
+                        <a:rPr lang="th-TH" sz="1000" dirty="0">
+                          <a:solidFill>
+                            <a:schemeClr val="dk1"/>
+                          </a:solidFill>
+                          <a:latin typeface="Tahoma" panose="020B0604030504040204" pitchFamily="34" charset="0"/>
+                          <a:ea typeface="Tahoma" panose="020B0604030504040204" pitchFamily="34" charset="0"/>
+                          <a:cs typeface="Tahoma" panose="020B0604030504040204" pitchFamily="34" charset="0"/>
+                        </a:rPr>
+                        <a:t>5.</a:t>
+                      </a:r>
+                    </a:p>
+                  </a:txBody>
+                  <a:tcPr/>
+                </a:tc>
+                <a:tc>
+                  <a:txBody>
+                    <a:bodyPr/>
+                    <a:lstStyle/>
+                    <a:p>
+                      <a:r>
+                        <a:rPr lang="th-TH" sz="1000" dirty="0" u="sng">
+                          <a:solidFill>
+                            <a:schemeClr val="dk1"/>
+                          </a:solidFill>
+                          <a:latin typeface="Tahoma" panose="020B0604030504040204" pitchFamily="34" charset="0"/>
+                          <a:ea typeface="Tahoma" panose="020B0604030504040204" pitchFamily="34" charset="0"/>
+                          <a:cs typeface="Tahoma" panose="020B0604030504040204" pitchFamily="34" charset="0"/>
+                        </a:rPr>
+                        <a:t>Freshfood</a:t>
+                      </a:r>
+                      <a:br>
+                        <a:rPr lang="th-TH" sz="1000" dirty="0" u="sng">
+                          <a:solidFill>
+                            <a:schemeClr val="dk1"/>
+                          </a:solidFill>
+                          <a:latin typeface="Tahoma" panose="020B0604030504040204" pitchFamily="34" charset="0"/>
+                          <a:ea typeface="Tahoma" panose="020B0604030504040204" pitchFamily="34" charset="0"/>
+                          <a:cs typeface="Tahoma" panose="020B0604030504040204" pitchFamily="34" charset="0"/>
+                        </a:rPr>
+                      </a:br>
+                      <a:r>
+                        <a:rPr lang="th-TH" sz="1000" dirty="0">
+                          <a:solidFill>
+                            <a:schemeClr val="dk1"/>
+                          </a:solidFill>
+                          <a:latin typeface="Tahoma" panose="020B0604030504040204" pitchFamily="34" charset="0"/>
+                          <a:ea typeface="Tahoma" panose="020B0604030504040204" pitchFamily="34" charset="0"/>
+                          <a:cs typeface="Tahoma" panose="020B0604030504040204" pitchFamily="34" charset="0"/>
+                        </a:rPr>
+                        <a:t>RTC สูงและเพิ่มต่อเนื่อง (YTD -1.14 ล้าน฿ เกือบ 3 เท่าของปีก่อน, ก.ย. -158k) ขณะที่ Loss รวม FF ยัง 7.03% ของยอดขาย</a:t>
+                      </a:r>
+                    </a:p>
+                  </a:txBody>
+                  <a:tcPr/>
+                </a:tc>
+                <a:tc>
+                  <a:txBody>
+                    <a:bodyPr/>
+                    <a:lstStyle/>
+                    <a:p>
+                      <a:pPr marL="228600" indent="-228600">
+                        <a:buAutoNum type="arabicPeriod"/>
+                      </a:pPr>
+                      <a:r>
+                        <a:rPr lang="th-TH" sz="1000" dirty="0">
+                          <a:solidFill>
+                            <a:schemeClr val="dk1"/>
+                          </a:solidFill>
+                          <a:latin typeface="Tahoma" panose="020B0604030504040204" pitchFamily="34" charset="0"/>
+                          <a:ea typeface="Tahoma" panose="020B0604030504040204" pitchFamily="34" charset="0"/>
+                          <a:cs typeface="Tahoma" panose="020B0604030504040204" pitchFamily="34" charset="0"/>
+                        </a:rPr>
+                        <a:t>แผนกวาง RTC ตามเวลาและขั้นตอนที่กำหนด (Butchery/Seafood/Produce เริ่ม 09:00 ลด 20% → วันสุดท้าย 50%, Produce 16:00 → 50%) ไม่ลดซ้ำ ไม่ทำแพ็คคู่</a:t>
+                      </a:r>
+                    </a:p>
+                    <a:p>
+                      <a:pPr marL="228600" indent="-228600">
+                        <a:buAutoNum type="arabicPeriod"/>
+                      </a:pPr>
+                      <a:r>
+                        <a:rPr lang="th-TH" sz="1000" dirty="0">
+                          <a:solidFill>
+                            <a:schemeClr val="dk1"/>
+                          </a:solidFill>
+                          <a:latin typeface="Tahoma" panose="020B0604030504040204" pitchFamily="34" charset="0"/>
+                          <a:ea typeface="Tahoma" panose="020B0604030504040204" pitchFamily="34" charset="0"/>
+                          <a:cs typeface="Tahoma" panose="020B0604030504040204" pitchFamily="34" charset="0"/>
+                        </a:rPr>
+                        <a:t>LP ตรวจสต็อกและลงชื่อใน Mark down Price Form คู่สติ๊กเกอร์ RTC ทุกครั้ง · สติ๊กเกอร์พิมพ์เสีย/เกิน LP ขีดฆ่าและเก็บ</a:t>
+                      </a:r>
+                    </a:p>
+                    <a:p>
+                      <a:pPr marL="228600" indent="-228600">
+                        <a:buAutoNum type="arabicPeriod"/>
+                      </a:pPr>
+                      <a:r>
+                        <a:rPr lang="th-TH" sz="1000" dirty="0">
+                          <a:solidFill>
+                            <a:schemeClr val="dk1"/>
+                          </a:solidFill>
+                          <a:latin typeface="Tahoma" panose="020B0604030504040204" pitchFamily="34" charset="0"/>
+                          <a:ea typeface="Tahoma" panose="020B0604030504040204" pitchFamily="34" charset="0"/>
+                          <a:cs typeface="Tahoma" panose="020B0604030504040204" pitchFamily="34" charset="0"/>
+                        </a:rPr>
+                        <a:t>ผจก.เพิ่ม % ได้ไม่เกิน 75% ใน 2 ชม.ก่อนปิด · ขายไม่หมดตัดจ่าย Code 21 ห้ามเก็บสะสม</a:t>
+                      </a:r>
+                    </a:p>
+                  </a:txBody>
+                  <a:tcPr/>
+                </a:tc>
+                <a:tc>
+                  <a:txBody>
+                    <a:bodyPr/>
+                    <a:lstStyle/>
+                    <a:p>
+                      <a:r>
+                        <a:rPr lang="th-TH" sz="1000" dirty="0">
+                          <a:solidFill>
+                            <a:schemeClr val="dk1"/>
+                          </a:solidFill>
+                          <a:latin typeface="Tahoma" panose="020B0604030504040204" pitchFamily="34" charset="0"/>
+                          <a:ea typeface="Tahoma" panose="020B0604030504040204" pitchFamily="34" charset="0"/>
+                          <a:cs typeface="Tahoma" panose="020B0604030504040204" pitchFamily="34" charset="0"/>
+                        </a:rPr>
+                        <a:t>M1 ,M.Opt,C2,C9,LP</a:t>
+                      </a:r>
+                    </a:p>
+                  </a:txBody>
+                  <a:tcPr/>
+                </a:tc>
+                <a:tc>
+                  <a:txBody>
+                    <a:bodyPr/>
+                    <a:lstStyle/>
+                    <a:p>
+                      <a:r>
+                        <a:rPr lang="th-TH" sz="1000" dirty="0">
+                          <a:solidFill>
+                            <a:schemeClr val="dk1"/>
+                          </a:solidFill>
+                          <a:latin typeface="Tahoma" panose="020B0604030504040204" pitchFamily="34" charset="0"/>
+                          <a:ea typeface="Tahoma" panose="020B0604030504040204" pitchFamily="34" charset="0"/>
+                          <a:cs typeface="Tahoma" panose="020B0604030504040204" pitchFamily="34" charset="0"/>
+                        </a:rPr>
+                        <a:t>Oct – Dec 2026</a:t>
+                      </a:r>
+                    </a:p>
+                  </a:txBody>
+                  <a:tcPr/>
+                </a:tc>
+                <a:tc>
+                  <a:txBody>
+                    <a:bodyPr/>
+                    <a:lstStyle/>
+                    <a:p>
+                      <a:r>
+                        <a:rPr lang="th-TH" sz="1000" dirty="0">
+                          <a:solidFill>
+                            <a:schemeClr val="dk1"/>
+                          </a:solidFill>
+                          <a:latin typeface="Tahoma" panose="020B0604030504040204" pitchFamily="34" charset="0"/>
+                          <a:ea typeface="Tahoma" panose="020B0604030504040204" pitchFamily="34" charset="0"/>
+                          <a:cs typeface="Tahoma" panose="020B0604030504040204" pitchFamily="34" charset="0"/>
+                        </a:rPr>
+                        <a:t>1.LP สรุป RTC เทียบ Damage ของ FF รายสัปดาห์ นำเสนอในประชุม Loss</a:t>
+                      </a:r>
+                    </a:p>
+                    <a:p>
+                      <a:r>
+                        <a:rPr lang="th-TH" sz="1000" dirty="0">
+                          <a:solidFill>
+                            <a:schemeClr val="dk1"/>
+                          </a:solidFill>
+                          <a:latin typeface="Tahoma" panose="020B0604030504040204" pitchFamily="34" charset="0"/>
+                          <a:ea typeface="Tahoma" panose="020B0604030504040204" pitchFamily="34" charset="0"/>
+                          <a:cs typeface="Tahoma" panose="020B0604030504040204" pitchFamily="34" charset="0"/>
+                        </a:rPr>
+                        <a:t>2.LP ตรวจพื้นที่ RTC และสติ๊กเกอร์คงเหลือก่อนปิดร้านทุกวัน</a:t>
+                      </a:r>
+                    </a:p>
+                  </a:txBody>
+                  <a:tcPr/>
+                </a:tc>
+                <a:extLst>
+                  <a:ext uri="{0D108BD9-81ED-4DB2-BD59-A6C34878D82A}">
+                    <a16:rowId xmlns:a16="http://schemas.microsoft.com/office/drawing/2014/main" val="3017775110"/>
+                  </a:ext>
+                </a:extLst>
               </a:tr>
             </a:tbl>
           </a:graphicData>
         </a:graphic>
       </p:graphicFrame>
-      <p:sp>
-        <p:nvSpPr>
-          <p:cNvPr id="5" name="TextBox 4"/>
-          <p:cNvSpPr txBox="1"/>
-          <p:nvPr/>
-        </p:nvSpPr>
-        <p:spPr>
-          <a:xfrm>
-            <a:off x="330000" y="6500000"/>
-            <a:ext cx="11500000" cy="300000"/>
-          </a:xfrm>
-          <a:prstGeom prst="rect">
-            <a:avLst/>
-          </a:prstGeom>
-          <a:noFill/>
-        </p:spPr>
-        <p:txBody>
-          <a:bodyPr wrap="square">
-            <a:spAutoFit/>
-          </a:bodyPr>
-          <a:lstStyle/>
-          <a:p>
-            <a:r>
-              <a:rPr sz="800" b="0">
-                <a:solidFill>
-                  <a:srgbClr val="90A4AE"/>
-                </a:solidFill>
-                <a:latin typeface="Tahoma"/>
-              </a:rPr>
-              <a:t>ที่มา: คลังความรู้ SOP งาน LP Big C Hyper ไทรน้อย (Reconcile/Close/Apply, ตรวจนับ 2026, RTV/เคลม DC, Audit Store 2025) · ใช้ภายในบริษัท</a:t>
-            </a:r>
-          </a:p>
-        </p:txBody>
-      </p:sp>
     </p:spTree>
+    <p:extLst>
+      <p:ext uri="{BB962C8B-B14F-4D97-AF65-F5344CB8AC3E}">
+        <p14:creationId xmlns:p14="http://schemas.microsoft.com/office/powerpoint/2010/main" val="337537747"/>
+      </p:ext>
+    </p:extLst>
   </p:cSld>
   <p:clrMapOvr>
     <a:masterClrMapping/>
